--- a/ppts/6 - Models.pptx
+++ b/ppts/6 - Models.pptx
@@ -294,7 +294,7 @@
           <a:p>
             <a:fld id="{15E4F5CE-CB34-4A0C-9595-867A2C0DB20E}" type="datetimeFigureOut">
               <a:rPr lang="nl-BE" smtClean="0"/>
-              <a:t>9/05/2025</a:t>
+              <a:t>29/05/2026</a:t>
             </a:fld>
             <a:endParaRPr lang="nl-BE"/>
           </a:p>
@@ -471,7 +471,7 @@
           <a:p>
             <a:fld id="{4D53584B-980D-4F7D-BA36-682FCDF648BB}" type="datetimeFigureOut">
               <a:rPr lang="nl-BE" smtClean="0"/>
-              <a:t>9/05/2025</a:t>
+              <a:t>29/05/2026</a:t>
             </a:fld>
             <a:endParaRPr lang="nl-BE"/>
           </a:p>
@@ -2226,7 +2226,7 @@
           <a:p>
             <a:fld id="{F456E141-11F1-487F-A892-18B8A63336C7}" type="datetime1">
               <a:rPr lang="nl-BE" smtClean="0"/>
-              <a:t>9/05/2025</a:t>
+              <a:t>29/05/2026</a:t>
             </a:fld>
             <a:endParaRPr lang="nl-BE"/>
           </a:p>
@@ -2542,7 +2542,7 @@
           <a:p>
             <a:fld id="{85CAFD92-94F2-4CD0-8A1D-AA3295115CEC}" type="datetime1">
               <a:rPr lang="nl-BE" smtClean="0"/>
-              <a:t>9/05/2025</a:t>
+              <a:t>29/05/2026</a:t>
             </a:fld>
             <a:endParaRPr lang="nl-BE"/>
           </a:p>
@@ -2722,7 +2722,7 @@
           <a:p>
             <a:fld id="{02B84EFA-B363-4043-A12E-44B39EC7D05B}" type="datetime1">
               <a:rPr lang="nl-BE" smtClean="0"/>
-              <a:t>9/05/2025</a:t>
+              <a:t>29/05/2026</a:t>
             </a:fld>
             <a:endParaRPr lang="nl-BE"/>
           </a:p>
@@ -2921,7 +2921,7 @@
           <a:p>
             <a:fld id="{B7AA89A6-C9B9-4556-BC9E-5E3CF3322A33}" type="datetime1">
               <a:rPr lang="nl-BE" smtClean="0"/>
-              <a:t>9/05/2025</a:t>
+              <a:t>29/05/2026</a:t>
             </a:fld>
             <a:endParaRPr lang="nl-BE"/>
           </a:p>
@@ -3172,7 +3172,7 @@
           <a:p>
             <a:fld id="{6CEB42D4-4FBB-465F-AE58-8ADBDBF671C8}" type="datetime1">
               <a:rPr lang="nl-BE" smtClean="0"/>
-              <a:t>9/05/2025</a:t>
+              <a:t>29/05/2026</a:t>
             </a:fld>
             <a:endParaRPr lang="nl-BE"/>
           </a:p>
@@ -3404,7 +3404,7 @@
           <a:p>
             <a:fld id="{64B405D5-C0FD-42E0-9EB1-2670F471B7BB}" type="datetime1">
               <a:rPr lang="nl-BE" smtClean="0"/>
-              <a:t>9/05/2025</a:t>
+              <a:t>29/05/2026</a:t>
             </a:fld>
             <a:endParaRPr lang="nl-BE"/>
           </a:p>
@@ -3771,7 +3771,7 @@
           <a:p>
             <a:fld id="{4CB55C39-C031-448F-A58F-CA88F7B6F786}" type="datetime1">
               <a:rPr lang="nl-BE" smtClean="0"/>
-              <a:t>9/05/2025</a:t>
+              <a:t>29/05/2026</a:t>
             </a:fld>
             <a:endParaRPr lang="nl-BE"/>
           </a:p>
@@ -3889,7 +3889,7 @@
           <a:p>
             <a:fld id="{E29307F5-1DF0-4FFF-91A4-1E1A6A26A94A}" type="datetime1">
               <a:rPr lang="nl-BE" smtClean="0"/>
-              <a:t>9/05/2025</a:t>
+              <a:t>29/05/2026</a:t>
             </a:fld>
             <a:endParaRPr lang="nl-BE"/>
           </a:p>
@@ -3984,7 +3984,7 @@
           <a:p>
             <a:fld id="{00A9168B-A159-4E9D-A6C6-C6786C6AB2EB}" type="datetime1">
               <a:rPr lang="nl-BE" smtClean="0"/>
-              <a:t>9/05/2025</a:t>
+              <a:t>29/05/2026</a:t>
             </a:fld>
             <a:endParaRPr lang="nl-BE"/>
           </a:p>
@@ -4261,7 +4261,7 @@
           <a:p>
             <a:fld id="{E9D22159-AF82-4D23-BC06-D4277BDD9BAD}" type="datetime1">
               <a:rPr lang="nl-BE" smtClean="0"/>
-              <a:t>9/05/2025</a:t>
+              <a:t>29/05/2026</a:t>
             </a:fld>
             <a:endParaRPr lang="nl-BE"/>
           </a:p>
@@ -4514,7 +4514,7 @@
           <a:p>
             <a:fld id="{D08A7014-C292-4E4F-926C-1A31F538B52A}" type="datetime1">
               <a:rPr lang="nl-BE" smtClean="0"/>
-              <a:t>9/05/2025</a:t>
+              <a:t>29/05/2026</a:t>
             </a:fld>
             <a:endParaRPr lang="nl-BE"/>
           </a:p>
@@ -4727,7 +4727,7 @@
           <a:p>
             <a:fld id="{E9CC7161-F687-474C-905A-3CCBBA535086}" type="datetime1">
               <a:rPr lang="nl-BE" smtClean="0"/>
-              <a:t>9/05/2025</a:t>
+              <a:t>29/05/2026</a:t>
             </a:fld>
             <a:endParaRPr lang="nl-BE"/>
           </a:p>
@@ -8596,7 +8596,15 @@
           <a:p>
             <a:r>
               <a:rPr lang="en-US" noProof="0" dirty="0"/>
-              <a:t>A </a:t>
+              <a:t>A</a:t>
+            </a:r>
+            <a:r>
+              <a:rPr lang="en-BE" noProof="0" dirty="0"/>
+              <a:t>s</a:t>
+            </a:r>
+            <a:r>
+              <a:rPr lang="en-US" noProof="0" dirty="0"/>
+              <a:t> </a:t>
             </a:r>
             <a:r>
               <a:rPr lang="en-US" noProof="0" dirty="0" err="1"/>
@@ -10929,12 +10937,16 @@
               <a:rPr lang="en-US" dirty="0"/>
             </a:br>
             <a:r>
-              <a:rPr lang="en-US" dirty="0" err="1"/>
-              <a:t>thistree</a:t>
-            </a:r>
-            <a:r>
-              <a:rPr lang="en-US" dirty="0"/>
-              <a:t> are interchangeable</a:t>
+              <a:rPr lang="en-US" dirty="0"/>
+              <a:t>this</a:t>
+            </a:r>
+            <a:r>
+              <a:rPr lang="en-BE" dirty="0"/>
+              <a:t> </a:t>
+            </a:r>
+            <a:r>
+              <a:rPr lang="en-US" dirty="0"/>
+              <a:t>tree are interchangeable</a:t>
             </a:r>
           </a:p>
           <a:p>
@@ -11658,6 +11670,11 @@
               <a:rPr lang="en-US" dirty="0"/>
               <a:t>We can combine the results using classification (majority vote) or regression (average the results</a:t>
             </a:r>
+            <a:r>
+              <a:rPr lang="en-BE" dirty="0"/>
+              <a:t>)</a:t>
+            </a:r>
+            <a:endParaRPr lang="en-US" dirty="0"/>
           </a:p>
           <a:p>
             <a:endParaRPr lang="en-US" dirty="0"/>
@@ -12463,6 +12480,7 @@
             </a:r>
           </a:p>
           <a:p>
+            <a:pPr lvl="1"/>
             <a:r>
               <a:rPr lang="en-US" dirty="0"/>
               <a:t>Getting more data is expensive and not always possible</a:t>
@@ -16326,7 +16344,9 @@
           </a:xfrm>
         </p:spPr>
         <p:txBody>
-          <a:bodyPr/>
+          <a:bodyPr>
+            <a:normAutofit/>
+          </a:bodyPr>
           <a:lstStyle/>
           <a:p>
             <a:r>
@@ -16372,7 +16392,7 @@
           <a:p>
             <a:r>
               <a:rPr lang="en-US" dirty="0"/>
-              <a:t>Check out “6.3 - Diamonds </a:t>
+              <a:t>Check out “3 - Diamonds </a:t>
             </a:r>
             <a:r>
               <a:rPr lang="en-US" dirty="0" err="1"/>

--- a/ppts/6 - Models.pptx
+++ b/ppts/6 - Models.pptx
@@ -5,10 +5,10 @@
     <p:sldMasterId id="2147483648" r:id="rId1"/>
   </p:sldMasterIdLst>
   <p:notesMasterIdLst>
-    <p:notesMasterId r:id="rId67"/>
+    <p:notesMasterId r:id="rId68"/>
   </p:notesMasterIdLst>
   <p:handoutMasterIdLst>
-    <p:handoutMasterId r:id="rId68"/>
+    <p:handoutMasterId r:id="rId69"/>
   </p:handoutMasterIdLst>
   <p:sldIdLst>
     <p:sldId id="256" r:id="rId2"/>
@@ -34,53 +34,54 @@
     <p:sldId id="312" r:id="rId22"/>
     <p:sldId id="313" r:id="rId23"/>
     <p:sldId id="310" r:id="rId24"/>
-    <p:sldId id="314" r:id="rId25"/>
-    <p:sldId id="299" r:id="rId26"/>
-    <p:sldId id="315" r:id="rId27"/>
-    <p:sldId id="316" r:id="rId28"/>
-    <p:sldId id="327" r:id="rId29"/>
-    <p:sldId id="332" r:id="rId30"/>
-    <p:sldId id="333" r:id="rId31"/>
-    <p:sldId id="317" r:id="rId32"/>
-    <p:sldId id="318" r:id="rId33"/>
-    <p:sldId id="331" r:id="rId34"/>
-    <p:sldId id="319" r:id="rId35"/>
-    <p:sldId id="320" r:id="rId36"/>
-    <p:sldId id="321" r:id="rId37"/>
-    <p:sldId id="334" r:id="rId38"/>
-    <p:sldId id="322" r:id="rId39"/>
-    <p:sldId id="326" r:id="rId40"/>
-    <p:sldId id="344" r:id="rId41"/>
-    <p:sldId id="345" r:id="rId42"/>
-    <p:sldId id="323" r:id="rId43"/>
-    <p:sldId id="324" r:id="rId44"/>
-    <p:sldId id="335" r:id="rId45"/>
-    <p:sldId id="337" r:id="rId46"/>
-    <p:sldId id="338" r:id="rId47"/>
-    <p:sldId id="339" r:id="rId48"/>
-    <p:sldId id="341" r:id="rId49"/>
-    <p:sldId id="340" r:id="rId50"/>
-    <p:sldId id="342" r:id="rId51"/>
-    <p:sldId id="336" r:id="rId52"/>
-    <p:sldId id="343" r:id="rId53"/>
-    <p:sldId id="346" r:id="rId54"/>
-    <p:sldId id="347" r:id="rId55"/>
-    <p:sldId id="330" r:id="rId56"/>
-    <p:sldId id="352" r:id="rId57"/>
-    <p:sldId id="349" r:id="rId58"/>
-    <p:sldId id="353" r:id="rId59"/>
-    <p:sldId id="350" r:id="rId60"/>
-    <p:sldId id="354" r:id="rId61"/>
-    <p:sldId id="355" r:id="rId62"/>
-    <p:sldId id="351" r:id="rId63"/>
-    <p:sldId id="356" r:id="rId64"/>
-    <p:sldId id="357" r:id="rId65"/>
-    <p:sldId id="348" r:id="rId66"/>
+    <p:sldId id="358" r:id="rId25"/>
+    <p:sldId id="314" r:id="rId26"/>
+    <p:sldId id="299" r:id="rId27"/>
+    <p:sldId id="315" r:id="rId28"/>
+    <p:sldId id="316" r:id="rId29"/>
+    <p:sldId id="327" r:id="rId30"/>
+    <p:sldId id="332" r:id="rId31"/>
+    <p:sldId id="333" r:id="rId32"/>
+    <p:sldId id="317" r:id="rId33"/>
+    <p:sldId id="318" r:id="rId34"/>
+    <p:sldId id="331" r:id="rId35"/>
+    <p:sldId id="319" r:id="rId36"/>
+    <p:sldId id="320" r:id="rId37"/>
+    <p:sldId id="321" r:id="rId38"/>
+    <p:sldId id="334" r:id="rId39"/>
+    <p:sldId id="322" r:id="rId40"/>
+    <p:sldId id="326" r:id="rId41"/>
+    <p:sldId id="344" r:id="rId42"/>
+    <p:sldId id="345" r:id="rId43"/>
+    <p:sldId id="323" r:id="rId44"/>
+    <p:sldId id="324" r:id="rId45"/>
+    <p:sldId id="335" r:id="rId46"/>
+    <p:sldId id="337" r:id="rId47"/>
+    <p:sldId id="338" r:id="rId48"/>
+    <p:sldId id="339" r:id="rId49"/>
+    <p:sldId id="341" r:id="rId50"/>
+    <p:sldId id="340" r:id="rId51"/>
+    <p:sldId id="342" r:id="rId52"/>
+    <p:sldId id="336" r:id="rId53"/>
+    <p:sldId id="343" r:id="rId54"/>
+    <p:sldId id="346" r:id="rId55"/>
+    <p:sldId id="347" r:id="rId56"/>
+    <p:sldId id="330" r:id="rId57"/>
+    <p:sldId id="352" r:id="rId58"/>
+    <p:sldId id="349" r:id="rId59"/>
+    <p:sldId id="353" r:id="rId60"/>
+    <p:sldId id="350" r:id="rId61"/>
+    <p:sldId id="354" r:id="rId62"/>
+    <p:sldId id="355" r:id="rId63"/>
+    <p:sldId id="351" r:id="rId64"/>
+    <p:sldId id="356" r:id="rId65"/>
+    <p:sldId id="357" r:id="rId66"/>
+    <p:sldId id="348" r:id="rId67"/>
   </p:sldIdLst>
   <p:sldSz cx="12192000" cy="6858000"/>
   <p:notesSz cx="6858000" cy="9144000"/>
   <p:custDataLst>
-    <p:tags r:id="rId69"/>
+    <p:tags r:id="rId70"/>
   </p:custDataLst>
   <p:defaultTextStyle>
     <a:defPPr>
@@ -294,7 +295,7 @@
           <a:p>
             <a:fld id="{15E4F5CE-CB34-4A0C-9595-867A2C0DB20E}" type="datetimeFigureOut">
               <a:rPr lang="nl-BE" smtClean="0"/>
-              <a:t>29/05/2026</a:t>
+              <a:t>4/06/2026</a:t>
             </a:fld>
             <a:endParaRPr lang="nl-BE"/>
           </a:p>
@@ -471,7 +472,7 @@
           <a:p>
             <a:fld id="{4D53584B-980D-4F7D-BA36-682FCDF648BB}" type="datetimeFigureOut">
               <a:rPr lang="nl-BE" smtClean="0"/>
-              <a:t>29/05/2026</a:t>
+              <a:t>4/06/2026</a:t>
             </a:fld>
             <a:endParaRPr lang="nl-BE"/>
           </a:p>
@@ -891,7 +892,7 @@
           <a:p>
             <a:fld id="{2F1A7F70-BA74-4B93-A504-6802F0D0CD34}" type="slidenum">
               <a:rPr lang="nl-BE" smtClean="0"/>
-              <a:t>47</a:t>
+              <a:t>48</a:t>
             </a:fld>
             <a:endParaRPr lang="nl-BE"/>
           </a:p>
@@ -978,7 +979,7 @@
           <a:p>
             <a:fld id="{2F1A7F70-BA74-4B93-A504-6802F0D0CD34}" type="slidenum">
               <a:rPr lang="nl-BE" smtClean="0"/>
-              <a:t>48</a:t>
+              <a:t>49</a:t>
             </a:fld>
             <a:endParaRPr lang="nl-BE"/>
           </a:p>
@@ -1078,7 +1079,7 @@
           <a:p>
             <a:fld id="{2F1A7F70-BA74-4B93-A504-6802F0D0CD34}" type="slidenum">
               <a:rPr lang="nl-BE" smtClean="0"/>
-              <a:t>50</a:t>
+              <a:t>51</a:t>
             </a:fld>
             <a:endParaRPr lang="nl-BE"/>
           </a:p>
@@ -1186,7 +1187,7 @@
           <a:p>
             <a:fld id="{2F1A7F70-BA74-4B93-A504-6802F0D0CD34}" type="slidenum">
               <a:rPr lang="nl-BE" smtClean="0"/>
-              <a:t>54</a:t>
+              <a:t>55</a:t>
             </a:fld>
             <a:endParaRPr lang="nl-BE"/>
           </a:p>
@@ -1887,7 +1888,7 @@
           <a:p>
             <a:fld id="{2F1A7F70-BA74-4B93-A504-6802F0D0CD34}" type="slidenum">
               <a:rPr lang="nl-BE" smtClean="0"/>
-              <a:t>34</a:t>
+              <a:t>35</a:t>
             </a:fld>
             <a:endParaRPr lang="nl-BE"/>
           </a:p>
@@ -1974,7 +1975,7 @@
           <a:p>
             <a:fld id="{2F1A7F70-BA74-4B93-A504-6802F0D0CD34}" type="slidenum">
               <a:rPr lang="nl-BE" smtClean="0"/>
-              <a:t>39</a:t>
+              <a:t>40</a:t>
             </a:fld>
             <a:endParaRPr lang="nl-BE"/>
           </a:p>
@@ -2037,6 +2038,34 @@
           <a:bodyPr/>
           <a:lstStyle/>
           <a:p>
+            <a:r>
+              <a:rPr lang="en-BE" dirty="0"/>
+              <a:t>* Full dataset, but modern models such as </a:t>
+            </a:r>
+            <a:r>
+              <a:rPr lang="en-BE" dirty="0" err="1"/>
+              <a:t>XGBoost</a:t>
+            </a:r>
+            <a:r>
+              <a:rPr lang="en-BE" dirty="0"/>
+              <a:t>, </a:t>
+            </a:r>
+            <a:r>
+              <a:rPr lang="en-BE" dirty="0" err="1"/>
+              <a:t>LightGBM</a:t>
+            </a:r>
+            <a:r>
+              <a:rPr lang="en-BE" dirty="0"/>
+              <a:t> and </a:t>
+            </a:r>
+            <a:r>
+              <a:rPr lang="en-BE" dirty="0" err="1"/>
+              <a:t>CatBoost</a:t>
+            </a:r>
+            <a:r>
+              <a:rPr lang="en-BE" dirty="0"/>
+              <a:t> use a subset here and retrain on a different subset taking into account the residual error for the previous set.</a:t>
+            </a:r>
             <a:endParaRPr lang="en-US" dirty="0"/>
           </a:p>
         </p:txBody>
@@ -2058,7 +2087,7 @@
           <a:p>
             <a:fld id="{2F1A7F70-BA74-4B93-A504-6802F0D0CD34}" type="slidenum">
               <a:rPr lang="nl-BE" smtClean="0"/>
-              <a:t>43</a:t>
+              <a:t>44</a:t>
             </a:fld>
             <a:endParaRPr lang="nl-BE"/>
           </a:p>
@@ -2226,7 +2255,7 @@
           <a:p>
             <a:fld id="{F456E141-11F1-487F-A892-18B8A63336C7}" type="datetime1">
               <a:rPr lang="nl-BE" smtClean="0"/>
-              <a:t>29/05/2026</a:t>
+              <a:t>4/06/2026</a:t>
             </a:fld>
             <a:endParaRPr lang="nl-BE"/>
           </a:p>
@@ -2542,7 +2571,7 @@
           <a:p>
             <a:fld id="{85CAFD92-94F2-4CD0-8A1D-AA3295115CEC}" type="datetime1">
               <a:rPr lang="nl-BE" smtClean="0"/>
-              <a:t>29/05/2026</a:t>
+              <a:t>4/06/2026</a:t>
             </a:fld>
             <a:endParaRPr lang="nl-BE"/>
           </a:p>
@@ -2722,7 +2751,7 @@
           <a:p>
             <a:fld id="{02B84EFA-B363-4043-A12E-44B39EC7D05B}" type="datetime1">
               <a:rPr lang="nl-BE" smtClean="0"/>
-              <a:t>29/05/2026</a:t>
+              <a:t>4/06/2026</a:t>
             </a:fld>
             <a:endParaRPr lang="nl-BE"/>
           </a:p>
@@ -2921,7 +2950,7 @@
           <a:p>
             <a:fld id="{B7AA89A6-C9B9-4556-BC9E-5E3CF3322A33}" type="datetime1">
               <a:rPr lang="nl-BE" smtClean="0"/>
-              <a:t>29/05/2026</a:t>
+              <a:t>4/06/2026</a:t>
             </a:fld>
             <a:endParaRPr lang="nl-BE"/>
           </a:p>
@@ -3172,7 +3201,7 @@
           <a:p>
             <a:fld id="{6CEB42D4-4FBB-465F-AE58-8ADBDBF671C8}" type="datetime1">
               <a:rPr lang="nl-BE" smtClean="0"/>
-              <a:t>29/05/2026</a:t>
+              <a:t>4/06/2026</a:t>
             </a:fld>
             <a:endParaRPr lang="nl-BE"/>
           </a:p>
@@ -3404,7 +3433,7 @@
           <a:p>
             <a:fld id="{64B405D5-C0FD-42E0-9EB1-2670F471B7BB}" type="datetime1">
               <a:rPr lang="nl-BE" smtClean="0"/>
-              <a:t>29/05/2026</a:t>
+              <a:t>4/06/2026</a:t>
             </a:fld>
             <a:endParaRPr lang="nl-BE"/>
           </a:p>
@@ -3771,7 +3800,7 @@
           <a:p>
             <a:fld id="{4CB55C39-C031-448F-A58F-CA88F7B6F786}" type="datetime1">
               <a:rPr lang="nl-BE" smtClean="0"/>
-              <a:t>29/05/2026</a:t>
+              <a:t>4/06/2026</a:t>
             </a:fld>
             <a:endParaRPr lang="nl-BE"/>
           </a:p>
@@ -3889,7 +3918,7 @@
           <a:p>
             <a:fld id="{E29307F5-1DF0-4FFF-91A4-1E1A6A26A94A}" type="datetime1">
               <a:rPr lang="nl-BE" smtClean="0"/>
-              <a:t>29/05/2026</a:t>
+              <a:t>4/06/2026</a:t>
             </a:fld>
             <a:endParaRPr lang="nl-BE"/>
           </a:p>
@@ -3984,7 +4013,7 @@
           <a:p>
             <a:fld id="{00A9168B-A159-4E9D-A6C6-C6786C6AB2EB}" type="datetime1">
               <a:rPr lang="nl-BE" smtClean="0"/>
-              <a:t>29/05/2026</a:t>
+              <a:t>4/06/2026</a:t>
             </a:fld>
             <a:endParaRPr lang="nl-BE"/>
           </a:p>
@@ -4261,7 +4290,7 @@
           <a:p>
             <a:fld id="{E9D22159-AF82-4D23-BC06-D4277BDD9BAD}" type="datetime1">
               <a:rPr lang="nl-BE" smtClean="0"/>
-              <a:t>29/05/2026</a:t>
+              <a:t>4/06/2026</a:t>
             </a:fld>
             <a:endParaRPr lang="nl-BE"/>
           </a:p>
@@ -4514,7 +4543,7 @@
           <a:p>
             <a:fld id="{D08A7014-C292-4E4F-926C-1A31F538B52A}" type="datetime1">
               <a:rPr lang="nl-BE" smtClean="0"/>
-              <a:t>29/05/2026</a:t>
+              <a:t>4/06/2026</a:t>
             </a:fld>
             <a:endParaRPr lang="nl-BE"/>
           </a:p>
@@ -4727,7 +4756,7 @@
           <a:p>
             <a:fld id="{E9CC7161-F687-474C-905A-3CCBBA535086}" type="datetime1">
               <a:rPr lang="nl-BE" smtClean="0"/>
-              <a:t>29/05/2026</a:t>
+              <a:t>4/06/2026</a:t>
             </a:fld>
             <a:endParaRPr lang="nl-BE"/>
           </a:p>
@@ -9325,7 +9354,7 @@
         </p:spPr>
         <p:txBody>
           <a:bodyPr>
-            <a:normAutofit fontScale="92500"/>
+            <a:normAutofit fontScale="92500" lnSpcReduction="10000"/>
           </a:bodyPr>
           <a:lstStyle/>
           <a:p>
@@ -9379,6 +9408,17 @@
               <a:rPr lang="en-US" dirty="0"/>
               <a:t>Finally, we average the results to get a more reliable estimate of model performance</a:t>
             </a:r>
+            <a:endParaRPr lang="en-BE" dirty="0"/>
+          </a:p>
+          <a:p>
+            <a:r>
+              <a:rPr lang="en-BE" dirty="0"/>
+              <a:t>Final model: trained on the full dataset</a:t>
+            </a:r>
+            <a:endParaRPr lang="en-US" dirty="0"/>
+          </a:p>
+          <a:p>
+            <a:endParaRPr lang="en-BE" dirty="0"/>
           </a:p>
         </p:txBody>
       </p:sp>
@@ -9483,7 +9523,7 @@
           <p:cNvPr id="2" name="Title 1">
             <a:extLst>
               <a:ext uri="{FF2B5EF4-FFF2-40B4-BE49-F238E27FC236}">
-                <a16:creationId xmlns:a16="http://schemas.microsoft.com/office/drawing/2014/main" id="{8700EFF4-BAAF-C96C-D81E-0D9DDE71402D}"/>
+                <a16:creationId xmlns:a16="http://schemas.microsoft.com/office/drawing/2014/main" id="{E345A6A6-E7B8-EDDE-6810-6431A285C7F6}"/>
               </a:ext>
             </a:extLst>
           </p:cNvPr>
@@ -9500,8 +9540,8 @@
           <a:lstStyle/>
           <a:p>
             <a:r>
-              <a:rPr lang="en-US" dirty="0"/>
-              <a:t>Cross-Validation</a:t>
+              <a:rPr lang="en-BE" dirty="0"/>
+              <a:t>Cross-validation</a:t>
             </a:r>
           </a:p>
         </p:txBody>
@@ -9511,7 +9551,7 @@
           <p:cNvPr id="3" name="Content Placeholder 2">
             <a:extLst>
               <a:ext uri="{FF2B5EF4-FFF2-40B4-BE49-F238E27FC236}">
-                <a16:creationId xmlns:a16="http://schemas.microsoft.com/office/drawing/2014/main" id="{CBD4971E-67B5-474E-3992-85F99615EB9D}"/>
+                <a16:creationId xmlns:a16="http://schemas.microsoft.com/office/drawing/2014/main" id="{42890CE8-A2DE-1FE0-136A-A3E48A2A1D6B}"/>
               </a:ext>
             </a:extLst>
           </p:cNvPr>
@@ -9522,79 +9562,72 @@
             <p:ph idx="1"/>
           </p:nvPr>
         </p:nvSpPr>
-        <p:spPr/>
+        <p:spPr>
+          <a:xfrm>
+            <a:off x="582705" y="1550894"/>
+            <a:ext cx="9033906" cy="4626069"/>
+          </a:xfrm>
+        </p:spPr>
         <p:txBody>
           <a:bodyPr/>
           <a:lstStyle/>
           <a:p>
             <a:r>
-              <a:rPr lang="en-US" dirty="0"/>
-              <a:t>Benefits</a:t>
+              <a:rPr lang="en-BE" i="1" dirty="0"/>
+              <a:t>“So all this effort simply to get a number?”</a:t>
+            </a:r>
+          </a:p>
+          <a:p>
+            <a:endParaRPr lang="en-BE" dirty="0"/>
+          </a:p>
+          <a:p>
+            <a:r>
+              <a:rPr lang="en-BE" dirty="0"/>
+              <a:t>No! We’re going through all this effort to get several of these numbers</a:t>
             </a:r>
           </a:p>
           <a:p>
             <a:pPr lvl="1"/>
             <a:r>
-              <a:rPr lang="en-US" dirty="0"/>
-              <a:t>Makes better use of limited data</a:t>
+              <a:rPr lang="en-BE" dirty="0"/>
+              <a:t>Different models</a:t>
             </a:r>
           </a:p>
           <a:p>
             <a:pPr lvl="1"/>
             <a:r>
-              <a:rPr lang="en-US" dirty="0"/>
-              <a:t>Gives a more robust estimate of model performance</a:t>
+              <a:rPr lang="en-BE" dirty="0"/>
+              <a:t>Different param</a:t>
+            </a:r>
+            <a:r>
+              <a:rPr lang="fr-BE" dirty="0"/>
+              <a:t>e</a:t>
+            </a:r>
+            <a:r>
+              <a:rPr lang="en-BE" dirty="0" err="1"/>
+              <a:t>ters</a:t>
+            </a:r>
+            <a:r>
+              <a:rPr lang="en-BE" dirty="0"/>
+              <a:t> of the same models</a:t>
+            </a:r>
+          </a:p>
+          <a:p>
+            <a:r>
+              <a:rPr lang="en-BE" dirty="0"/>
+              <a:t>We then take the information we learned from this and use that to retrain the final model on the full dataset</a:t>
             </a:r>
           </a:p>
           <a:p>
             <a:pPr lvl="1"/>
             <a:r>
-              <a:rPr lang="en-US" dirty="0"/>
-              <a:t>Helps prevent overfitting to a single train/test split</a:t>
-            </a:r>
-          </a:p>
-          <a:p>
-            <a:r>
-              <a:rPr lang="en-US" dirty="0"/>
-              <a:t>Downsides</a:t>
+              <a:rPr lang="en-BE" dirty="0"/>
+              <a:t>As we should always do before deploying a model</a:t>
             </a:r>
           </a:p>
           <a:p>
             <a:pPr lvl="1"/>
-            <a:r>
-              <a:rPr lang="nl-BE" dirty="0" err="1"/>
-              <a:t>Computationally</a:t>
-            </a:r>
-            <a:r>
-              <a:rPr lang="nl-BE" dirty="0"/>
-              <a:t> </a:t>
-            </a:r>
-            <a:r>
-              <a:rPr lang="nl-BE" dirty="0" err="1"/>
-              <a:t>expensive</a:t>
-            </a:r>
-            <a:r>
-              <a:rPr lang="nl-BE" dirty="0"/>
-              <a:t> (</a:t>
-            </a:r>
-            <a:r>
-              <a:rPr lang="en-US" dirty="0"/>
-              <a:t>it trains the model multiple times)</a:t>
-            </a:r>
-          </a:p>
-          <a:p>
-            <a:pPr lvl="1"/>
-            <a:r>
-              <a:rPr lang="en-US" dirty="0"/>
-              <a:t>Unusable for time series (violates causality)</a:t>
-            </a:r>
-          </a:p>
-          <a:p>
-            <a:pPr lvl="1"/>
-            <a:r>
-              <a:rPr lang="en-US" dirty="0"/>
-              <a:t>Variance in results (can lead to unstable performance estimates)</a:t>
-            </a:r>
+            <a:endParaRPr lang="en-BE" dirty="0"/>
           </a:p>
         </p:txBody>
       </p:sp>
@@ -9603,7 +9636,7 @@
           <p:cNvPr id="4" name="Slide Number Placeholder 3">
             <a:extLst>
               <a:ext uri="{FF2B5EF4-FFF2-40B4-BE49-F238E27FC236}">
-                <a16:creationId xmlns:a16="http://schemas.microsoft.com/office/drawing/2014/main" id="{6EFD01B7-5FF4-D5FD-E8C9-D0B77F6E7BF6}"/>
+                <a16:creationId xmlns:a16="http://schemas.microsoft.com/office/drawing/2014/main" id="{7B1B4581-86CA-3337-4ADC-82E143BBF69C}"/>
               </a:ext>
             </a:extLst>
           </p:cNvPr>
@@ -9628,10 +9661,46 @@
           </a:p>
         </p:txBody>
       </p:sp>
+      <p:pic>
+        <p:nvPicPr>
+          <p:cNvPr id="5" name="Picture 4" descr="A screenshot of a test&#10;&#10;AI-generated content may be incorrect.">
+            <a:extLst>
+              <a:ext uri="{FF2B5EF4-FFF2-40B4-BE49-F238E27FC236}">
+                <a16:creationId xmlns:a16="http://schemas.microsoft.com/office/drawing/2014/main" id="{52851133-0A4C-BFDD-6363-EEAEEE8568BF}"/>
+              </a:ext>
+            </a:extLst>
+          </p:cNvPr>
+          <p:cNvPicPr>
+            <a:picLocks noChangeAspect="1"/>
+          </p:cNvPicPr>
+          <p:nvPr/>
+        </p:nvPicPr>
+        <p:blipFill>
+          <a:blip r:embed="rId2">
+            <a:extLst>
+              <a:ext uri="{28A0092B-C50C-407E-A947-70E740481C1C}">
+                <a14:useLocalDpi xmlns:a14="http://schemas.microsoft.com/office/drawing/2010/main" val="0"/>
+              </a:ext>
+            </a:extLst>
+          </a:blip>
+          <a:stretch>
+            <a:fillRect/>
+          </a:stretch>
+        </p:blipFill>
+        <p:spPr>
+          <a:xfrm>
+            <a:off x="9692100" y="1870099"/>
+            <a:ext cx="2181653" cy="3987657"/>
+          </a:xfrm>
+          <a:prstGeom prst="rect">
+            <a:avLst/>
+          </a:prstGeom>
+        </p:spPr>
+      </p:pic>
     </p:spTree>
     <p:extLst>
       <p:ext uri="{BB962C8B-B14F-4D97-AF65-F5344CB8AC3E}">
-        <p14:creationId xmlns:p14="http://schemas.microsoft.com/office/powerpoint/2010/main" val="3585099118"/>
+        <p14:creationId xmlns:p14="http://schemas.microsoft.com/office/powerpoint/2010/main" val="1426403988"/>
       </p:ext>
     </p:extLst>
   </p:cSld>
@@ -9663,7 +9732,7 @@
           <p:cNvPr id="2" name="Title 1">
             <a:extLst>
               <a:ext uri="{FF2B5EF4-FFF2-40B4-BE49-F238E27FC236}">
-                <a16:creationId xmlns:a16="http://schemas.microsoft.com/office/drawing/2014/main" id="{5C926E98-DA72-E8D0-6B85-E7B173052C7F}"/>
+                <a16:creationId xmlns:a16="http://schemas.microsoft.com/office/drawing/2014/main" id="{8700EFF4-BAAF-C96C-D81E-0D9DDE71402D}"/>
               </a:ext>
             </a:extLst>
           </p:cNvPr>
@@ -9681,7 +9750,7 @@
           <a:p>
             <a:r>
               <a:rPr lang="en-US" dirty="0"/>
-              <a:t>Evaluating AUC-ROC</a:t>
+              <a:t>Cross-Validation</a:t>
             </a:r>
           </a:p>
         </p:txBody>
@@ -9691,7 +9760,7 @@
           <p:cNvPr id="3" name="Content Placeholder 2">
             <a:extLst>
               <a:ext uri="{FF2B5EF4-FFF2-40B4-BE49-F238E27FC236}">
-                <a16:creationId xmlns:a16="http://schemas.microsoft.com/office/drawing/2014/main" id="{DBAA9C9F-6751-3FA0-84F2-03CF6F21BC14}"/>
+                <a16:creationId xmlns:a16="http://schemas.microsoft.com/office/drawing/2014/main" id="{CBD4971E-67B5-474E-3992-85F99615EB9D}"/>
               </a:ext>
             </a:extLst>
           </p:cNvPr>
@@ -9709,33 +9778,71 @@
           <a:p>
             <a:r>
               <a:rPr lang="en-US" dirty="0"/>
-              <a:t>One model -&gt; one ROC curve -&gt; one number for AUC</a:t>
-            </a:r>
-          </a:p>
-          <a:p>
-            <a:r>
-              <a:rPr lang="en-US" dirty="0"/>
-              <a:t>More models -&gt; more ROC curves -&gt; compare multiple AUC’s</a:t>
+              <a:t>Benefits</a:t>
             </a:r>
           </a:p>
           <a:p>
             <a:pPr lvl="1"/>
             <a:r>
               <a:rPr lang="en-US" dirty="0"/>
-              <a:t>Same model with different tuning</a:t>
+              <a:t>Makes better use of limited data</a:t>
             </a:r>
           </a:p>
           <a:p>
             <a:pPr lvl="1"/>
             <a:r>
               <a:rPr lang="en-US" dirty="0"/>
-              <a:t>Or a different model</a:t>
-            </a:r>
-          </a:p>
-          <a:p>
-            <a:r>
-              <a:rPr lang="en-US" dirty="0"/>
-              <a:t>More models -&gt; more training and testing of models</a:t>
+              <a:t>Gives a more robust estimate of model performance</a:t>
+            </a:r>
+          </a:p>
+          <a:p>
+            <a:pPr lvl="1"/>
+            <a:r>
+              <a:rPr lang="en-US" dirty="0"/>
+              <a:t>Helps prevent overfitting to a single train/test split</a:t>
+            </a:r>
+          </a:p>
+          <a:p>
+            <a:r>
+              <a:rPr lang="en-US" dirty="0"/>
+              <a:t>Downsides</a:t>
+            </a:r>
+          </a:p>
+          <a:p>
+            <a:pPr lvl="1"/>
+            <a:r>
+              <a:rPr lang="nl-BE" dirty="0" err="1"/>
+              <a:t>Computationally</a:t>
+            </a:r>
+            <a:r>
+              <a:rPr lang="nl-BE" dirty="0"/>
+              <a:t> </a:t>
+            </a:r>
+            <a:r>
+              <a:rPr lang="nl-BE" dirty="0" err="1"/>
+              <a:t>expensive</a:t>
+            </a:r>
+            <a:r>
+              <a:rPr lang="nl-BE" dirty="0"/>
+              <a:t> (</a:t>
+            </a:r>
+            <a:r>
+              <a:rPr lang="en-US" dirty="0"/>
+              <a:t>it trains the model multiple times)</a:t>
+            </a:r>
+          </a:p>
+          <a:p>
+            <a:pPr lvl="1"/>
+            <a:r>
+              <a:rPr lang="en-US" dirty="0"/>
+              <a:t>Unusable for time series (violates causality)</a:t>
+            </a:r>
+          </a:p>
+          <a:p>
+            <a:pPr lvl="1"/>
+            <a:r>
+              <a:rPr lang="en-US" dirty="0"/>
+              <a:t>Variance in results (can lead to unstable performance estimates)</a:t>
             </a:r>
           </a:p>
         </p:txBody>
@@ -9745,7 +9852,7 @@
           <p:cNvPr id="4" name="Slide Number Placeholder 3">
             <a:extLst>
               <a:ext uri="{FF2B5EF4-FFF2-40B4-BE49-F238E27FC236}">
-                <a16:creationId xmlns:a16="http://schemas.microsoft.com/office/drawing/2014/main" id="{BE9C0D9C-A1CF-EC22-0DB0-5E81C1B3CCB1}"/>
+                <a16:creationId xmlns:a16="http://schemas.microsoft.com/office/drawing/2014/main" id="{6EFD01B7-5FF4-D5FD-E8C9-D0B77F6E7BF6}"/>
               </a:ext>
             </a:extLst>
           </p:cNvPr>
@@ -9765,6 +9872,148 @@
               <a:rPr lang="nl-BE" smtClean="0"/>
               <a:pPr/>
               <a:t>25</a:t>
+            </a:fld>
+            <a:endParaRPr lang="nl-BE"/>
+          </a:p>
+        </p:txBody>
+      </p:sp>
+    </p:spTree>
+    <p:extLst>
+      <p:ext uri="{BB962C8B-B14F-4D97-AF65-F5344CB8AC3E}">
+        <p14:creationId xmlns:p14="http://schemas.microsoft.com/office/powerpoint/2010/main" val="3585099118"/>
+      </p:ext>
+    </p:extLst>
+  </p:cSld>
+  <p:clrMapOvr>
+    <a:masterClrMapping/>
+  </p:clrMapOvr>
+</p:sld>
+</file>
+
+<file path=ppt/slides/slide26.xml><?xml version="1.0" encoding="utf-8"?>
+<p:sld xmlns:a="http://schemas.openxmlformats.org/drawingml/2006/main" xmlns:r="http://schemas.openxmlformats.org/officeDocument/2006/relationships" xmlns:p="http://schemas.openxmlformats.org/presentationml/2006/main">
+  <p:cSld>
+    <p:spTree>
+      <p:nvGrpSpPr>
+        <p:cNvPr id="1" name=""/>
+        <p:cNvGrpSpPr/>
+        <p:nvPr/>
+      </p:nvGrpSpPr>
+      <p:grpSpPr>
+        <a:xfrm>
+          <a:off x="0" y="0"/>
+          <a:ext cx="0" cy="0"/>
+          <a:chOff x="0" y="0"/>
+          <a:chExt cx="0" cy="0"/>
+        </a:xfrm>
+      </p:grpSpPr>
+      <p:sp>
+        <p:nvSpPr>
+          <p:cNvPr id="2" name="Title 1">
+            <a:extLst>
+              <a:ext uri="{FF2B5EF4-FFF2-40B4-BE49-F238E27FC236}">
+                <a16:creationId xmlns:a16="http://schemas.microsoft.com/office/drawing/2014/main" id="{5C926E98-DA72-E8D0-6B85-E7B173052C7F}"/>
+              </a:ext>
+            </a:extLst>
+          </p:cNvPr>
+          <p:cNvSpPr>
+            <a:spLocks noGrp="1"/>
+          </p:cNvSpPr>
+          <p:nvPr>
+            <p:ph type="title"/>
+          </p:nvPr>
+        </p:nvSpPr>
+        <p:spPr/>
+        <p:txBody>
+          <a:bodyPr/>
+          <a:lstStyle/>
+          <a:p>
+            <a:r>
+              <a:rPr lang="en-US" dirty="0"/>
+              <a:t>Evaluating AUC-ROC</a:t>
+            </a:r>
+          </a:p>
+        </p:txBody>
+      </p:sp>
+      <p:sp>
+        <p:nvSpPr>
+          <p:cNvPr id="3" name="Content Placeholder 2">
+            <a:extLst>
+              <a:ext uri="{FF2B5EF4-FFF2-40B4-BE49-F238E27FC236}">
+                <a16:creationId xmlns:a16="http://schemas.microsoft.com/office/drawing/2014/main" id="{DBAA9C9F-6751-3FA0-84F2-03CF6F21BC14}"/>
+              </a:ext>
+            </a:extLst>
+          </p:cNvPr>
+          <p:cNvSpPr>
+            <a:spLocks noGrp="1"/>
+          </p:cNvSpPr>
+          <p:nvPr>
+            <p:ph idx="1"/>
+          </p:nvPr>
+        </p:nvSpPr>
+        <p:spPr/>
+        <p:txBody>
+          <a:bodyPr/>
+          <a:lstStyle/>
+          <a:p>
+            <a:r>
+              <a:rPr lang="en-US" dirty="0"/>
+              <a:t>One model -&gt; one ROC curve -&gt; one number for AUC</a:t>
+            </a:r>
+          </a:p>
+          <a:p>
+            <a:r>
+              <a:rPr lang="en-US" dirty="0"/>
+              <a:t>More models -&gt; more ROC curves -&gt; compare multiple AUC’s</a:t>
+            </a:r>
+          </a:p>
+          <a:p>
+            <a:pPr lvl="1"/>
+            <a:r>
+              <a:rPr lang="en-US" dirty="0"/>
+              <a:t>Same model with different tuning</a:t>
+            </a:r>
+          </a:p>
+          <a:p>
+            <a:pPr lvl="1"/>
+            <a:r>
+              <a:rPr lang="en-US" dirty="0"/>
+              <a:t>Or a different model</a:t>
+            </a:r>
+          </a:p>
+          <a:p>
+            <a:r>
+              <a:rPr lang="en-US" dirty="0"/>
+              <a:t>More models -&gt; more training and testing of models</a:t>
+            </a:r>
+          </a:p>
+        </p:txBody>
+      </p:sp>
+      <p:sp>
+        <p:nvSpPr>
+          <p:cNvPr id="4" name="Slide Number Placeholder 3">
+            <a:extLst>
+              <a:ext uri="{FF2B5EF4-FFF2-40B4-BE49-F238E27FC236}">
+                <a16:creationId xmlns:a16="http://schemas.microsoft.com/office/drawing/2014/main" id="{BE9C0D9C-A1CF-EC22-0DB0-5E81C1B3CCB1}"/>
+              </a:ext>
+            </a:extLst>
+          </p:cNvPr>
+          <p:cNvSpPr>
+            <a:spLocks noGrp="1"/>
+          </p:cNvSpPr>
+          <p:nvPr>
+            <p:ph type="sldNum" sz="quarter" idx="12"/>
+          </p:nvPr>
+        </p:nvSpPr>
+        <p:spPr/>
+        <p:txBody>
+          <a:bodyPr/>
+          <a:lstStyle/>
+          <a:p>
+            <a:fld id="{FE1B3154-47D9-4402-8EDB-E791933DC0B9}" type="slidenum">
+              <a:rPr lang="nl-BE" smtClean="0"/>
+              <a:pPr/>
+              <a:t>26</a:t>
             </a:fld>
             <a:endParaRPr lang="nl-BE"/>
           </a:p>
@@ -9813,161 +10062,6 @@
 </p:sld>
 </file>
 
-<file path=ppt/slides/slide26.xml><?xml version="1.0" encoding="utf-8"?>
-<p:sld xmlns:a="http://schemas.openxmlformats.org/drawingml/2006/main" xmlns:r="http://schemas.openxmlformats.org/officeDocument/2006/relationships" xmlns:p="http://schemas.openxmlformats.org/presentationml/2006/main">
-  <p:cSld>
-    <p:spTree>
-      <p:nvGrpSpPr>
-        <p:cNvPr id="1" name=""/>
-        <p:cNvGrpSpPr/>
-        <p:nvPr/>
-      </p:nvGrpSpPr>
-      <p:grpSpPr>
-        <a:xfrm>
-          <a:off x="0" y="0"/>
-          <a:ext cx="0" cy="0"/>
-          <a:chOff x="0" y="0"/>
-          <a:chExt cx="0" cy="0"/>
-        </a:xfrm>
-      </p:grpSpPr>
-      <p:sp>
-        <p:nvSpPr>
-          <p:cNvPr id="2" name="Title 1">
-            <a:extLst>
-              <a:ext uri="{FF2B5EF4-FFF2-40B4-BE49-F238E27FC236}">
-                <a16:creationId xmlns:a16="http://schemas.microsoft.com/office/drawing/2014/main" id="{0C6FE739-7D70-53DB-B2C4-85CA96E9E354}"/>
-              </a:ext>
-            </a:extLst>
-          </p:cNvPr>
-          <p:cNvSpPr>
-            <a:spLocks noGrp="1"/>
-          </p:cNvSpPr>
-          <p:nvPr>
-            <p:ph type="title"/>
-          </p:nvPr>
-        </p:nvSpPr>
-        <p:spPr/>
-        <p:txBody>
-          <a:bodyPr/>
-          <a:lstStyle/>
-          <a:p>
-            <a:r>
-              <a:rPr lang="en-US" dirty="0"/>
-              <a:t>The models</a:t>
-            </a:r>
-          </a:p>
-        </p:txBody>
-      </p:sp>
-      <p:sp>
-        <p:nvSpPr>
-          <p:cNvPr id="3" name="Content Placeholder 2">
-            <a:extLst>
-              <a:ext uri="{FF2B5EF4-FFF2-40B4-BE49-F238E27FC236}">
-                <a16:creationId xmlns:a16="http://schemas.microsoft.com/office/drawing/2014/main" id="{E7971FA0-E2B1-8438-2E5B-188F7D295833}"/>
-              </a:ext>
-            </a:extLst>
-          </p:cNvPr>
-          <p:cNvSpPr>
-            <a:spLocks noGrp="1"/>
-          </p:cNvSpPr>
-          <p:nvPr>
-            <p:ph idx="1"/>
-          </p:nvPr>
-        </p:nvSpPr>
-        <p:spPr/>
-        <p:txBody>
-          <a:bodyPr/>
-          <a:lstStyle/>
-          <a:p>
-            <a:r>
-              <a:rPr lang="en-US" dirty="0"/>
-              <a:t>(finally)</a:t>
-            </a:r>
-          </a:p>
-          <a:p>
-            <a:r>
-              <a:rPr lang="en-US" dirty="0"/>
-              <a:t>There are a lot of models</a:t>
-            </a:r>
-          </a:p>
-          <a:p>
-            <a:r>
-              <a:rPr lang="en-US" dirty="0"/>
-              <a:t>We’ll start with the very easy and understandable ones, and stop before it get’s really complicated</a:t>
-            </a:r>
-          </a:p>
-          <a:p>
-            <a:pPr lvl="1"/>
-            <a:r>
-              <a:rPr lang="en-US" dirty="0"/>
-              <a:t>Which is a pity, as one could expect these models to be better</a:t>
-            </a:r>
-          </a:p>
-          <a:p>
-            <a:pPr lvl="1"/>
-            <a:r>
-              <a:rPr lang="en-US" dirty="0"/>
-              <a:t>But the prerequisites of this course were not “a PHD in mathematics”</a:t>
-            </a:r>
-          </a:p>
-          <a:p>
-            <a:pPr lvl="1"/>
-            <a:r>
-              <a:rPr lang="en-US" dirty="0"/>
-              <a:t>Also, even in machine learning deep learning networks are becoming more prevalent, and we have another course for those</a:t>
-            </a:r>
-          </a:p>
-          <a:p>
-            <a:r>
-              <a:rPr lang="en-US" dirty="0"/>
-              <a:t>The good part: using a difficult model is the same as using an easy one!</a:t>
-            </a:r>
-          </a:p>
-        </p:txBody>
-      </p:sp>
-      <p:sp>
-        <p:nvSpPr>
-          <p:cNvPr id="4" name="Slide Number Placeholder 3">
-            <a:extLst>
-              <a:ext uri="{FF2B5EF4-FFF2-40B4-BE49-F238E27FC236}">
-                <a16:creationId xmlns:a16="http://schemas.microsoft.com/office/drawing/2014/main" id="{A535D900-FFD8-A903-CA6F-C14990B8FD56}"/>
-              </a:ext>
-            </a:extLst>
-          </p:cNvPr>
-          <p:cNvSpPr>
-            <a:spLocks noGrp="1"/>
-          </p:cNvSpPr>
-          <p:nvPr>
-            <p:ph type="sldNum" sz="quarter" idx="12"/>
-          </p:nvPr>
-        </p:nvSpPr>
-        <p:spPr/>
-        <p:txBody>
-          <a:bodyPr/>
-          <a:lstStyle/>
-          <a:p>
-            <a:fld id="{FE1B3154-47D9-4402-8EDB-E791933DC0B9}" type="slidenum">
-              <a:rPr lang="nl-BE" smtClean="0"/>
-              <a:pPr/>
-              <a:t>26</a:t>
-            </a:fld>
-            <a:endParaRPr lang="nl-BE"/>
-          </a:p>
-        </p:txBody>
-      </p:sp>
-    </p:spTree>
-    <p:extLst>
-      <p:ext uri="{BB962C8B-B14F-4D97-AF65-F5344CB8AC3E}">
-        <p14:creationId xmlns:p14="http://schemas.microsoft.com/office/powerpoint/2010/main" val="1282093533"/>
-      </p:ext>
-    </p:extLst>
-  </p:cSld>
-  <p:clrMapOvr>
-    <a:masterClrMapping/>
-  </p:clrMapOvr>
-</p:sld>
-</file>
-
 <file path=ppt/slides/slide27.xml><?xml version="1.0" encoding="utf-8"?>
 <p:sld xmlns:a="http://schemas.openxmlformats.org/drawingml/2006/main" xmlns:r="http://schemas.openxmlformats.org/officeDocument/2006/relationships" xmlns:p="http://schemas.openxmlformats.org/presentationml/2006/main">
   <p:cSld>
@@ -9990,7 +10084,7 @@
           <p:cNvPr id="2" name="Title 1">
             <a:extLst>
               <a:ext uri="{FF2B5EF4-FFF2-40B4-BE49-F238E27FC236}">
-                <a16:creationId xmlns:a16="http://schemas.microsoft.com/office/drawing/2014/main" id="{69732351-5D7A-5806-A7F5-717DDEACB064}"/>
+                <a16:creationId xmlns:a16="http://schemas.microsoft.com/office/drawing/2014/main" id="{0C6FE739-7D70-53DB-B2C4-85CA96E9E354}"/>
               </a:ext>
             </a:extLst>
           </p:cNvPr>
@@ -10008,7 +10102,7 @@
           <a:p>
             <a:r>
               <a:rPr lang="en-US" dirty="0"/>
-              <a:t>An overview of the model</a:t>
+              <a:t>The models</a:t>
             </a:r>
           </a:p>
         </p:txBody>
@@ -10018,7 +10112,7 @@
           <p:cNvPr id="3" name="Content Placeholder 2">
             <a:extLst>
               <a:ext uri="{FF2B5EF4-FFF2-40B4-BE49-F238E27FC236}">
-                <a16:creationId xmlns:a16="http://schemas.microsoft.com/office/drawing/2014/main" id="{434BADD2-C13F-28E6-8A13-59984298F4C9}"/>
+                <a16:creationId xmlns:a16="http://schemas.microsoft.com/office/drawing/2014/main" id="{E7971FA0-E2B1-8438-2E5B-188F7D295833}"/>
               </a:ext>
             </a:extLst>
           </p:cNvPr>
@@ -10036,24 +10130,46 @@
           <a:p>
             <a:r>
               <a:rPr lang="en-US" dirty="0"/>
-              <a:t>See 6.2 - Model </a:t>
-            </a:r>
-            <a:r>
-              <a:rPr lang="en-US" dirty="0" err="1"/>
-              <a:t>overview.ipynb</a:t>
-            </a:r>
-            <a:endParaRPr lang="en-US" dirty="0"/>
-          </a:p>
-          <a:p>
-            <a:endParaRPr lang="en-US" dirty="0"/>
-          </a:p>
-          <a:p>
-            <a:endParaRPr lang="en-US" dirty="0"/>
-          </a:p>
-          <a:p>
-            <a:r>
-              <a:rPr lang="en-US" dirty="0"/>
-              <a:t>(Sometimes a slide simply isn’t big enough)</a:t>
+              <a:t>(finally)</a:t>
+            </a:r>
+          </a:p>
+          <a:p>
+            <a:r>
+              <a:rPr lang="en-US" dirty="0"/>
+              <a:t>There are a lot of models</a:t>
+            </a:r>
+          </a:p>
+          <a:p>
+            <a:r>
+              <a:rPr lang="en-US" dirty="0"/>
+              <a:t>We’ll start with the very easy and understandable ones, and stop before it get’s really complicated</a:t>
+            </a:r>
+          </a:p>
+          <a:p>
+            <a:pPr lvl="1"/>
+            <a:r>
+              <a:rPr lang="en-US" dirty="0"/>
+              <a:t>Which is a pity, as one could expect these models to be better</a:t>
+            </a:r>
+          </a:p>
+          <a:p>
+            <a:pPr lvl="1"/>
+            <a:r>
+              <a:rPr lang="en-US" dirty="0"/>
+              <a:t>But the prerequisites of this course were not “a PHD in mathematics”</a:t>
+            </a:r>
+          </a:p>
+          <a:p>
+            <a:pPr lvl="1"/>
+            <a:r>
+              <a:rPr lang="en-US" dirty="0"/>
+              <a:t>Also, even in machine learning deep learning networks are becoming more prevalent, and we have another course for those</a:t>
+            </a:r>
+          </a:p>
+          <a:p>
+            <a:r>
+              <a:rPr lang="en-US" dirty="0"/>
+              <a:t>The good part: using a difficult model is the same as using an easy one!</a:t>
             </a:r>
           </a:p>
         </p:txBody>
@@ -10063,7 +10179,7 @@
           <p:cNvPr id="4" name="Slide Number Placeholder 3">
             <a:extLst>
               <a:ext uri="{FF2B5EF4-FFF2-40B4-BE49-F238E27FC236}">
-                <a16:creationId xmlns:a16="http://schemas.microsoft.com/office/drawing/2014/main" id="{9D7B0E44-F739-CA75-0B11-86F6594D1D7B}"/>
+                <a16:creationId xmlns:a16="http://schemas.microsoft.com/office/drawing/2014/main" id="{A535D900-FFD8-A903-CA6F-C14990B8FD56}"/>
               </a:ext>
             </a:extLst>
           </p:cNvPr>
@@ -10091,7 +10207,7 @@
     </p:spTree>
     <p:extLst>
       <p:ext uri="{BB962C8B-B14F-4D97-AF65-F5344CB8AC3E}">
-        <p14:creationId xmlns:p14="http://schemas.microsoft.com/office/powerpoint/2010/main" val="1855632947"/>
+        <p14:creationId xmlns:p14="http://schemas.microsoft.com/office/powerpoint/2010/main" val="1282093533"/>
       </p:ext>
     </p:extLst>
   </p:cSld>
@@ -10123,7 +10239,7 @@
           <p:cNvPr id="2" name="Title 1">
             <a:extLst>
               <a:ext uri="{FF2B5EF4-FFF2-40B4-BE49-F238E27FC236}">
-                <a16:creationId xmlns:a16="http://schemas.microsoft.com/office/drawing/2014/main" id="{4C73F12E-4442-A77C-8921-B384554DCD44}"/>
+                <a16:creationId xmlns:a16="http://schemas.microsoft.com/office/drawing/2014/main" id="{69732351-5D7A-5806-A7F5-717DDEACB064}"/>
               </a:ext>
             </a:extLst>
           </p:cNvPr>
@@ -10141,7 +10257,7 @@
           <a:p>
             <a:r>
               <a:rPr lang="en-US" dirty="0"/>
-              <a:t>Classification or regression?</a:t>
+              <a:t>An overview of the model</a:t>
             </a:r>
           </a:p>
         </p:txBody>
@@ -10151,7 +10267,7 @@
           <p:cNvPr id="3" name="Content Placeholder 2">
             <a:extLst>
               <a:ext uri="{FF2B5EF4-FFF2-40B4-BE49-F238E27FC236}">
-                <a16:creationId xmlns:a16="http://schemas.microsoft.com/office/drawing/2014/main" id="{135A5C96-9B7F-DE47-C5F8-43E5B96F0A91}"/>
+                <a16:creationId xmlns:a16="http://schemas.microsoft.com/office/drawing/2014/main" id="{434BADD2-C13F-28E6-8A13-59984298F4C9}"/>
               </a:ext>
             </a:extLst>
           </p:cNvPr>
@@ -10169,51 +10285,24 @@
           <a:p>
             <a:r>
               <a:rPr lang="en-US" dirty="0"/>
-              <a:t>Most models can be used for both classification and regression, despite this not always making sense (like a decision tree)</a:t>
-            </a:r>
-          </a:p>
-          <a:p>
-            <a:r>
-              <a:rPr lang="en-US" dirty="0"/>
-              <a:t>Can be used for both:</a:t>
-            </a:r>
-          </a:p>
-          <a:p>
-            <a:pPr lvl="1"/>
-            <a:r>
-              <a:rPr lang="en-US" dirty="0"/>
-              <a:t>Decision trees, random forest, gradient boosting, </a:t>
+              <a:t>See 6.2 - Model </a:t>
             </a:r>
             <a:r>
               <a:rPr lang="en-US" dirty="0" err="1"/>
-              <a:t>XGBoost</a:t>
+              <a:t>overview.ipynb</a:t>
             </a:r>
             <a:endParaRPr lang="en-US" dirty="0"/>
           </a:p>
           <a:p>
-            <a:r>
-              <a:rPr lang="en-US" dirty="0"/>
-              <a:t>Can only be used for classification</a:t>
-            </a:r>
-          </a:p>
-          <a:p>
-            <a:pPr lvl="1"/>
-            <a:r>
-              <a:rPr lang="en-US" dirty="0"/>
-              <a:t>Logistic regression</a:t>
-            </a:r>
-          </a:p>
-          <a:p>
-            <a:r>
-              <a:rPr lang="en-US" dirty="0"/>
-              <a:t>Can only be used for regression</a:t>
-            </a:r>
-          </a:p>
-          <a:p>
-            <a:pPr lvl="1"/>
-            <a:r>
-              <a:rPr lang="en-US" dirty="0"/>
-              <a:t>Linear regression</a:t>
+            <a:endParaRPr lang="en-US" dirty="0"/>
+          </a:p>
+          <a:p>
+            <a:endParaRPr lang="en-US" dirty="0"/>
+          </a:p>
+          <a:p>
+            <a:r>
+              <a:rPr lang="en-US" dirty="0"/>
+              <a:t>(Sometimes a slide simply isn’t big enough)</a:t>
             </a:r>
           </a:p>
         </p:txBody>
@@ -10223,7 +10312,7 @@
           <p:cNvPr id="4" name="Slide Number Placeholder 3">
             <a:extLst>
               <a:ext uri="{FF2B5EF4-FFF2-40B4-BE49-F238E27FC236}">
-                <a16:creationId xmlns:a16="http://schemas.microsoft.com/office/drawing/2014/main" id="{3D253568-8619-0BE3-3142-59F12157F16F}"/>
+                <a16:creationId xmlns:a16="http://schemas.microsoft.com/office/drawing/2014/main" id="{9D7B0E44-F739-CA75-0B11-86F6594D1D7B}"/>
               </a:ext>
             </a:extLst>
           </p:cNvPr>
@@ -10251,7 +10340,7 @@
     </p:spTree>
     <p:extLst>
       <p:ext uri="{BB962C8B-B14F-4D97-AF65-F5344CB8AC3E}">
-        <p14:creationId xmlns:p14="http://schemas.microsoft.com/office/powerpoint/2010/main" val="3295631290"/>
+        <p14:creationId xmlns:p14="http://schemas.microsoft.com/office/powerpoint/2010/main" val="1855632947"/>
       </p:ext>
     </p:extLst>
   </p:cSld>
@@ -10283,7 +10372,7 @@
           <p:cNvPr id="2" name="Title 1">
             <a:extLst>
               <a:ext uri="{FF2B5EF4-FFF2-40B4-BE49-F238E27FC236}">
-                <a16:creationId xmlns:a16="http://schemas.microsoft.com/office/drawing/2014/main" id="{AB0A81BC-826F-D5B3-6F8B-3C0BEE767042}"/>
+                <a16:creationId xmlns:a16="http://schemas.microsoft.com/office/drawing/2014/main" id="{4C73F12E-4442-A77C-8921-B384554DCD44}"/>
               </a:ext>
             </a:extLst>
           </p:cNvPr>
@@ -10301,7 +10390,79 @@
           <a:p>
             <a:r>
               <a:rPr lang="en-US" dirty="0"/>
-              <a:t>Decision boundary</a:t>
+              <a:t>Classification or regression?</a:t>
+            </a:r>
+          </a:p>
+        </p:txBody>
+      </p:sp>
+      <p:sp>
+        <p:nvSpPr>
+          <p:cNvPr id="3" name="Content Placeholder 2">
+            <a:extLst>
+              <a:ext uri="{FF2B5EF4-FFF2-40B4-BE49-F238E27FC236}">
+                <a16:creationId xmlns:a16="http://schemas.microsoft.com/office/drawing/2014/main" id="{135A5C96-9B7F-DE47-C5F8-43E5B96F0A91}"/>
+              </a:ext>
+            </a:extLst>
+          </p:cNvPr>
+          <p:cNvSpPr>
+            <a:spLocks noGrp="1"/>
+          </p:cNvSpPr>
+          <p:nvPr>
+            <p:ph idx="1"/>
+          </p:nvPr>
+        </p:nvSpPr>
+        <p:spPr/>
+        <p:txBody>
+          <a:bodyPr/>
+          <a:lstStyle/>
+          <a:p>
+            <a:r>
+              <a:rPr lang="en-US" dirty="0"/>
+              <a:t>Most models can be used for both classification and regression, despite this not always making sense (like a decision tree)</a:t>
+            </a:r>
+          </a:p>
+          <a:p>
+            <a:r>
+              <a:rPr lang="en-US" dirty="0"/>
+              <a:t>Can be used for both:</a:t>
+            </a:r>
+          </a:p>
+          <a:p>
+            <a:pPr lvl="1"/>
+            <a:r>
+              <a:rPr lang="en-US" dirty="0"/>
+              <a:t>Decision trees, random forest, gradient boosting, </a:t>
+            </a:r>
+            <a:r>
+              <a:rPr lang="en-US" dirty="0" err="1"/>
+              <a:t>XGBoost</a:t>
+            </a:r>
+            <a:endParaRPr lang="en-US" dirty="0"/>
+          </a:p>
+          <a:p>
+            <a:r>
+              <a:rPr lang="en-US" dirty="0"/>
+              <a:t>Can only be used for classification</a:t>
+            </a:r>
+          </a:p>
+          <a:p>
+            <a:pPr lvl="1"/>
+            <a:r>
+              <a:rPr lang="en-US" dirty="0"/>
+              <a:t>Logistic regression</a:t>
+            </a:r>
+          </a:p>
+          <a:p>
+            <a:r>
+              <a:rPr lang="en-US" dirty="0"/>
+              <a:t>Can only be used for regression</a:t>
+            </a:r>
+          </a:p>
+          <a:p>
+            <a:pPr lvl="1"/>
+            <a:r>
+              <a:rPr lang="en-US" dirty="0"/>
+              <a:t>Linear regression</a:t>
             </a:r>
           </a:p>
         </p:txBody>
@@ -10311,7 +10472,7 @@
           <p:cNvPr id="4" name="Slide Number Placeholder 3">
             <a:extLst>
               <a:ext uri="{FF2B5EF4-FFF2-40B4-BE49-F238E27FC236}">
-                <a16:creationId xmlns:a16="http://schemas.microsoft.com/office/drawing/2014/main" id="{7A2A7613-D824-F2B4-D257-1DBCF52FACE3}"/>
+                <a16:creationId xmlns:a16="http://schemas.microsoft.com/office/drawing/2014/main" id="{3D253568-8619-0BE3-3142-59F12157F16F}"/>
               </a:ext>
             </a:extLst>
           </p:cNvPr>
@@ -10331,6 +10492,231 @@
               <a:rPr lang="nl-BE" smtClean="0"/>
               <a:pPr/>
               <a:t>29</a:t>
+            </a:fld>
+            <a:endParaRPr lang="nl-BE"/>
+          </a:p>
+        </p:txBody>
+      </p:sp>
+    </p:spTree>
+    <p:extLst>
+      <p:ext uri="{BB962C8B-B14F-4D97-AF65-F5344CB8AC3E}">
+        <p14:creationId xmlns:p14="http://schemas.microsoft.com/office/powerpoint/2010/main" val="3295631290"/>
+      </p:ext>
+    </p:extLst>
+  </p:cSld>
+  <p:clrMapOvr>
+    <a:masterClrMapping/>
+  </p:clrMapOvr>
+</p:sld>
+</file>
+
+<file path=ppt/slides/slide3.xml><?xml version="1.0" encoding="utf-8"?>
+<p:sld xmlns:a="http://schemas.openxmlformats.org/drawingml/2006/main" xmlns:r="http://schemas.openxmlformats.org/officeDocument/2006/relationships" xmlns:p="http://schemas.openxmlformats.org/presentationml/2006/main">
+  <p:cSld>
+    <p:spTree>
+      <p:nvGrpSpPr>
+        <p:cNvPr id="1" name=""/>
+        <p:cNvGrpSpPr/>
+        <p:nvPr/>
+      </p:nvGrpSpPr>
+      <p:grpSpPr>
+        <a:xfrm>
+          <a:off x="0" y="0"/>
+          <a:ext cx="0" cy="0"/>
+          <a:chOff x="0" y="0"/>
+          <a:chExt cx="0" cy="0"/>
+        </a:xfrm>
+      </p:grpSpPr>
+      <p:sp>
+        <p:nvSpPr>
+          <p:cNvPr id="2" name="Title 1">
+            <a:extLst>
+              <a:ext uri="{FF2B5EF4-FFF2-40B4-BE49-F238E27FC236}">
+                <a16:creationId xmlns:a16="http://schemas.microsoft.com/office/drawing/2014/main" id="{56B8408B-7E08-FB0E-4CFA-6A16EFDE6061}"/>
+              </a:ext>
+            </a:extLst>
+          </p:cNvPr>
+          <p:cNvSpPr>
+            <a:spLocks noGrp="1"/>
+          </p:cNvSpPr>
+          <p:nvPr>
+            <p:ph type="title"/>
+          </p:nvPr>
+        </p:nvSpPr>
+        <p:spPr/>
+        <p:txBody>
+          <a:bodyPr/>
+          <a:lstStyle/>
+          <a:p>
+            <a:r>
+              <a:rPr lang="en-US" noProof="0" dirty="0"/>
+              <a:t>How good is the model?</a:t>
+            </a:r>
+          </a:p>
+        </p:txBody>
+      </p:sp>
+      <p:sp>
+        <p:nvSpPr>
+          <p:cNvPr id="3" name="Content Placeholder 2">
+            <a:extLst>
+              <a:ext uri="{FF2B5EF4-FFF2-40B4-BE49-F238E27FC236}">
+                <a16:creationId xmlns:a16="http://schemas.microsoft.com/office/drawing/2014/main" id="{83192201-3D1E-6149-67F8-8CC3EEC4DAF0}"/>
+              </a:ext>
+            </a:extLst>
+          </p:cNvPr>
+          <p:cNvSpPr>
+            <a:spLocks noGrp="1"/>
+          </p:cNvSpPr>
+          <p:nvPr>
+            <p:ph idx="1"/>
+          </p:nvPr>
+        </p:nvSpPr>
+        <p:spPr/>
+        <p:txBody>
+          <a:bodyPr/>
+          <a:lstStyle/>
+          <a:p>
+            <a:r>
+              <a:rPr lang="en-US" noProof="0" dirty="0"/>
+              <a:t>The model should generalize to unseen data</a:t>
+            </a:r>
+          </a:p>
+          <a:p>
+            <a:pPr lvl="1"/>
+            <a:r>
+              <a:rPr lang="en-US" noProof="0" dirty="0"/>
+              <a:t>If you are using it to predict</a:t>
+            </a:r>
+            <a:endParaRPr lang="en-US" dirty="0"/>
+          </a:p>
+          <a:p>
+            <a:pPr lvl="1"/>
+            <a:r>
+              <a:rPr lang="en-US" dirty="0"/>
+              <a:t>I</a:t>
+            </a:r>
+            <a:r>
+              <a:rPr lang="en-US" noProof="0" dirty="0"/>
+              <a:t>f it’s just to explain the data overfitting isn’t a problem</a:t>
+            </a:r>
+          </a:p>
+          <a:p>
+            <a:r>
+              <a:rPr lang="en-US" noProof="0" dirty="0"/>
+              <a:t>Split up the given dataset:</a:t>
+            </a:r>
+          </a:p>
+          <a:p>
+            <a:pPr lvl="1"/>
+            <a:r>
+              <a:rPr lang="en-US" noProof="0" dirty="0"/>
+              <a:t>Build model on training dataset (e.g. 70%)</a:t>
+            </a:r>
+          </a:p>
+          <a:p>
+            <a:pPr lvl="1"/>
+            <a:r>
+              <a:rPr lang="en-US" noProof="0" dirty="0"/>
+              <a:t>Test model using test set (remaining 30%)</a:t>
+            </a:r>
+          </a:p>
+          <a:p>
+            <a:r>
+              <a:rPr lang="en-US" noProof="0" dirty="0"/>
+              <a:t>Calculate RMSE (or recall) on both datasets</a:t>
+            </a:r>
+          </a:p>
+          <a:p>
+            <a:r>
+              <a:rPr lang="en-US" noProof="0" dirty="0"/>
+              <a:t>Check that the RMSE on training is as low as it can be, but that the RMSE of test isn’t significantly higher</a:t>
+            </a:r>
+          </a:p>
+        </p:txBody>
+      </p:sp>
+    </p:spTree>
+    <p:extLst>
+      <p:ext uri="{BB962C8B-B14F-4D97-AF65-F5344CB8AC3E}">
+        <p14:creationId xmlns:p14="http://schemas.microsoft.com/office/powerpoint/2010/main" val="577045871"/>
+      </p:ext>
+    </p:extLst>
+  </p:cSld>
+  <p:clrMapOvr>
+    <a:masterClrMapping/>
+  </p:clrMapOvr>
+</p:sld>
+</file>
+
+<file path=ppt/slides/slide30.xml><?xml version="1.0" encoding="utf-8"?>
+<p:sld xmlns:a="http://schemas.openxmlformats.org/drawingml/2006/main" xmlns:r="http://schemas.openxmlformats.org/officeDocument/2006/relationships" xmlns:p="http://schemas.openxmlformats.org/presentationml/2006/main">
+  <p:cSld>
+    <p:spTree>
+      <p:nvGrpSpPr>
+        <p:cNvPr id="1" name=""/>
+        <p:cNvGrpSpPr/>
+        <p:nvPr/>
+      </p:nvGrpSpPr>
+      <p:grpSpPr>
+        <a:xfrm>
+          <a:off x="0" y="0"/>
+          <a:ext cx="0" cy="0"/>
+          <a:chOff x="0" y="0"/>
+          <a:chExt cx="0" cy="0"/>
+        </a:xfrm>
+      </p:grpSpPr>
+      <p:sp>
+        <p:nvSpPr>
+          <p:cNvPr id="2" name="Title 1">
+            <a:extLst>
+              <a:ext uri="{FF2B5EF4-FFF2-40B4-BE49-F238E27FC236}">
+                <a16:creationId xmlns:a16="http://schemas.microsoft.com/office/drawing/2014/main" id="{AB0A81BC-826F-D5B3-6F8B-3C0BEE767042}"/>
+              </a:ext>
+            </a:extLst>
+          </p:cNvPr>
+          <p:cNvSpPr>
+            <a:spLocks noGrp="1"/>
+          </p:cNvSpPr>
+          <p:nvPr>
+            <p:ph type="title"/>
+          </p:nvPr>
+        </p:nvSpPr>
+        <p:spPr/>
+        <p:txBody>
+          <a:bodyPr/>
+          <a:lstStyle/>
+          <a:p>
+            <a:r>
+              <a:rPr lang="en-US" dirty="0"/>
+              <a:t>Decision boundary</a:t>
+            </a:r>
+          </a:p>
+        </p:txBody>
+      </p:sp>
+      <p:sp>
+        <p:nvSpPr>
+          <p:cNvPr id="4" name="Slide Number Placeholder 3">
+            <a:extLst>
+              <a:ext uri="{FF2B5EF4-FFF2-40B4-BE49-F238E27FC236}">
+                <a16:creationId xmlns:a16="http://schemas.microsoft.com/office/drawing/2014/main" id="{7A2A7613-D824-F2B4-D257-1DBCF52FACE3}"/>
+              </a:ext>
+            </a:extLst>
+          </p:cNvPr>
+          <p:cNvSpPr>
+            <a:spLocks noGrp="1"/>
+          </p:cNvSpPr>
+          <p:nvPr>
+            <p:ph type="sldNum" sz="quarter" idx="12"/>
+          </p:nvPr>
+        </p:nvSpPr>
+        <p:spPr/>
+        <p:txBody>
+          <a:bodyPr/>
+          <a:lstStyle/>
+          <a:p>
+            <a:fld id="{FE1B3154-47D9-4402-8EDB-E791933DC0B9}" type="slidenum">
+              <a:rPr lang="nl-BE" smtClean="0"/>
+              <a:pPr/>
+              <a:t>30</a:t>
             </a:fld>
             <a:endParaRPr lang="nl-BE"/>
           </a:p>
@@ -10443,144 +10829,7 @@
 </p:sld>
 </file>
 
-<file path=ppt/slides/slide3.xml><?xml version="1.0" encoding="utf-8"?>
-<p:sld xmlns:a="http://schemas.openxmlformats.org/drawingml/2006/main" xmlns:r="http://schemas.openxmlformats.org/officeDocument/2006/relationships" xmlns:p="http://schemas.openxmlformats.org/presentationml/2006/main">
-  <p:cSld>
-    <p:spTree>
-      <p:nvGrpSpPr>
-        <p:cNvPr id="1" name=""/>
-        <p:cNvGrpSpPr/>
-        <p:nvPr/>
-      </p:nvGrpSpPr>
-      <p:grpSpPr>
-        <a:xfrm>
-          <a:off x="0" y="0"/>
-          <a:ext cx="0" cy="0"/>
-          <a:chOff x="0" y="0"/>
-          <a:chExt cx="0" cy="0"/>
-        </a:xfrm>
-      </p:grpSpPr>
-      <p:sp>
-        <p:nvSpPr>
-          <p:cNvPr id="2" name="Title 1">
-            <a:extLst>
-              <a:ext uri="{FF2B5EF4-FFF2-40B4-BE49-F238E27FC236}">
-                <a16:creationId xmlns:a16="http://schemas.microsoft.com/office/drawing/2014/main" id="{56B8408B-7E08-FB0E-4CFA-6A16EFDE6061}"/>
-              </a:ext>
-            </a:extLst>
-          </p:cNvPr>
-          <p:cNvSpPr>
-            <a:spLocks noGrp="1"/>
-          </p:cNvSpPr>
-          <p:nvPr>
-            <p:ph type="title"/>
-          </p:nvPr>
-        </p:nvSpPr>
-        <p:spPr/>
-        <p:txBody>
-          <a:bodyPr/>
-          <a:lstStyle/>
-          <a:p>
-            <a:r>
-              <a:rPr lang="en-US" noProof="0" dirty="0"/>
-              <a:t>How good is the model?</a:t>
-            </a:r>
-          </a:p>
-        </p:txBody>
-      </p:sp>
-      <p:sp>
-        <p:nvSpPr>
-          <p:cNvPr id="3" name="Content Placeholder 2">
-            <a:extLst>
-              <a:ext uri="{FF2B5EF4-FFF2-40B4-BE49-F238E27FC236}">
-                <a16:creationId xmlns:a16="http://schemas.microsoft.com/office/drawing/2014/main" id="{83192201-3D1E-6149-67F8-8CC3EEC4DAF0}"/>
-              </a:ext>
-            </a:extLst>
-          </p:cNvPr>
-          <p:cNvSpPr>
-            <a:spLocks noGrp="1"/>
-          </p:cNvSpPr>
-          <p:nvPr>
-            <p:ph idx="1"/>
-          </p:nvPr>
-        </p:nvSpPr>
-        <p:spPr/>
-        <p:txBody>
-          <a:bodyPr/>
-          <a:lstStyle/>
-          <a:p>
-            <a:r>
-              <a:rPr lang="en-US" noProof="0" dirty="0"/>
-              <a:t>The model should generalize to unseen data</a:t>
-            </a:r>
-          </a:p>
-          <a:p>
-            <a:pPr lvl="1"/>
-            <a:r>
-              <a:rPr lang="en-US" noProof="0" dirty="0"/>
-              <a:t>If you are using it to predict</a:t>
-            </a:r>
-            <a:endParaRPr lang="en-US" dirty="0"/>
-          </a:p>
-          <a:p>
-            <a:pPr lvl="1"/>
-            <a:r>
-              <a:rPr lang="en-US" dirty="0"/>
-              <a:t>I</a:t>
-            </a:r>
-            <a:r>
-              <a:rPr lang="en-US" noProof="0" dirty="0"/>
-              <a:t>f it’s just to explain the data overfitting isn’t a problem</a:t>
-            </a:r>
-          </a:p>
-          <a:p>
-            <a:r>
-              <a:rPr lang="en-US" noProof="0" dirty="0"/>
-              <a:t>Split up the given dataset:</a:t>
-            </a:r>
-          </a:p>
-          <a:p>
-            <a:pPr lvl="1"/>
-            <a:r>
-              <a:rPr lang="en-US" noProof="0" dirty="0"/>
-              <a:t>Build model on training dataset (e.g. 70%)</a:t>
-            </a:r>
-          </a:p>
-          <a:p>
-            <a:pPr lvl="1"/>
-            <a:r>
-              <a:rPr lang="en-US" noProof="0" dirty="0"/>
-              <a:t>Test model using test set (remaining 30%)</a:t>
-            </a:r>
-          </a:p>
-          <a:p>
-            <a:r>
-              <a:rPr lang="en-US" noProof="0" dirty="0"/>
-              <a:t>Calculate RMSE (or recall) on both datasets</a:t>
-            </a:r>
-          </a:p>
-          <a:p>
-            <a:r>
-              <a:rPr lang="en-US" noProof="0" dirty="0"/>
-              <a:t>Check that the RMSE on training is as low as it can be, but that the RMSE of test isn’t significantly higher</a:t>
-            </a:r>
-          </a:p>
-        </p:txBody>
-      </p:sp>
-    </p:spTree>
-    <p:extLst>
-      <p:ext uri="{BB962C8B-B14F-4D97-AF65-F5344CB8AC3E}">
-        <p14:creationId xmlns:p14="http://schemas.microsoft.com/office/powerpoint/2010/main" val="577045871"/>
-      </p:ext>
-    </p:extLst>
-  </p:cSld>
-  <p:clrMapOvr>
-    <a:masterClrMapping/>
-  </p:clrMapOvr>
-</p:sld>
-</file>
-
-<file path=ppt/slides/slide30.xml><?xml version="1.0" encoding="utf-8"?>
+<file path=ppt/slides/slide31.xml><?xml version="1.0" encoding="utf-8"?>
 <p:sld xmlns:a="http://schemas.openxmlformats.org/drawingml/2006/main" xmlns:r="http://schemas.openxmlformats.org/officeDocument/2006/relationships" xmlns:p="http://schemas.openxmlformats.org/presentationml/2006/main">
   <p:cSld>
     <p:spTree>
@@ -10761,7 +11010,7 @@
             <a:fld id="{FE1B3154-47D9-4402-8EDB-E791933DC0B9}" type="slidenum">
               <a:rPr lang="nl-BE" smtClean="0"/>
               <a:pPr/>
-              <a:t>30</a:t>
+              <a:t>31</a:t>
             </a:fld>
             <a:endParaRPr lang="nl-BE"/>
           </a:p>
@@ -10771,223 +11020,6 @@
     <p:extLst>
       <p:ext uri="{BB962C8B-B14F-4D97-AF65-F5344CB8AC3E}">
         <p14:creationId xmlns:p14="http://schemas.microsoft.com/office/powerpoint/2010/main" val="3750084254"/>
-      </p:ext>
-    </p:extLst>
-  </p:cSld>
-  <p:clrMapOvr>
-    <a:masterClrMapping/>
-  </p:clrMapOvr>
-</p:sld>
-</file>
-
-<file path=ppt/slides/slide31.xml><?xml version="1.0" encoding="utf-8"?>
-<p:sld xmlns:a="http://schemas.openxmlformats.org/drawingml/2006/main" xmlns:r="http://schemas.openxmlformats.org/officeDocument/2006/relationships" xmlns:p="http://schemas.openxmlformats.org/presentationml/2006/main">
-  <p:cSld>
-    <p:spTree>
-      <p:nvGrpSpPr>
-        <p:cNvPr id="1" name=""/>
-        <p:cNvGrpSpPr/>
-        <p:nvPr/>
-      </p:nvGrpSpPr>
-      <p:grpSpPr>
-        <a:xfrm>
-          <a:off x="0" y="0"/>
-          <a:ext cx="0" cy="0"/>
-          <a:chOff x="0" y="0"/>
-          <a:chExt cx="0" cy="0"/>
-        </a:xfrm>
-      </p:grpSpPr>
-      <p:pic>
-        <p:nvPicPr>
-          <p:cNvPr id="6" name="Picture 5" descr="A diagram of a basketball game&#10;&#10;AI-generated content may be incorrect.">
-            <a:extLst>
-              <a:ext uri="{FF2B5EF4-FFF2-40B4-BE49-F238E27FC236}">
-                <a16:creationId xmlns:a16="http://schemas.microsoft.com/office/drawing/2014/main" id="{C655F9EA-027E-3108-5A79-18DD40F94AFC}"/>
-              </a:ext>
-            </a:extLst>
-          </p:cNvPr>
-          <p:cNvPicPr>
-            <a:picLocks noChangeAspect="1"/>
-          </p:cNvPicPr>
-          <p:nvPr/>
-        </p:nvPicPr>
-        <p:blipFill>
-          <a:blip r:embed="rId2">
-            <a:extLst>
-              <a:ext uri="{28A0092B-C50C-407E-A947-70E740481C1C}">
-                <a14:useLocalDpi xmlns:a14="http://schemas.microsoft.com/office/drawing/2010/main" val="0"/>
-              </a:ext>
-            </a:extLst>
-          </a:blip>
-          <a:stretch>
-            <a:fillRect/>
-          </a:stretch>
-        </p:blipFill>
-        <p:spPr>
-          <a:xfrm>
-            <a:off x="5481229" y="2597152"/>
-            <a:ext cx="6710771" cy="3300214"/>
-          </a:xfrm>
-          <a:prstGeom prst="rect">
-            <a:avLst/>
-          </a:prstGeom>
-        </p:spPr>
-      </p:pic>
-      <p:sp>
-        <p:nvSpPr>
-          <p:cNvPr id="2" name="Title 1">
-            <a:extLst>
-              <a:ext uri="{FF2B5EF4-FFF2-40B4-BE49-F238E27FC236}">
-                <a16:creationId xmlns:a16="http://schemas.microsoft.com/office/drawing/2014/main" id="{DD9D77EF-2AFF-5043-B651-AA1B066D7562}"/>
-              </a:ext>
-            </a:extLst>
-          </p:cNvPr>
-          <p:cNvSpPr>
-            <a:spLocks noGrp="1"/>
-          </p:cNvSpPr>
-          <p:nvPr>
-            <p:ph type="title"/>
-          </p:nvPr>
-        </p:nvSpPr>
-        <p:spPr/>
-        <p:txBody>
-          <a:bodyPr/>
-          <a:lstStyle/>
-          <a:p>
-            <a:r>
-              <a:rPr lang="en-US" dirty="0"/>
-              <a:t>Decision trees</a:t>
-            </a:r>
-          </a:p>
-        </p:txBody>
-      </p:sp>
-      <p:sp>
-        <p:nvSpPr>
-          <p:cNvPr id="3" name="Content Placeholder 2">
-            <a:extLst>
-              <a:ext uri="{FF2B5EF4-FFF2-40B4-BE49-F238E27FC236}">
-                <a16:creationId xmlns:a16="http://schemas.microsoft.com/office/drawing/2014/main" id="{B9BEA0E5-B231-1BCB-BD71-94EF97BD4324}"/>
-              </a:ext>
-            </a:extLst>
-          </p:cNvPr>
-          <p:cNvSpPr>
-            <a:spLocks noGrp="1"/>
-          </p:cNvSpPr>
-          <p:nvPr>
-            <p:ph idx="1"/>
-          </p:nvPr>
-        </p:nvSpPr>
-        <p:spPr/>
-        <p:txBody>
-          <a:bodyPr>
-            <a:normAutofit/>
-          </a:bodyPr>
-          <a:lstStyle/>
-          <a:p>
-            <a:r>
-              <a:rPr lang="en-US" dirty="0"/>
-              <a:t>Simple, interpretable models that split data based on feature thresholds. Prone to overfitting.</a:t>
-            </a:r>
-          </a:p>
-          <a:p>
-            <a:r>
-              <a:rPr lang="en-US" dirty="0"/>
-              <a:t>You ask the model to create a tree with yes/no</a:t>
-            </a:r>
-            <a:br>
-              <a:rPr lang="en-US" dirty="0"/>
-            </a:br>
-            <a:r>
-              <a:rPr lang="en-US" dirty="0"/>
-              <a:t>questions</a:t>
-            </a:r>
-          </a:p>
-          <a:p>
-            <a:r>
-              <a:rPr lang="en-US" dirty="0"/>
-              <a:t>Depending on the answer you go down</a:t>
-            </a:r>
-            <a:br>
-              <a:rPr lang="en-US" dirty="0"/>
-            </a:br>
-            <a:r>
-              <a:rPr lang="en-US" dirty="0"/>
-              <a:t>one or the other path in the tree</a:t>
-            </a:r>
-          </a:p>
-          <a:p>
-            <a:r>
-              <a:rPr lang="en-US" dirty="0"/>
-              <a:t>Eventually you end up with a class or</a:t>
-            </a:r>
-            <a:br>
-              <a:rPr lang="en-US" dirty="0"/>
-            </a:br>
-            <a:r>
-              <a:rPr lang="en-US" dirty="0"/>
-              <a:t>decision</a:t>
-            </a:r>
-          </a:p>
-          <a:p>
-            <a:r>
-              <a:rPr lang="en-US" dirty="0"/>
-              <a:t>Fun fact: the top two rows in</a:t>
-            </a:r>
-            <a:br>
-              <a:rPr lang="en-US" dirty="0"/>
-            </a:br>
-            <a:r>
-              <a:rPr lang="en-US" dirty="0"/>
-              <a:t>this</a:t>
-            </a:r>
-            <a:r>
-              <a:rPr lang="en-BE" dirty="0"/>
-              <a:t> </a:t>
-            </a:r>
-            <a:r>
-              <a:rPr lang="en-US" dirty="0"/>
-              <a:t>tree are interchangeable</a:t>
-            </a:r>
-          </a:p>
-          <a:p>
-            <a:endParaRPr lang="en-US" dirty="0"/>
-          </a:p>
-        </p:txBody>
-      </p:sp>
-      <p:sp>
-        <p:nvSpPr>
-          <p:cNvPr id="4" name="Slide Number Placeholder 3">
-            <a:extLst>
-              <a:ext uri="{FF2B5EF4-FFF2-40B4-BE49-F238E27FC236}">
-                <a16:creationId xmlns:a16="http://schemas.microsoft.com/office/drawing/2014/main" id="{2218D7D8-E100-638D-E395-BBEFBC67DDDA}"/>
-              </a:ext>
-            </a:extLst>
-          </p:cNvPr>
-          <p:cNvSpPr>
-            <a:spLocks noGrp="1"/>
-          </p:cNvSpPr>
-          <p:nvPr>
-            <p:ph type="sldNum" sz="quarter" idx="12"/>
-          </p:nvPr>
-        </p:nvSpPr>
-        <p:spPr/>
-        <p:txBody>
-          <a:bodyPr/>
-          <a:lstStyle/>
-          <a:p>
-            <a:fld id="{FE1B3154-47D9-4402-8EDB-E791933DC0B9}" type="slidenum">
-              <a:rPr lang="nl-BE" smtClean="0"/>
-              <a:pPr/>
-              <a:t>31</a:t>
-            </a:fld>
-            <a:endParaRPr lang="nl-BE"/>
-          </a:p>
-        </p:txBody>
-      </p:sp>
-    </p:spTree>
-    <p:extLst>
-      <p:ext uri="{BB962C8B-B14F-4D97-AF65-F5344CB8AC3E}">
-        <p14:creationId xmlns:p14="http://schemas.microsoft.com/office/powerpoint/2010/main" val="779172795"/>
       </p:ext>
     </p:extLst>
   </p:cSld>
@@ -11014,12 +11046,48 @@
           <a:chExt cx="0" cy="0"/>
         </a:xfrm>
       </p:grpSpPr>
+      <p:pic>
+        <p:nvPicPr>
+          <p:cNvPr id="6" name="Picture 5" descr="A diagram of a basketball game&#10;&#10;AI-generated content may be incorrect.">
+            <a:extLst>
+              <a:ext uri="{FF2B5EF4-FFF2-40B4-BE49-F238E27FC236}">
+                <a16:creationId xmlns:a16="http://schemas.microsoft.com/office/drawing/2014/main" id="{C655F9EA-027E-3108-5A79-18DD40F94AFC}"/>
+              </a:ext>
+            </a:extLst>
+          </p:cNvPr>
+          <p:cNvPicPr>
+            <a:picLocks noChangeAspect="1"/>
+          </p:cNvPicPr>
+          <p:nvPr/>
+        </p:nvPicPr>
+        <p:blipFill>
+          <a:blip r:embed="rId2">
+            <a:extLst>
+              <a:ext uri="{28A0092B-C50C-407E-A947-70E740481C1C}">
+                <a14:useLocalDpi xmlns:a14="http://schemas.microsoft.com/office/drawing/2010/main" val="0"/>
+              </a:ext>
+            </a:extLst>
+          </a:blip>
+          <a:stretch>
+            <a:fillRect/>
+          </a:stretch>
+        </p:blipFill>
+        <p:spPr>
+          <a:xfrm>
+            <a:off x="5481229" y="2597152"/>
+            <a:ext cx="6710771" cy="3300214"/>
+          </a:xfrm>
+          <a:prstGeom prst="rect">
+            <a:avLst/>
+          </a:prstGeom>
+        </p:spPr>
+      </p:pic>
       <p:sp>
         <p:nvSpPr>
           <p:cNvPr id="2" name="Title 1">
             <a:extLst>
               <a:ext uri="{FF2B5EF4-FFF2-40B4-BE49-F238E27FC236}">
-                <a16:creationId xmlns:a16="http://schemas.microsoft.com/office/drawing/2014/main" id="{8BB8D841-4020-8BDE-A52F-2F11ADD51CCF}"/>
+                <a16:creationId xmlns:a16="http://schemas.microsoft.com/office/drawing/2014/main" id="{DD9D77EF-2AFF-5043-B651-AA1B066D7562}"/>
               </a:ext>
             </a:extLst>
           </p:cNvPr>
@@ -11047,7 +11115,7 @@
           <p:cNvPr id="3" name="Content Placeholder 2">
             <a:extLst>
               <a:ext uri="{FF2B5EF4-FFF2-40B4-BE49-F238E27FC236}">
-                <a16:creationId xmlns:a16="http://schemas.microsoft.com/office/drawing/2014/main" id="{6317603C-1413-79D4-B9C8-0E5B295FF427}"/>
+                <a16:creationId xmlns:a16="http://schemas.microsoft.com/office/drawing/2014/main" id="{B9BEA0E5-B231-1BCB-BD71-94EF97BD4324}"/>
               </a:ext>
             </a:extLst>
           </p:cNvPr>
@@ -11061,62 +11129,77 @@
         <p:spPr/>
         <p:txBody>
           <a:bodyPr>
-            <a:normAutofit lnSpcReduction="10000"/>
+            <a:normAutofit/>
           </a:bodyPr>
           <a:lstStyle/>
           <a:p>
             <a:r>
               <a:rPr lang="en-US" dirty="0"/>
-              <a:t>An easy model to train, the best model to explain</a:t>
-            </a:r>
-          </a:p>
-          <a:p>
-            <a:r>
-              <a:rPr lang="en-US" dirty="0"/>
-              <a:t>You’d say it outputs a hard value for class, but it </a:t>
-            </a:r>
-            <a:r>
-              <a:rPr lang="en-US" b="1" dirty="0"/>
-              <a:t>doesn’t</a:t>
-            </a:r>
-          </a:p>
-          <a:p>
-            <a:r>
-              <a:rPr lang="en-US" dirty="0"/>
-              <a:t>When a sample reaches a leaf node, it doesn't just get a hard label, it also has access to the class distribution of the training data that ended up in that leaf during training.</a:t>
-            </a:r>
-          </a:p>
-          <a:p>
-            <a:r>
-              <a:rPr lang="en-US" dirty="0"/>
-              <a:t>For example, imagine a leaf node was trained on 20 samples:</a:t>
-            </a:r>
-          </a:p>
-          <a:p>
-            <a:pPr lvl="1"/>
-            <a:r>
-              <a:rPr lang="en-US" dirty="0"/>
-              <a:t>15 were class 0</a:t>
-            </a:r>
-          </a:p>
-          <a:p>
-            <a:pPr lvl="1"/>
-            <a:r>
-              <a:rPr lang="en-US" dirty="0"/>
-              <a:t>5 were class 1</a:t>
-            </a:r>
-          </a:p>
-          <a:p>
-            <a:r>
-              <a:rPr lang="en-US" dirty="0"/>
-              <a:t>The predicted probabilities from that leaf will be 75% and 25%</a:t>
-            </a:r>
-          </a:p>
-          <a:p>
-            <a:r>
-              <a:rPr lang="en-US" dirty="0"/>
-              <a:t>As we saw in notebook 5.3 (multiclass on wine) the tree you get depends on the input data and the train/test split</a:t>
-            </a:r>
+              <a:t>Simple, interpretable models that split data based on feature thresholds. Prone to overfitting.</a:t>
+            </a:r>
+          </a:p>
+          <a:p>
+            <a:r>
+              <a:rPr lang="en-US" dirty="0"/>
+              <a:t>You ask the model to create a tree with yes/no</a:t>
+            </a:r>
+            <a:br>
+              <a:rPr lang="en-US" dirty="0"/>
+            </a:br>
+            <a:r>
+              <a:rPr lang="en-US" dirty="0"/>
+              <a:t>questions</a:t>
+            </a:r>
+          </a:p>
+          <a:p>
+            <a:r>
+              <a:rPr lang="en-US" dirty="0"/>
+              <a:t>Depending on the answer you go down</a:t>
+            </a:r>
+            <a:br>
+              <a:rPr lang="en-US" dirty="0"/>
+            </a:br>
+            <a:r>
+              <a:rPr lang="en-US" dirty="0"/>
+              <a:t>one or the other path in the tree</a:t>
+            </a:r>
+          </a:p>
+          <a:p>
+            <a:r>
+              <a:rPr lang="en-US" dirty="0"/>
+              <a:t>Eventually you end up with a class or</a:t>
+            </a:r>
+            <a:br>
+              <a:rPr lang="en-US" dirty="0"/>
+            </a:br>
+            <a:r>
+              <a:rPr lang="en-US" dirty="0"/>
+              <a:t>decision</a:t>
+            </a:r>
+          </a:p>
+          <a:p>
+            <a:r>
+              <a:rPr lang="en-US" dirty="0"/>
+              <a:t>Fun fact: the top two rows in</a:t>
+            </a:r>
+            <a:br>
+              <a:rPr lang="en-US" dirty="0"/>
+            </a:br>
+            <a:r>
+              <a:rPr lang="en-US" dirty="0"/>
+              <a:t>this</a:t>
+            </a:r>
+            <a:r>
+              <a:rPr lang="en-BE" dirty="0"/>
+              <a:t> </a:t>
+            </a:r>
+            <a:r>
+              <a:rPr lang="en-US" dirty="0"/>
+              <a:t>tree are interchangeable</a:t>
+            </a:r>
+          </a:p>
+          <a:p>
+            <a:endParaRPr lang="en-US" dirty="0"/>
           </a:p>
         </p:txBody>
       </p:sp>
@@ -11125,7 +11208,7 @@
           <p:cNvPr id="4" name="Slide Number Placeholder 3">
             <a:extLst>
               <a:ext uri="{FF2B5EF4-FFF2-40B4-BE49-F238E27FC236}">
-                <a16:creationId xmlns:a16="http://schemas.microsoft.com/office/drawing/2014/main" id="{EDD9ADD4-F367-132E-C488-968FA6FCB50E}"/>
+                <a16:creationId xmlns:a16="http://schemas.microsoft.com/office/drawing/2014/main" id="{2218D7D8-E100-638D-E395-BBEFBC67DDDA}"/>
               </a:ext>
             </a:extLst>
           </p:cNvPr>
@@ -11153,7 +11236,7 @@
     </p:spTree>
     <p:extLst>
       <p:ext uri="{BB962C8B-B14F-4D97-AF65-F5344CB8AC3E}">
-        <p14:creationId xmlns:p14="http://schemas.microsoft.com/office/powerpoint/2010/main" val="546313382"/>
+        <p14:creationId xmlns:p14="http://schemas.microsoft.com/office/powerpoint/2010/main" val="779172795"/>
       </p:ext>
     </p:extLst>
   </p:cSld>
@@ -11185,7 +11268,7 @@
           <p:cNvPr id="2" name="Title 1">
             <a:extLst>
               <a:ext uri="{FF2B5EF4-FFF2-40B4-BE49-F238E27FC236}">
-                <a16:creationId xmlns:a16="http://schemas.microsoft.com/office/drawing/2014/main" id="{B64D11D6-162E-B7D0-25FA-0CB20FE19985}"/>
+                <a16:creationId xmlns:a16="http://schemas.microsoft.com/office/drawing/2014/main" id="{8BB8D841-4020-8BDE-A52F-2F11ADD51CCF}"/>
               </a:ext>
             </a:extLst>
           </p:cNvPr>
@@ -11203,7 +11286,7 @@
           <a:p>
             <a:r>
               <a:rPr lang="en-US" dirty="0"/>
-              <a:t>Can decision tree do regression?</a:t>
+              <a:t>Decision trees</a:t>
             </a:r>
           </a:p>
         </p:txBody>
@@ -11213,7 +11296,7 @@
           <p:cNvPr id="3" name="Content Placeholder 2">
             <a:extLst>
               <a:ext uri="{FF2B5EF4-FFF2-40B4-BE49-F238E27FC236}">
-                <a16:creationId xmlns:a16="http://schemas.microsoft.com/office/drawing/2014/main" id="{5C0EBE63-7D2C-E30E-BC10-DE4D22CAEF41}"/>
+                <a16:creationId xmlns:a16="http://schemas.microsoft.com/office/drawing/2014/main" id="{6317603C-1413-79D4-B9C8-0E5B295FF427}"/>
               </a:ext>
             </a:extLst>
           </p:cNvPr>
@@ -11226,42 +11309,63 @@
         </p:nvSpPr>
         <p:spPr/>
         <p:txBody>
-          <a:bodyPr/>
-          <a:lstStyle/>
-          <a:p>
-            <a:r>
-              <a:rPr lang="en-US" dirty="0"/>
-              <a:t>Regression predicts a continuous values, but after binning a continuous variable it becomes a categorical variable.</a:t>
-            </a:r>
-          </a:p>
-          <a:p>
-            <a:r>
-              <a:rPr lang="en-US" dirty="0"/>
-              <a:t>To determine leaf value, you can take average, median, …</a:t>
-            </a:r>
-            <a:br>
-              <a:rPr lang="en-US" dirty="0"/>
-            </a:br>
-            <a:r>
-              <a:rPr lang="en-US" dirty="0"/>
-              <a:t>of the bin. Or get fancy and do a linear regression for the</a:t>
-            </a:r>
-            <a:br>
-              <a:rPr lang="en-US" dirty="0"/>
-            </a:br>
-            <a:r>
-              <a:rPr lang="en-US" dirty="0"/>
-              <a:t>values inside the bin, or…</a:t>
-            </a:r>
-          </a:p>
-          <a:p>
-            <a:endParaRPr lang="en-BE" dirty="0"/>
-          </a:p>
-          <a:p>
-            <a:endParaRPr lang="en-US" dirty="0"/>
-          </a:p>
-          <a:p>
-            <a:endParaRPr lang="en-US" dirty="0"/>
+          <a:bodyPr>
+            <a:normAutofit lnSpcReduction="10000"/>
+          </a:bodyPr>
+          <a:lstStyle/>
+          <a:p>
+            <a:r>
+              <a:rPr lang="en-US" dirty="0"/>
+              <a:t>An easy model to train, the best model to explain</a:t>
+            </a:r>
+          </a:p>
+          <a:p>
+            <a:r>
+              <a:rPr lang="en-US" dirty="0"/>
+              <a:t>You’d say it outputs a hard value for class, but it </a:t>
+            </a:r>
+            <a:r>
+              <a:rPr lang="en-US" b="1" dirty="0"/>
+              <a:t>doesn’t</a:t>
+            </a:r>
+          </a:p>
+          <a:p>
+            <a:r>
+              <a:rPr lang="en-US" dirty="0"/>
+              <a:t>When a sample reaches a leaf node, it doesn't just get a hard label, it also has access to the class distribution of the training data that ended up in that leaf during training.</a:t>
+            </a:r>
+          </a:p>
+          <a:p>
+            <a:r>
+              <a:rPr lang="en-US" dirty="0"/>
+              <a:t>For example, imagine a leaf node was trained on 20 samples:</a:t>
+            </a:r>
+          </a:p>
+          <a:p>
+            <a:pPr lvl="1"/>
+            <a:r>
+              <a:rPr lang="en-US" dirty="0"/>
+              <a:t>15 were class 0</a:t>
+            </a:r>
+          </a:p>
+          <a:p>
+            <a:pPr lvl="1"/>
+            <a:r>
+              <a:rPr lang="en-US" dirty="0"/>
+              <a:t>5 were class 1</a:t>
+            </a:r>
+          </a:p>
+          <a:p>
+            <a:r>
+              <a:rPr lang="en-US" dirty="0"/>
+              <a:t>The predicted probabilities from that leaf will be 75% and 25%</a:t>
+            </a:r>
+          </a:p>
+          <a:p>
+            <a:r>
+              <a:rPr lang="en-US" dirty="0"/>
+              <a:t>As we saw in notebook 5.3 (multiclass on wine) the tree you get depends on the input data and the train/test split</a:t>
+            </a:r>
           </a:p>
         </p:txBody>
       </p:sp>
@@ -11270,7 +11374,7 @@
           <p:cNvPr id="4" name="Slide Number Placeholder 3">
             <a:extLst>
               <a:ext uri="{FF2B5EF4-FFF2-40B4-BE49-F238E27FC236}">
-                <a16:creationId xmlns:a16="http://schemas.microsoft.com/office/drawing/2014/main" id="{223CE77D-4436-C4BB-9A0A-AC0774D789EF}"/>
+                <a16:creationId xmlns:a16="http://schemas.microsoft.com/office/drawing/2014/main" id="{EDD9ADD4-F367-132E-C488-968FA6FCB50E}"/>
               </a:ext>
             </a:extLst>
           </p:cNvPr>
@@ -11290,6 +11394,151 @@
               <a:rPr lang="nl-BE" smtClean="0"/>
               <a:pPr/>
               <a:t>33</a:t>
+            </a:fld>
+            <a:endParaRPr lang="nl-BE"/>
+          </a:p>
+        </p:txBody>
+      </p:sp>
+    </p:spTree>
+    <p:extLst>
+      <p:ext uri="{BB962C8B-B14F-4D97-AF65-F5344CB8AC3E}">
+        <p14:creationId xmlns:p14="http://schemas.microsoft.com/office/powerpoint/2010/main" val="546313382"/>
+      </p:ext>
+    </p:extLst>
+  </p:cSld>
+  <p:clrMapOvr>
+    <a:masterClrMapping/>
+  </p:clrMapOvr>
+</p:sld>
+</file>
+
+<file path=ppt/slides/slide34.xml><?xml version="1.0" encoding="utf-8"?>
+<p:sld xmlns:a="http://schemas.openxmlformats.org/drawingml/2006/main" xmlns:r="http://schemas.openxmlformats.org/officeDocument/2006/relationships" xmlns:p="http://schemas.openxmlformats.org/presentationml/2006/main">
+  <p:cSld>
+    <p:spTree>
+      <p:nvGrpSpPr>
+        <p:cNvPr id="1" name=""/>
+        <p:cNvGrpSpPr/>
+        <p:nvPr/>
+      </p:nvGrpSpPr>
+      <p:grpSpPr>
+        <a:xfrm>
+          <a:off x="0" y="0"/>
+          <a:ext cx="0" cy="0"/>
+          <a:chOff x="0" y="0"/>
+          <a:chExt cx="0" cy="0"/>
+        </a:xfrm>
+      </p:grpSpPr>
+      <p:sp>
+        <p:nvSpPr>
+          <p:cNvPr id="2" name="Title 1">
+            <a:extLst>
+              <a:ext uri="{FF2B5EF4-FFF2-40B4-BE49-F238E27FC236}">
+                <a16:creationId xmlns:a16="http://schemas.microsoft.com/office/drawing/2014/main" id="{B64D11D6-162E-B7D0-25FA-0CB20FE19985}"/>
+              </a:ext>
+            </a:extLst>
+          </p:cNvPr>
+          <p:cNvSpPr>
+            <a:spLocks noGrp="1"/>
+          </p:cNvSpPr>
+          <p:nvPr>
+            <p:ph type="title"/>
+          </p:nvPr>
+        </p:nvSpPr>
+        <p:spPr/>
+        <p:txBody>
+          <a:bodyPr/>
+          <a:lstStyle/>
+          <a:p>
+            <a:r>
+              <a:rPr lang="en-US" dirty="0"/>
+              <a:t>Can decision tree do regression?</a:t>
+            </a:r>
+          </a:p>
+        </p:txBody>
+      </p:sp>
+      <p:sp>
+        <p:nvSpPr>
+          <p:cNvPr id="3" name="Content Placeholder 2">
+            <a:extLst>
+              <a:ext uri="{FF2B5EF4-FFF2-40B4-BE49-F238E27FC236}">
+                <a16:creationId xmlns:a16="http://schemas.microsoft.com/office/drawing/2014/main" id="{5C0EBE63-7D2C-E30E-BC10-DE4D22CAEF41}"/>
+              </a:ext>
+            </a:extLst>
+          </p:cNvPr>
+          <p:cNvSpPr>
+            <a:spLocks noGrp="1"/>
+          </p:cNvSpPr>
+          <p:nvPr>
+            <p:ph idx="1"/>
+          </p:nvPr>
+        </p:nvSpPr>
+        <p:spPr/>
+        <p:txBody>
+          <a:bodyPr/>
+          <a:lstStyle/>
+          <a:p>
+            <a:r>
+              <a:rPr lang="en-US" dirty="0"/>
+              <a:t>Regression predicts a continuous values, but after binning a continuous variable it becomes a categorical variable.</a:t>
+            </a:r>
+          </a:p>
+          <a:p>
+            <a:r>
+              <a:rPr lang="en-US" dirty="0"/>
+              <a:t>To determine leaf value, you can take average, median, …</a:t>
+            </a:r>
+            <a:br>
+              <a:rPr lang="en-US" dirty="0"/>
+            </a:br>
+            <a:r>
+              <a:rPr lang="en-US" dirty="0"/>
+              <a:t>of the bin. Or get fancy and do a linear regression for the</a:t>
+            </a:r>
+            <a:br>
+              <a:rPr lang="en-US" dirty="0"/>
+            </a:br>
+            <a:r>
+              <a:rPr lang="en-US" dirty="0"/>
+              <a:t>values inside the bin, or…</a:t>
+            </a:r>
+          </a:p>
+          <a:p>
+            <a:endParaRPr lang="en-BE" dirty="0"/>
+          </a:p>
+          <a:p>
+            <a:endParaRPr lang="en-US" dirty="0"/>
+          </a:p>
+          <a:p>
+            <a:endParaRPr lang="en-US" dirty="0"/>
+          </a:p>
+        </p:txBody>
+      </p:sp>
+      <p:sp>
+        <p:nvSpPr>
+          <p:cNvPr id="4" name="Slide Number Placeholder 3">
+            <a:extLst>
+              <a:ext uri="{FF2B5EF4-FFF2-40B4-BE49-F238E27FC236}">
+                <a16:creationId xmlns:a16="http://schemas.microsoft.com/office/drawing/2014/main" id="{223CE77D-4436-C4BB-9A0A-AC0774D789EF}"/>
+              </a:ext>
+            </a:extLst>
+          </p:cNvPr>
+          <p:cNvSpPr>
+            <a:spLocks noGrp="1"/>
+          </p:cNvSpPr>
+          <p:nvPr>
+            <p:ph type="sldNum" sz="quarter" idx="12"/>
+          </p:nvPr>
+        </p:nvSpPr>
+        <p:spPr/>
+        <p:txBody>
+          <a:bodyPr/>
+          <a:lstStyle/>
+          <a:p>
+            <a:fld id="{FE1B3154-47D9-4402-8EDB-E791933DC0B9}" type="slidenum">
+              <a:rPr lang="nl-BE" smtClean="0"/>
+              <a:pPr/>
+              <a:t>34</a:t>
             </a:fld>
             <a:endParaRPr lang="nl-BE"/>
           </a:p>
@@ -11543,7 +11792,7 @@
 </p:sld>
 </file>
 
-<file path=ppt/slides/slide34.xml><?xml version="1.0" encoding="utf-8"?>
+<file path=ppt/slides/slide35.xml><?xml version="1.0" encoding="utf-8"?>
 <p:sld xmlns:a="http://schemas.openxmlformats.org/drawingml/2006/main" xmlns:r="http://schemas.openxmlformats.org/officeDocument/2006/relationships" xmlns:p="http://schemas.openxmlformats.org/presentationml/2006/main">
   <p:cSld>
     <p:spTree>
@@ -11705,7 +11954,7 @@
             <a:fld id="{FE1B3154-47D9-4402-8EDB-E791933DC0B9}" type="slidenum">
               <a:rPr lang="nl-BE" smtClean="0"/>
               <a:pPr/>
-              <a:t>34</a:t>
+              <a:t>35</a:t>
             </a:fld>
             <a:endParaRPr lang="nl-BE"/>
           </a:p>
@@ -11760,148 +12009,6 @@
 </p:sld>
 </file>
 
-<file path=ppt/slides/slide35.xml><?xml version="1.0" encoding="utf-8"?>
-<p:sld xmlns:a="http://schemas.openxmlformats.org/drawingml/2006/main" xmlns:r="http://schemas.openxmlformats.org/officeDocument/2006/relationships" xmlns:p="http://schemas.openxmlformats.org/presentationml/2006/main">
-  <p:cSld>
-    <p:spTree>
-      <p:nvGrpSpPr>
-        <p:cNvPr id="1" name=""/>
-        <p:cNvGrpSpPr/>
-        <p:nvPr/>
-      </p:nvGrpSpPr>
-      <p:grpSpPr>
-        <a:xfrm>
-          <a:off x="0" y="0"/>
-          <a:ext cx="0" cy="0"/>
-          <a:chOff x="0" y="0"/>
-          <a:chExt cx="0" cy="0"/>
-        </a:xfrm>
-      </p:grpSpPr>
-      <p:sp>
-        <p:nvSpPr>
-          <p:cNvPr id="2" name="Title 1">
-            <a:extLst>
-              <a:ext uri="{FF2B5EF4-FFF2-40B4-BE49-F238E27FC236}">
-                <a16:creationId xmlns:a16="http://schemas.microsoft.com/office/drawing/2014/main" id="{C1BEF5BE-0588-A1A8-A17B-7CF432560942}"/>
-              </a:ext>
-            </a:extLst>
-          </p:cNvPr>
-          <p:cNvSpPr>
-            <a:spLocks noGrp="1"/>
-          </p:cNvSpPr>
-          <p:nvPr>
-            <p:ph type="title"/>
-          </p:nvPr>
-        </p:nvSpPr>
-        <p:spPr/>
-        <p:txBody>
-          <a:bodyPr/>
-          <a:lstStyle/>
-          <a:p>
-            <a:r>
-              <a:rPr lang="en-US" dirty="0"/>
-              <a:t>Random forest</a:t>
-            </a:r>
-          </a:p>
-        </p:txBody>
-      </p:sp>
-      <p:sp>
-        <p:nvSpPr>
-          <p:cNvPr id="3" name="Content Placeholder 2">
-            <a:extLst>
-              <a:ext uri="{FF2B5EF4-FFF2-40B4-BE49-F238E27FC236}">
-                <a16:creationId xmlns:a16="http://schemas.microsoft.com/office/drawing/2014/main" id="{CBF7226F-D66D-C63C-B093-B02814A8EC7F}"/>
-              </a:ext>
-            </a:extLst>
-          </p:cNvPr>
-          <p:cNvSpPr>
-            <a:spLocks noGrp="1"/>
-          </p:cNvSpPr>
-          <p:nvPr>
-            <p:ph idx="1"/>
-          </p:nvPr>
-        </p:nvSpPr>
-        <p:spPr/>
-        <p:txBody>
-          <a:bodyPr/>
-          <a:lstStyle/>
-          <a:p>
-            <a:r>
-              <a:rPr lang="en-US" dirty="0"/>
-              <a:t> By combining many weak, noisy trees, you get a stronger, more stable model.</a:t>
-            </a:r>
-          </a:p>
-          <a:p>
-            <a:r>
-              <a:rPr lang="en-US" dirty="0"/>
-              <a:t>It reduces overfitting and improves generalization</a:t>
-            </a:r>
-          </a:p>
-          <a:p>
-            <a:r>
-              <a:rPr lang="en-US" dirty="0"/>
-              <a:t>Analogy</a:t>
-            </a:r>
-          </a:p>
-          <a:p>
-            <a:pPr lvl="1"/>
-            <a:r>
-              <a:rPr lang="en-US" dirty="0"/>
-              <a:t>Think of it like asking 100 slightly different experts for their opinion and going with the consensus instead of trusting just one</a:t>
-            </a:r>
-          </a:p>
-          <a:p>
-            <a:pPr lvl="1"/>
-            <a:r>
-              <a:rPr lang="en-US" dirty="0"/>
-              <a:t>Also, among them are experts in a couple of the features (random feature selection)</a:t>
-            </a:r>
-          </a:p>
-        </p:txBody>
-      </p:sp>
-      <p:sp>
-        <p:nvSpPr>
-          <p:cNvPr id="4" name="Slide Number Placeholder 3">
-            <a:extLst>
-              <a:ext uri="{FF2B5EF4-FFF2-40B4-BE49-F238E27FC236}">
-                <a16:creationId xmlns:a16="http://schemas.microsoft.com/office/drawing/2014/main" id="{4C913525-8566-065B-152F-6D7DA3134BC7}"/>
-              </a:ext>
-            </a:extLst>
-          </p:cNvPr>
-          <p:cNvSpPr>
-            <a:spLocks noGrp="1"/>
-          </p:cNvSpPr>
-          <p:nvPr>
-            <p:ph type="sldNum" sz="quarter" idx="12"/>
-          </p:nvPr>
-        </p:nvSpPr>
-        <p:spPr/>
-        <p:txBody>
-          <a:bodyPr/>
-          <a:lstStyle/>
-          <a:p>
-            <a:fld id="{FE1B3154-47D9-4402-8EDB-E791933DC0B9}" type="slidenum">
-              <a:rPr lang="nl-BE" smtClean="0"/>
-              <a:pPr/>
-              <a:t>35</a:t>
-            </a:fld>
-            <a:endParaRPr lang="nl-BE"/>
-          </a:p>
-        </p:txBody>
-      </p:sp>
-    </p:spTree>
-    <p:extLst>
-      <p:ext uri="{BB962C8B-B14F-4D97-AF65-F5344CB8AC3E}">
-        <p14:creationId xmlns:p14="http://schemas.microsoft.com/office/powerpoint/2010/main" val="1105680682"/>
-      </p:ext>
-    </p:extLst>
-  </p:cSld>
-  <p:clrMapOvr>
-    <a:masterClrMapping/>
-  </p:clrMapOvr>
-</p:sld>
-</file>
-
 <file path=ppt/slides/slide36.xml><?xml version="1.0" encoding="utf-8"?>
 <p:sld xmlns:a="http://schemas.openxmlformats.org/drawingml/2006/main" xmlns:r="http://schemas.openxmlformats.org/officeDocument/2006/relationships" xmlns:p="http://schemas.openxmlformats.org/presentationml/2006/main">
   <p:cSld>
@@ -11924,7 +12031,7 @@
           <p:cNvPr id="2" name="Title 1">
             <a:extLst>
               <a:ext uri="{FF2B5EF4-FFF2-40B4-BE49-F238E27FC236}">
-                <a16:creationId xmlns:a16="http://schemas.microsoft.com/office/drawing/2014/main" id="{83F88817-8E6C-8464-74DC-971913CF46E2}"/>
+                <a16:creationId xmlns:a16="http://schemas.microsoft.com/office/drawing/2014/main" id="{C1BEF5BE-0588-A1A8-A17B-7CF432560942}"/>
               </a:ext>
             </a:extLst>
           </p:cNvPr>
@@ -11942,7 +12049,7 @@
           <a:p>
             <a:r>
               <a:rPr lang="en-US" dirty="0"/>
-              <a:t>Ensemble learning</a:t>
+              <a:t>Random forest</a:t>
             </a:r>
           </a:p>
         </p:txBody>
@@ -11952,7 +12059,7 @@
           <p:cNvPr id="3" name="Content Placeholder 2">
             <a:extLst>
               <a:ext uri="{FF2B5EF4-FFF2-40B4-BE49-F238E27FC236}">
-                <a16:creationId xmlns:a16="http://schemas.microsoft.com/office/drawing/2014/main" id="{1658960A-8814-8345-5A68-1A4BED03A7B2}"/>
+                <a16:creationId xmlns:a16="http://schemas.microsoft.com/office/drawing/2014/main" id="{CBF7226F-D66D-C63C-B093-B02814A8EC7F}"/>
               </a:ext>
             </a:extLst>
           </p:cNvPr>
@@ -11970,62 +12077,34 @@
           <a:p>
             <a:r>
               <a:rPr lang="en-US" dirty="0"/>
-              <a:t>When going from decision trees to random forests, we started doing “ensemble learning”</a:t>
+              <a:t> By combining many weak, noisy trees, you get a stronger, more stable model.</a:t>
+            </a:r>
+          </a:p>
+          <a:p>
+            <a:r>
+              <a:rPr lang="en-US" dirty="0"/>
+              <a:t>It reduces overfitting and improves generalization</a:t>
+            </a:r>
+          </a:p>
+          <a:p>
+            <a:r>
+              <a:rPr lang="en-US" dirty="0"/>
+              <a:t>Analogy</a:t>
             </a:r>
           </a:p>
           <a:p>
             <a:pPr lvl="1"/>
             <a:r>
               <a:rPr lang="en-US" dirty="0"/>
-              <a:t>Ensemble methods combine the predictions of multiple models to improve performance</a:t>
-            </a:r>
-          </a:p>
-          <a:p>
-            <a:r>
-              <a:rPr lang="en-US" dirty="0"/>
-              <a:t>Bagging and boosting are two main strategies</a:t>
+              <a:t>Think of it like asking 100 slightly different experts for their opinion and going with the consensus instead of trusting just one</a:t>
             </a:r>
           </a:p>
           <a:p>
             <a:pPr lvl="1"/>
             <a:r>
               <a:rPr lang="en-US" dirty="0"/>
-              <a:t>Random forests do bagging</a:t>
-            </a:r>
-          </a:p>
-          <a:p>
-            <a:pPr lvl="1"/>
-            <a:r>
-              <a:rPr lang="en-US" dirty="0" err="1"/>
-              <a:t>XGBoost</a:t>
-            </a:r>
-            <a:r>
-              <a:rPr lang="en-US" dirty="0"/>
-              <a:t> does boosting</a:t>
-            </a:r>
-          </a:p>
-          <a:p>
-            <a:r>
-              <a:rPr lang="en-US" dirty="0"/>
-              <a:t>Stacking is a third way</a:t>
-            </a:r>
-          </a:p>
-          <a:p>
-            <a:pPr lvl="1"/>
-            <a:r>
-              <a:rPr lang="en-US" dirty="0"/>
-              <a:t>Train a bunch of different models</a:t>
-            </a:r>
-          </a:p>
-          <a:p>
-            <a:pPr lvl="1"/>
-            <a:r>
-              <a:rPr lang="en-US" dirty="0"/>
-              <a:t>Train another model to learn which model to use in which case</a:t>
-            </a:r>
-          </a:p>
-          <a:p>
-            <a:endParaRPr lang="en-US" dirty="0"/>
+              <a:t>Also, among them are experts in a couple of the features (random feature selection)</a:t>
+            </a:r>
           </a:p>
         </p:txBody>
       </p:sp>
@@ -12034,7 +12113,7 @@
           <p:cNvPr id="4" name="Slide Number Placeholder 3">
             <a:extLst>
               <a:ext uri="{FF2B5EF4-FFF2-40B4-BE49-F238E27FC236}">
-                <a16:creationId xmlns:a16="http://schemas.microsoft.com/office/drawing/2014/main" id="{5B7FF521-C099-45DD-DB76-C183CD481E89}"/>
+                <a16:creationId xmlns:a16="http://schemas.microsoft.com/office/drawing/2014/main" id="{4C913525-8566-065B-152F-6D7DA3134BC7}"/>
               </a:ext>
             </a:extLst>
           </p:cNvPr>
@@ -12062,7 +12141,7 @@
     </p:spTree>
     <p:extLst>
       <p:ext uri="{BB962C8B-B14F-4D97-AF65-F5344CB8AC3E}">
-        <p14:creationId xmlns:p14="http://schemas.microsoft.com/office/powerpoint/2010/main" val="2217467505"/>
+        <p14:creationId xmlns:p14="http://schemas.microsoft.com/office/powerpoint/2010/main" val="1105680682"/>
       </p:ext>
     </p:extLst>
   </p:cSld>
@@ -12094,6 +12173,176 @@
           <p:cNvPr id="2" name="Title 1">
             <a:extLst>
               <a:ext uri="{FF2B5EF4-FFF2-40B4-BE49-F238E27FC236}">
+                <a16:creationId xmlns:a16="http://schemas.microsoft.com/office/drawing/2014/main" id="{83F88817-8E6C-8464-74DC-971913CF46E2}"/>
+              </a:ext>
+            </a:extLst>
+          </p:cNvPr>
+          <p:cNvSpPr>
+            <a:spLocks noGrp="1"/>
+          </p:cNvSpPr>
+          <p:nvPr>
+            <p:ph type="title"/>
+          </p:nvPr>
+        </p:nvSpPr>
+        <p:spPr/>
+        <p:txBody>
+          <a:bodyPr/>
+          <a:lstStyle/>
+          <a:p>
+            <a:r>
+              <a:rPr lang="en-US" dirty="0"/>
+              <a:t>Ensemble learning</a:t>
+            </a:r>
+          </a:p>
+        </p:txBody>
+      </p:sp>
+      <p:sp>
+        <p:nvSpPr>
+          <p:cNvPr id="3" name="Content Placeholder 2">
+            <a:extLst>
+              <a:ext uri="{FF2B5EF4-FFF2-40B4-BE49-F238E27FC236}">
+                <a16:creationId xmlns:a16="http://schemas.microsoft.com/office/drawing/2014/main" id="{1658960A-8814-8345-5A68-1A4BED03A7B2}"/>
+              </a:ext>
+            </a:extLst>
+          </p:cNvPr>
+          <p:cNvSpPr>
+            <a:spLocks noGrp="1"/>
+          </p:cNvSpPr>
+          <p:nvPr>
+            <p:ph idx="1"/>
+          </p:nvPr>
+        </p:nvSpPr>
+        <p:spPr/>
+        <p:txBody>
+          <a:bodyPr/>
+          <a:lstStyle/>
+          <a:p>
+            <a:r>
+              <a:rPr lang="en-US" dirty="0"/>
+              <a:t>When going from decision trees to random forests, we started doing “ensemble learning”</a:t>
+            </a:r>
+          </a:p>
+          <a:p>
+            <a:pPr lvl="1"/>
+            <a:r>
+              <a:rPr lang="en-US" dirty="0"/>
+              <a:t>Ensemble methods combine the predictions of multiple models to improve performance</a:t>
+            </a:r>
+          </a:p>
+          <a:p>
+            <a:r>
+              <a:rPr lang="en-US" dirty="0"/>
+              <a:t>Bagging and boosting are two main strategies</a:t>
+            </a:r>
+          </a:p>
+          <a:p>
+            <a:pPr lvl="1"/>
+            <a:r>
+              <a:rPr lang="en-US" dirty="0"/>
+              <a:t>Random forests do bagging</a:t>
+            </a:r>
+          </a:p>
+          <a:p>
+            <a:pPr lvl="1"/>
+            <a:r>
+              <a:rPr lang="en-US" dirty="0" err="1"/>
+              <a:t>XGBoost</a:t>
+            </a:r>
+            <a:r>
+              <a:rPr lang="en-US" dirty="0"/>
+              <a:t> does boosting</a:t>
+            </a:r>
+          </a:p>
+          <a:p>
+            <a:r>
+              <a:rPr lang="en-US" dirty="0"/>
+              <a:t>Stacking is a third way</a:t>
+            </a:r>
+          </a:p>
+          <a:p>
+            <a:pPr lvl="1"/>
+            <a:r>
+              <a:rPr lang="en-US" dirty="0"/>
+              <a:t>Train a bunch of different models</a:t>
+            </a:r>
+          </a:p>
+          <a:p>
+            <a:pPr lvl="1"/>
+            <a:r>
+              <a:rPr lang="en-US" dirty="0"/>
+              <a:t>Train another model to learn which model to use in which case</a:t>
+            </a:r>
+          </a:p>
+          <a:p>
+            <a:endParaRPr lang="en-US" dirty="0"/>
+          </a:p>
+        </p:txBody>
+      </p:sp>
+      <p:sp>
+        <p:nvSpPr>
+          <p:cNvPr id="4" name="Slide Number Placeholder 3">
+            <a:extLst>
+              <a:ext uri="{FF2B5EF4-FFF2-40B4-BE49-F238E27FC236}">
+                <a16:creationId xmlns:a16="http://schemas.microsoft.com/office/drawing/2014/main" id="{5B7FF521-C099-45DD-DB76-C183CD481E89}"/>
+              </a:ext>
+            </a:extLst>
+          </p:cNvPr>
+          <p:cNvSpPr>
+            <a:spLocks noGrp="1"/>
+          </p:cNvSpPr>
+          <p:nvPr>
+            <p:ph type="sldNum" sz="quarter" idx="12"/>
+          </p:nvPr>
+        </p:nvSpPr>
+        <p:spPr/>
+        <p:txBody>
+          <a:bodyPr/>
+          <a:lstStyle/>
+          <a:p>
+            <a:fld id="{FE1B3154-47D9-4402-8EDB-E791933DC0B9}" type="slidenum">
+              <a:rPr lang="nl-BE" smtClean="0"/>
+              <a:pPr/>
+              <a:t>37</a:t>
+            </a:fld>
+            <a:endParaRPr lang="nl-BE"/>
+          </a:p>
+        </p:txBody>
+      </p:sp>
+    </p:spTree>
+    <p:extLst>
+      <p:ext uri="{BB962C8B-B14F-4D97-AF65-F5344CB8AC3E}">
+        <p14:creationId xmlns:p14="http://schemas.microsoft.com/office/powerpoint/2010/main" val="2217467505"/>
+      </p:ext>
+    </p:extLst>
+  </p:cSld>
+  <p:clrMapOvr>
+    <a:masterClrMapping/>
+  </p:clrMapOvr>
+</p:sld>
+</file>
+
+<file path=ppt/slides/slide38.xml><?xml version="1.0" encoding="utf-8"?>
+<p:sld xmlns:a="http://schemas.openxmlformats.org/drawingml/2006/main" xmlns:r="http://schemas.openxmlformats.org/officeDocument/2006/relationships" xmlns:p="http://schemas.openxmlformats.org/presentationml/2006/main">
+  <p:cSld>
+    <p:spTree>
+      <p:nvGrpSpPr>
+        <p:cNvPr id="1" name=""/>
+        <p:cNvGrpSpPr/>
+        <p:nvPr/>
+      </p:nvGrpSpPr>
+      <p:grpSpPr>
+        <a:xfrm>
+          <a:off x="0" y="0"/>
+          <a:ext cx="0" cy="0"/>
+          <a:chOff x="0" y="0"/>
+          <a:chExt cx="0" cy="0"/>
+        </a:xfrm>
+      </p:grpSpPr>
+      <p:sp>
+        <p:nvSpPr>
+          <p:cNvPr id="2" name="Title 1">
+            <a:extLst>
+              <a:ext uri="{FF2B5EF4-FFF2-40B4-BE49-F238E27FC236}">
                 <a16:creationId xmlns:a16="http://schemas.microsoft.com/office/drawing/2014/main" id="{BCCE6CCE-76A7-FF2E-0345-20D43BA5EA2D}"/>
               </a:ext>
             </a:extLst>
@@ -12179,7 +12428,7 @@
             <a:fld id="{FE1B3154-47D9-4402-8EDB-E791933DC0B9}" type="slidenum">
               <a:rPr lang="nl-BE" smtClean="0"/>
               <a:pPr/>
-              <a:t>37</a:t>
+              <a:t>38</a:t>
             </a:fld>
             <a:endParaRPr lang="nl-BE"/>
           </a:p>
@@ -12243,164 +12492,6 @@
 </p:sld>
 </file>
 
-<file path=ppt/slides/slide38.xml><?xml version="1.0" encoding="utf-8"?>
-<p:sld xmlns:a="http://schemas.openxmlformats.org/drawingml/2006/main" xmlns:r="http://schemas.openxmlformats.org/officeDocument/2006/relationships" xmlns:p="http://schemas.openxmlformats.org/presentationml/2006/main">
-  <p:cSld>
-    <p:spTree>
-      <p:nvGrpSpPr>
-        <p:cNvPr id="1" name=""/>
-        <p:cNvGrpSpPr/>
-        <p:nvPr/>
-      </p:nvGrpSpPr>
-      <p:grpSpPr>
-        <a:xfrm>
-          <a:off x="0" y="0"/>
-          <a:ext cx="0" cy="0"/>
-          <a:chOff x="0" y="0"/>
-          <a:chExt cx="0" cy="0"/>
-        </a:xfrm>
-      </p:grpSpPr>
-      <p:sp>
-        <p:nvSpPr>
-          <p:cNvPr id="2" name="Title 1">
-            <a:extLst>
-              <a:ext uri="{FF2B5EF4-FFF2-40B4-BE49-F238E27FC236}">
-                <a16:creationId xmlns:a16="http://schemas.microsoft.com/office/drawing/2014/main" id="{C6411AC4-5FDF-FB94-6038-B7CC556FB85B}"/>
-              </a:ext>
-            </a:extLst>
-          </p:cNvPr>
-          <p:cNvSpPr>
-            <a:spLocks noGrp="1"/>
-          </p:cNvSpPr>
-          <p:nvPr>
-            <p:ph type="title"/>
-          </p:nvPr>
-        </p:nvSpPr>
-        <p:spPr/>
-        <p:txBody>
-          <a:bodyPr>
-            <a:normAutofit/>
-          </a:bodyPr>
-          <a:lstStyle/>
-          <a:p>
-            <a:r>
-              <a:rPr lang="en-US" dirty="0"/>
-              <a:t>Bagging (bootstrap aggregating)</a:t>
-            </a:r>
-          </a:p>
-        </p:txBody>
-      </p:sp>
-      <p:sp>
-        <p:nvSpPr>
-          <p:cNvPr id="3" name="Content Placeholder 2">
-            <a:extLst>
-              <a:ext uri="{FF2B5EF4-FFF2-40B4-BE49-F238E27FC236}">
-                <a16:creationId xmlns:a16="http://schemas.microsoft.com/office/drawing/2014/main" id="{9F12015B-E2E6-BAAF-11BC-11FCEE55B55C}"/>
-              </a:ext>
-            </a:extLst>
-          </p:cNvPr>
-          <p:cNvSpPr>
-            <a:spLocks noGrp="1"/>
-          </p:cNvSpPr>
-          <p:nvPr>
-            <p:ph idx="1"/>
-          </p:nvPr>
-        </p:nvSpPr>
-        <p:spPr/>
-        <p:txBody>
-          <a:bodyPr>
-            <a:normAutofit/>
-          </a:bodyPr>
-          <a:lstStyle/>
-          <a:p>
-            <a:r>
-              <a:rPr lang="en-US" dirty="0"/>
-              <a:t>Goal: Reduce variance (overfitting)</a:t>
-            </a:r>
-          </a:p>
-          <a:p>
-            <a:r>
-              <a:rPr lang="en-US" dirty="0"/>
-              <a:t>How: Train several models in parallel on random subsets of the data</a:t>
-            </a:r>
-          </a:p>
-          <a:p>
-            <a:pPr lvl="1"/>
-            <a:r>
-              <a:rPr lang="en-US" dirty="0"/>
-              <a:t>(with replacement = bootstrapping).</a:t>
-            </a:r>
-          </a:p>
-          <a:p>
-            <a:r>
-              <a:rPr lang="en-US" dirty="0"/>
-              <a:t>Combine: Average (for regression) or majority vote (for classification).</a:t>
-            </a:r>
-          </a:p>
-          <a:p>
-            <a:r>
-              <a:rPr lang="en-US" dirty="0"/>
-              <a:t>Key idea: Many weak models → One strong model</a:t>
-            </a:r>
-          </a:p>
-          <a:p>
-            <a:pPr lvl="1"/>
-            <a:r>
-              <a:rPr lang="en-US" dirty="0"/>
-              <a:t>Random Forest = Bagging + Decision Trees</a:t>
-            </a:r>
-          </a:p>
-          <a:p>
-            <a:r>
-              <a:rPr lang="en-US" dirty="0"/>
-              <a:t>Each tree is trained on a different bootstrap sample and considers only a random subset of features at each split.</a:t>
-            </a:r>
-          </a:p>
-        </p:txBody>
-      </p:sp>
-      <p:sp>
-        <p:nvSpPr>
-          <p:cNvPr id="4" name="Slide Number Placeholder 3">
-            <a:extLst>
-              <a:ext uri="{FF2B5EF4-FFF2-40B4-BE49-F238E27FC236}">
-                <a16:creationId xmlns:a16="http://schemas.microsoft.com/office/drawing/2014/main" id="{D6B6C055-CE5A-41B9-F2A7-0D04ED3B880E}"/>
-              </a:ext>
-            </a:extLst>
-          </p:cNvPr>
-          <p:cNvSpPr>
-            <a:spLocks noGrp="1"/>
-          </p:cNvSpPr>
-          <p:nvPr>
-            <p:ph type="sldNum" sz="quarter" idx="12"/>
-          </p:nvPr>
-        </p:nvSpPr>
-        <p:spPr/>
-        <p:txBody>
-          <a:bodyPr/>
-          <a:lstStyle/>
-          <a:p>
-            <a:fld id="{FE1B3154-47D9-4402-8EDB-E791933DC0B9}" type="slidenum">
-              <a:rPr lang="nl-BE" smtClean="0"/>
-              <a:pPr/>
-              <a:t>38</a:t>
-            </a:fld>
-            <a:endParaRPr lang="nl-BE"/>
-          </a:p>
-        </p:txBody>
-      </p:sp>
-    </p:spTree>
-    <p:extLst>
-      <p:ext uri="{BB962C8B-B14F-4D97-AF65-F5344CB8AC3E}">
-        <p14:creationId xmlns:p14="http://schemas.microsoft.com/office/powerpoint/2010/main" val="484664274"/>
-      </p:ext>
-    </p:extLst>
-  </p:cSld>
-  <p:clrMapOvr>
-    <a:masterClrMapping/>
-  </p:clrMapOvr>
-</p:sld>
-</file>
-
 <file path=ppt/slides/slide39.xml><?xml version="1.0" encoding="utf-8"?>
 <p:sld xmlns:a="http://schemas.openxmlformats.org/drawingml/2006/main" xmlns:r="http://schemas.openxmlformats.org/officeDocument/2006/relationships" xmlns:p="http://schemas.openxmlformats.org/presentationml/2006/main">
   <p:cSld>
@@ -12423,7 +12514,7 @@
           <p:cNvPr id="2" name="Title 1">
             <a:extLst>
               <a:ext uri="{FF2B5EF4-FFF2-40B4-BE49-F238E27FC236}">
-                <a16:creationId xmlns:a16="http://schemas.microsoft.com/office/drawing/2014/main" id="{012AB781-CFAD-4858-6D2C-BED909216BEA}"/>
+                <a16:creationId xmlns:a16="http://schemas.microsoft.com/office/drawing/2014/main" id="{C6411AC4-5FDF-FB94-6038-B7CC556FB85B}"/>
               </a:ext>
             </a:extLst>
           </p:cNvPr>
@@ -12436,12 +12527,14 @@
         </p:nvSpPr>
         <p:spPr/>
         <p:txBody>
-          <a:bodyPr/>
-          <a:lstStyle/>
-          <a:p>
-            <a:r>
-              <a:rPr lang="en-US" dirty="0"/>
-              <a:t>Bootstrapping</a:t>
+          <a:bodyPr>
+            <a:normAutofit/>
+          </a:bodyPr>
+          <a:lstStyle/>
+          <a:p>
+            <a:r>
+              <a:rPr lang="en-US" dirty="0"/>
+              <a:t>Bagging (bootstrap aggregating)</a:t>
             </a:r>
           </a:p>
         </p:txBody>
@@ -12451,7 +12544,7 @@
           <p:cNvPr id="3" name="Content Placeholder 2">
             <a:extLst>
               <a:ext uri="{FF2B5EF4-FFF2-40B4-BE49-F238E27FC236}">
-                <a16:creationId xmlns:a16="http://schemas.microsoft.com/office/drawing/2014/main" id="{7224B399-E398-2CCF-D516-F8CA4796DE08}"/>
+                <a16:creationId xmlns:a16="http://schemas.microsoft.com/office/drawing/2014/main" id="{9F12015B-E2E6-BAAF-11BC-11FCEE55B55C}"/>
               </a:ext>
             </a:extLst>
           </p:cNvPr>
@@ -12464,39 +12557,53 @@
         </p:nvSpPr>
         <p:spPr/>
         <p:txBody>
-          <a:bodyPr/>
-          <a:lstStyle/>
-          <a:p>
-            <a:r>
-              <a:rPr lang="en-US" dirty="0"/>
-              <a:t>If you need more data you can do more experiments, or you can</a:t>
-            </a:r>
-            <a:br>
-              <a:rPr lang="en-US" dirty="0"/>
-            </a:br>
-            <a:r>
-              <a:rPr lang="en-US" dirty="0"/>
-              <a:t>bootstrap your data</a:t>
+          <a:bodyPr>
+            <a:normAutofit/>
+          </a:bodyPr>
+          <a:lstStyle/>
+          <a:p>
+            <a:r>
+              <a:rPr lang="en-US" dirty="0"/>
+              <a:t>Goal: Reduce variance (overfitting)</a:t>
+            </a:r>
+          </a:p>
+          <a:p>
+            <a:r>
+              <a:rPr lang="en-US" dirty="0"/>
+              <a:t>How: Train several models in parallel on random subsets of the data</a:t>
             </a:r>
           </a:p>
           <a:p>
             <a:pPr lvl="1"/>
             <a:r>
               <a:rPr lang="en-US" dirty="0"/>
-              <a:t>Getting more data is expensive and not always possible</a:t>
-            </a:r>
-          </a:p>
-          <a:p>
-            <a:r>
-              <a:rPr lang="en-US" dirty="0"/>
-              <a:t>Another solution is bootstrapping</a:t>
-            </a:r>
-          </a:p>
-          <a:p>
-            <a:endParaRPr lang="en-BE" dirty="0"/>
-          </a:p>
-          <a:p>
-            <a:endParaRPr lang="en-US" dirty="0"/>
+              <a:t>(with replacement = bootstrapping).</a:t>
+            </a:r>
+          </a:p>
+          <a:p>
+            <a:r>
+              <a:rPr lang="en-US" dirty="0"/>
+              <a:t>Combine: Average (for regression) or majority vote (for classification).</a:t>
+            </a:r>
+          </a:p>
+          <a:p>
+            <a:r>
+              <a:rPr lang="en-US" dirty="0"/>
+              <a:t>Key idea: Many weak models → One strong model</a:t>
+            </a:r>
+          </a:p>
+          <a:p>
+            <a:pPr lvl="1"/>
+            <a:r>
+              <a:rPr lang="en-US" dirty="0"/>
+              <a:t>Random Forest = Bagging + Decision Trees</a:t>
+            </a:r>
+          </a:p>
+          <a:p>
+            <a:r>
+              <a:rPr lang="en-US" dirty="0"/>
+              <a:t>Each tree is trained on a different bootstrap sample and considers only a random subset of features at each split.</a:t>
+            </a:r>
           </a:p>
         </p:txBody>
       </p:sp>
@@ -12505,7 +12612,7 @@
           <p:cNvPr id="4" name="Slide Number Placeholder 3">
             <a:extLst>
               <a:ext uri="{FF2B5EF4-FFF2-40B4-BE49-F238E27FC236}">
-                <a16:creationId xmlns:a16="http://schemas.microsoft.com/office/drawing/2014/main" id="{FF648A02-0CF3-A13A-E24C-5B80E28DF287}"/>
+                <a16:creationId xmlns:a16="http://schemas.microsoft.com/office/drawing/2014/main" id="{D6B6C055-CE5A-41B9-F2A7-0D04ED3B880E}"/>
               </a:ext>
             </a:extLst>
           </p:cNvPr>
@@ -12530,76 +12637,10 @@
           </a:p>
         </p:txBody>
       </p:sp>
-      <p:pic>
-        <p:nvPicPr>
-          <p:cNvPr id="6" name="Picture 5" descr="A person in a pirate garment&#10;&#10;AI-generated content may be incorrect.">
-            <a:extLst>
-              <a:ext uri="{FF2B5EF4-FFF2-40B4-BE49-F238E27FC236}">
-                <a16:creationId xmlns:a16="http://schemas.microsoft.com/office/drawing/2014/main" id="{DC06A166-E599-7B21-C246-39024F768E61}"/>
-              </a:ext>
-            </a:extLst>
-          </p:cNvPr>
-          <p:cNvPicPr>
-            <a:picLocks noChangeAspect="1"/>
-          </p:cNvPicPr>
-          <p:nvPr/>
-        </p:nvPicPr>
-        <p:blipFill>
-          <a:blip r:embed="rId3" cstate="print">
-            <a:extLst>
-              <a:ext uri="{28A0092B-C50C-407E-A947-70E740481C1C}">
-                <a14:useLocalDpi xmlns:a14="http://schemas.microsoft.com/office/drawing/2010/main" val="0"/>
-              </a:ext>
-            </a:extLst>
-          </a:blip>
-          <a:stretch>
-            <a:fillRect/>
-          </a:stretch>
-        </p:blipFill>
-        <p:spPr>
-          <a:xfrm>
-            <a:off x="10646702" y="136525"/>
-            <a:ext cx="1414195" cy="1885593"/>
-          </a:xfrm>
-          <a:prstGeom prst="rect">
-            <a:avLst/>
-          </a:prstGeom>
-        </p:spPr>
-      </p:pic>
-      <p:pic>
-        <p:nvPicPr>
-          <p:cNvPr id="7" name="Picture 6">
-            <a:extLst>
-              <a:ext uri="{FF2B5EF4-FFF2-40B4-BE49-F238E27FC236}">
-                <a16:creationId xmlns:a16="http://schemas.microsoft.com/office/drawing/2014/main" id="{82EB9DD9-B6E0-7D88-363E-16845D968766}"/>
-              </a:ext>
-            </a:extLst>
-          </p:cNvPr>
-          <p:cNvPicPr>
-            <a:picLocks noChangeAspect="1"/>
-          </p:cNvPicPr>
-          <p:nvPr/>
-        </p:nvPicPr>
-        <p:blipFill>
-          <a:blip r:embed="rId4"/>
-          <a:stretch>
-            <a:fillRect/>
-          </a:stretch>
-        </p:blipFill>
-        <p:spPr>
-          <a:xfrm>
-            <a:off x="4395326" y="3519564"/>
-            <a:ext cx="3401347" cy="3068347"/>
-          </a:xfrm>
-          <a:prstGeom prst="rect">
-            <a:avLst/>
-          </a:prstGeom>
-        </p:spPr>
-      </p:pic>
     </p:spTree>
     <p:extLst>
       <p:ext uri="{BB962C8B-B14F-4D97-AF65-F5344CB8AC3E}">
-        <p14:creationId xmlns:p14="http://schemas.microsoft.com/office/powerpoint/2010/main" val="1951979662"/>
+        <p14:creationId xmlns:p14="http://schemas.microsoft.com/office/powerpoint/2010/main" val="484664274"/>
       </p:ext>
     </p:extLst>
   </p:cSld>
@@ -12902,7 +12943,7 @@
           <p:cNvPr id="2" name="Title 1">
             <a:extLst>
               <a:ext uri="{FF2B5EF4-FFF2-40B4-BE49-F238E27FC236}">
-                <a16:creationId xmlns:a16="http://schemas.microsoft.com/office/drawing/2014/main" id="{9A32A0C4-C681-3542-ADA1-9E9CE9B6C62C}"/>
+                <a16:creationId xmlns:a16="http://schemas.microsoft.com/office/drawing/2014/main" id="{012AB781-CFAD-4858-6D2C-BED909216BEA}"/>
               </a:ext>
             </a:extLst>
           </p:cNvPr>
@@ -12930,7 +12971,7 @@
           <p:cNvPr id="3" name="Content Placeholder 2">
             <a:extLst>
               <a:ext uri="{FF2B5EF4-FFF2-40B4-BE49-F238E27FC236}">
-                <a16:creationId xmlns:a16="http://schemas.microsoft.com/office/drawing/2014/main" id="{1B42E269-1CDB-8E05-E030-F797752C7761}"/>
+                <a16:creationId xmlns:a16="http://schemas.microsoft.com/office/drawing/2014/main" id="{7224B399-E398-2CCF-D516-F8CA4796DE08}"/>
               </a:ext>
             </a:extLst>
           </p:cNvPr>
@@ -12948,14 +12989,30 @@
           <a:p>
             <a:r>
               <a:rPr lang="en-US" dirty="0"/>
-              <a:t>We make a new dataset and use ‘sampling with replacement’. This means we copy random values and don’t care if we already copied a value.</a:t>
-            </a:r>
-          </a:p>
-          <a:p>
-            <a:r>
-              <a:rPr lang="en-US" dirty="0"/>
-              <a:t>This new dataset is called the bootstrap. </a:t>
-            </a:r>
+              <a:t>If you need more data you can do more experiments, or you can</a:t>
+            </a:r>
+            <a:br>
+              <a:rPr lang="en-US" dirty="0"/>
+            </a:br>
+            <a:r>
+              <a:rPr lang="en-US" dirty="0"/>
+              <a:t>bootstrap your data</a:t>
+            </a:r>
+          </a:p>
+          <a:p>
+            <a:pPr lvl="1"/>
+            <a:r>
+              <a:rPr lang="en-US" dirty="0"/>
+              <a:t>Getting more data is expensive and not always possible</a:t>
+            </a:r>
+          </a:p>
+          <a:p>
+            <a:r>
+              <a:rPr lang="en-US" dirty="0"/>
+              <a:t>Another solution is bootstrapping</a:t>
+            </a:r>
+          </a:p>
+          <a:p>
             <a:endParaRPr lang="en-BE" dirty="0"/>
           </a:p>
           <a:p>
@@ -12968,7 +13025,7 @@
           <p:cNvPr id="4" name="Slide Number Placeholder 3">
             <a:extLst>
               <a:ext uri="{FF2B5EF4-FFF2-40B4-BE49-F238E27FC236}">
-                <a16:creationId xmlns:a16="http://schemas.microsoft.com/office/drawing/2014/main" id="{B4E8EDC2-60A6-6948-DC71-2430E2401909}"/>
+                <a16:creationId xmlns:a16="http://schemas.microsoft.com/office/drawing/2014/main" id="{FF648A02-0CF3-A13A-E24C-5B80E28DF287}"/>
               </a:ext>
             </a:extLst>
           </p:cNvPr>
@@ -12988,6 +13045,198 @@
               <a:rPr lang="nl-BE" smtClean="0"/>
               <a:pPr/>
               <a:t>40</a:t>
+            </a:fld>
+            <a:endParaRPr lang="nl-BE"/>
+          </a:p>
+        </p:txBody>
+      </p:sp>
+      <p:pic>
+        <p:nvPicPr>
+          <p:cNvPr id="6" name="Picture 5" descr="A person in a pirate garment&#10;&#10;AI-generated content may be incorrect.">
+            <a:extLst>
+              <a:ext uri="{FF2B5EF4-FFF2-40B4-BE49-F238E27FC236}">
+                <a16:creationId xmlns:a16="http://schemas.microsoft.com/office/drawing/2014/main" id="{DC06A166-E599-7B21-C246-39024F768E61}"/>
+              </a:ext>
+            </a:extLst>
+          </p:cNvPr>
+          <p:cNvPicPr>
+            <a:picLocks noChangeAspect="1"/>
+          </p:cNvPicPr>
+          <p:nvPr/>
+        </p:nvPicPr>
+        <p:blipFill>
+          <a:blip r:embed="rId3" cstate="print">
+            <a:extLst>
+              <a:ext uri="{28A0092B-C50C-407E-A947-70E740481C1C}">
+                <a14:useLocalDpi xmlns:a14="http://schemas.microsoft.com/office/drawing/2010/main" val="0"/>
+              </a:ext>
+            </a:extLst>
+          </a:blip>
+          <a:stretch>
+            <a:fillRect/>
+          </a:stretch>
+        </p:blipFill>
+        <p:spPr>
+          <a:xfrm>
+            <a:off x="10646702" y="136525"/>
+            <a:ext cx="1414195" cy="1885593"/>
+          </a:xfrm>
+          <a:prstGeom prst="rect">
+            <a:avLst/>
+          </a:prstGeom>
+        </p:spPr>
+      </p:pic>
+      <p:pic>
+        <p:nvPicPr>
+          <p:cNvPr id="7" name="Picture 6">
+            <a:extLst>
+              <a:ext uri="{FF2B5EF4-FFF2-40B4-BE49-F238E27FC236}">
+                <a16:creationId xmlns:a16="http://schemas.microsoft.com/office/drawing/2014/main" id="{82EB9DD9-B6E0-7D88-363E-16845D968766}"/>
+              </a:ext>
+            </a:extLst>
+          </p:cNvPr>
+          <p:cNvPicPr>
+            <a:picLocks noChangeAspect="1"/>
+          </p:cNvPicPr>
+          <p:nvPr/>
+        </p:nvPicPr>
+        <p:blipFill>
+          <a:blip r:embed="rId4"/>
+          <a:stretch>
+            <a:fillRect/>
+          </a:stretch>
+        </p:blipFill>
+        <p:spPr>
+          <a:xfrm>
+            <a:off x="4395326" y="3519564"/>
+            <a:ext cx="3401347" cy="3068347"/>
+          </a:xfrm>
+          <a:prstGeom prst="rect">
+            <a:avLst/>
+          </a:prstGeom>
+        </p:spPr>
+      </p:pic>
+    </p:spTree>
+    <p:extLst>
+      <p:ext uri="{BB962C8B-B14F-4D97-AF65-F5344CB8AC3E}">
+        <p14:creationId xmlns:p14="http://schemas.microsoft.com/office/powerpoint/2010/main" val="1951979662"/>
+      </p:ext>
+    </p:extLst>
+  </p:cSld>
+  <p:clrMapOvr>
+    <a:masterClrMapping/>
+  </p:clrMapOvr>
+</p:sld>
+</file>
+
+<file path=ppt/slides/slide41.xml><?xml version="1.0" encoding="utf-8"?>
+<p:sld xmlns:a="http://schemas.openxmlformats.org/drawingml/2006/main" xmlns:r="http://schemas.openxmlformats.org/officeDocument/2006/relationships" xmlns:p="http://schemas.openxmlformats.org/presentationml/2006/main">
+  <p:cSld>
+    <p:spTree>
+      <p:nvGrpSpPr>
+        <p:cNvPr id="1" name=""/>
+        <p:cNvGrpSpPr/>
+        <p:nvPr/>
+      </p:nvGrpSpPr>
+      <p:grpSpPr>
+        <a:xfrm>
+          <a:off x="0" y="0"/>
+          <a:ext cx="0" cy="0"/>
+          <a:chOff x="0" y="0"/>
+          <a:chExt cx="0" cy="0"/>
+        </a:xfrm>
+      </p:grpSpPr>
+      <p:sp>
+        <p:nvSpPr>
+          <p:cNvPr id="2" name="Title 1">
+            <a:extLst>
+              <a:ext uri="{FF2B5EF4-FFF2-40B4-BE49-F238E27FC236}">
+                <a16:creationId xmlns:a16="http://schemas.microsoft.com/office/drawing/2014/main" id="{9A32A0C4-C681-3542-ADA1-9E9CE9B6C62C}"/>
+              </a:ext>
+            </a:extLst>
+          </p:cNvPr>
+          <p:cNvSpPr>
+            <a:spLocks noGrp="1"/>
+          </p:cNvSpPr>
+          <p:nvPr>
+            <p:ph type="title"/>
+          </p:nvPr>
+        </p:nvSpPr>
+        <p:spPr/>
+        <p:txBody>
+          <a:bodyPr/>
+          <a:lstStyle/>
+          <a:p>
+            <a:r>
+              <a:rPr lang="en-US" dirty="0"/>
+              <a:t>Bootstrapping</a:t>
+            </a:r>
+          </a:p>
+        </p:txBody>
+      </p:sp>
+      <p:sp>
+        <p:nvSpPr>
+          <p:cNvPr id="3" name="Content Placeholder 2">
+            <a:extLst>
+              <a:ext uri="{FF2B5EF4-FFF2-40B4-BE49-F238E27FC236}">
+                <a16:creationId xmlns:a16="http://schemas.microsoft.com/office/drawing/2014/main" id="{1B42E269-1CDB-8E05-E030-F797752C7761}"/>
+              </a:ext>
+            </a:extLst>
+          </p:cNvPr>
+          <p:cNvSpPr>
+            <a:spLocks noGrp="1"/>
+          </p:cNvSpPr>
+          <p:nvPr>
+            <p:ph idx="1"/>
+          </p:nvPr>
+        </p:nvSpPr>
+        <p:spPr/>
+        <p:txBody>
+          <a:bodyPr/>
+          <a:lstStyle/>
+          <a:p>
+            <a:r>
+              <a:rPr lang="en-US" dirty="0"/>
+              <a:t>We make a new dataset and use ‘sampling with replacement’. This means we copy random values and don’t care if we already copied a value.</a:t>
+            </a:r>
+          </a:p>
+          <a:p>
+            <a:r>
+              <a:rPr lang="en-US" dirty="0"/>
+              <a:t>This new dataset is called the bootstrap. </a:t>
+            </a:r>
+            <a:endParaRPr lang="en-BE" dirty="0"/>
+          </a:p>
+          <a:p>
+            <a:endParaRPr lang="en-US" dirty="0"/>
+          </a:p>
+        </p:txBody>
+      </p:sp>
+      <p:sp>
+        <p:nvSpPr>
+          <p:cNvPr id="4" name="Slide Number Placeholder 3">
+            <a:extLst>
+              <a:ext uri="{FF2B5EF4-FFF2-40B4-BE49-F238E27FC236}">
+                <a16:creationId xmlns:a16="http://schemas.microsoft.com/office/drawing/2014/main" id="{B4E8EDC2-60A6-6948-DC71-2430E2401909}"/>
+              </a:ext>
+            </a:extLst>
+          </p:cNvPr>
+          <p:cNvSpPr>
+            <a:spLocks noGrp="1"/>
+          </p:cNvSpPr>
+          <p:nvPr>
+            <p:ph type="sldNum" sz="quarter" idx="12"/>
+          </p:nvPr>
+        </p:nvSpPr>
+        <p:spPr/>
+        <p:txBody>
+          <a:bodyPr/>
+          <a:lstStyle/>
+          <a:p>
+            <a:fld id="{FE1B3154-47D9-4402-8EDB-E791933DC0B9}" type="slidenum">
+              <a:rPr lang="nl-BE" smtClean="0"/>
+              <a:pPr/>
+              <a:t>41</a:t>
             </a:fld>
             <a:endParaRPr lang="nl-BE"/>
           </a:p>
@@ -13036,7 +13285,7 @@
 </p:sld>
 </file>
 
-<file path=ppt/slides/slide41.xml><?xml version="1.0" encoding="utf-8"?>
+<file path=ppt/slides/slide42.xml><?xml version="1.0" encoding="utf-8"?>
 <p:sld xmlns:a="http://schemas.openxmlformats.org/drawingml/2006/main" xmlns:r="http://schemas.openxmlformats.org/officeDocument/2006/relationships" xmlns:p="http://schemas.openxmlformats.org/presentationml/2006/main">
   <p:cSld>
     <p:spTree>
@@ -13147,7 +13396,7 @@
             <a:fld id="{FE1B3154-47D9-4402-8EDB-E791933DC0B9}" type="slidenum">
               <a:rPr lang="nl-BE" smtClean="0"/>
               <a:pPr/>
-              <a:t>41</a:t>
+              <a:t>42</a:t>
             </a:fld>
             <a:endParaRPr lang="nl-BE"/>
           </a:p>
@@ -13196,212 +13445,6 @@
 </p:sld>
 </file>
 
-<file path=ppt/slides/slide42.xml><?xml version="1.0" encoding="utf-8"?>
-<p:sld xmlns:a="http://schemas.openxmlformats.org/drawingml/2006/main" xmlns:r="http://schemas.openxmlformats.org/officeDocument/2006/relationships" xmlns:p="http://schemas.openxmlformats.org/presentationml/2006/main">
-  <p:cSld>
-    <p:spTree>
-      <p:nvGrpSpPr>
-        <p:cNvPr id="1" name=""/>
-        <p:cNvGrpSpPr/>
-        <p:nvPr/>
-      </p:nvGrpSpPr>
-      <p:grpSpPr>
-        <a:xfrm>
-          <a:off x="0" y="0"/>
-          <a:ext cx="0" cy="0"/>
-          <a:chOff x="0" y="0"/>
-          <a:chExt cx="0" cy="0"/>
-        </a:xfrm>
-      </p:grpSpPr>
-      <p:sp>
-        <p:nvSpPr>
-          <p:cNvPr id="2" name="Title 1">
-            <a:extLst>
-              <a:ext uri="{FF2B5EF4-FFF2-40B4-BE49-F238E27FC236}">
-                <a16:creationId xmlns:a16="http://schemas.microsoft.com/office/drawing/2014/main" id="{B3BC9A4C-8413-7648-0B3A-70E15A2014E5}"/>
-              </a:ext>
-            </a:extLst>
-          </p:cNvPr>
-          <p:cNvSpPr>
-            <a:spLocks noGrp="1"/>
-          </p:cNvSpPr>
-          <p:nvPr>
-            <p:ph type="title"/>
-          </p:nvPr>
-        </p:nvSpPr>
-        <p:spPr/>
-        <p:txBody>
-          <a:bodyPr/>
-          <a:lstStyle/>
-          <a:p>
-            <a:r>
-              <a:rPr lang="en-US" dirty="0"/>
-              <a:t>Boosting</a:t>
-            </a:r>
-          </a:p>
-        </p:txBody>
-      </p:sp>
-      <p:sp>
-        <p:nvSpPr>
-          <p:cNvPr id="3" name="Content Placeholder 2">
-            <a:extLst>
-              <a:ext uri="{FF2B5EF4-FFF2-40B4-BE49-F238E27FC236}">
-                <a16:creationId xmlns:a16="http://schemas.microsoft.com/office/drawing/2014/main" id="{B4A3408A-C9E3-1B69-69D4-4264D0B0983D}"/>
-              </a:ext>
-            </a:extLst>
-          </p:cNvPr>
-          <p:cNvSpPr>
-            <a:spLocks noGrp="1"/>
-          </p:cNvSpPr>
-          <p:nvPr>
-            <p:ph idx="1"/>
-          </p:nvPr>
-        </p:nvSpPr>
-        <p:spPr/>
-        <p:txBody>
-          <a:bodyPr>
-            <a:normAutofit/>
-          </a:bodyPr>
-          <a:lstStyle/>
-          <a:p>
-            <a:pPr>
-              <a:buFont typeface="Arial" panose="020B0604020202020204" pitchFamily="34" charset="0"/>
-              <a:buChar char="•"/>
-            </a:pPr>
-            <a:r>
-              <a:rPr lang="en-US" dirty="0"/>
-              <a:t>Goal: Reduce bias (underfitting).</a:t>
-            </a:r>
-          </a:p>
-          <a:p>
-            <a:pPr>
-              <a:buFont typeface="Arial" panose="020B0604020202020204" pitchFamily="34" charset="0"/>
-              <a:buChar char="•"/>
-            </a:pPr>
-            <a:r>
-              <a:rPr lang="en-US" dirty="0"/>
-              <a:t>How: Train models sequentially, where each new model focuses on correcting errors made by the previous ones</a:t>
-            </a:r>
-          </a:p>
-          <a:p>
-            <a:pPr>
-              <a:buFont typeface="Arial" panose="020B0604020202020204" pitchFamily="34" charset="0"/>
-              <a:buChar char="•"/>
-            </a:pPr>
-            <a:r>
-              <a:rPr lang="en-US" dirty="0"/>
-              <a:t>Combine: Weighted sum of all models</a:t>
-            </a:r>
-          </a:p>
-          <a:p>
-            <a:pPr>
-              <a:buFont typeface="Arial" panose="020B0604020202020204" pitchFamily="34" charset="0"/>
-              <a:buChar char="•"/>
-            </a:pPr>
-            <a:r>
-              <a:rPr lang="en-US" dirty="0"/>
-              <a:t>Key idea: Train smarter over time</a:t>
-            </a:r>
-          </a:p>
-          <a:p>
-            <a:pPr>
-              <a:buFont typeface="Arial" panose="020B0604020202020204" pitchFamily="34" charset="0"/>
-              <a:buChar char="•"/>
-            </a:pPr>
-            <a:r>
-              <a:rPr lang="en-US" dirty="0"/>
-              <a:t>Examples:</a:t>
-            </a:r>
-          </a:p>
-          <a:p>
-            <a:pPr lvl="1"/>
-            <a:r>
-              <a:rPr lang="en-US" dirty="0"/>
-              <a:t>Gradient Boosting</a:t>
-            </a:r>
-          </a:p>
-          <a:p>
-            <a:pPr lvl="1"/>
-            <a:r>
-              <a:rPr lang="en-US" dirty="0"/>
-              <a:t>AdaBoost</a:t>
-            </a:r>
-          </a:p>
-          <a:p>
-            <a:pPr lvl="1"/>
-            <a:r>
-              <a:rPr lang="en-US" dirty="0" err="1"/>
-              <a:t>XGBoost</a:t>
-            </a:r>
-            <a:r>
-              <a:rPr lang="en-US" dirty="0"/>
-              <a:t> / </a:t>
-            </a:r>
-            <a:r>
-              <a:rPr lang="en-US" dirty="0" err="1"/>
-              <a:t>LightGBM</a:t>
-            </a:r>
-            <a:r>
-              <a:rPr lang="en-US" dirty="0"/>
-              <a:t> / </a:t>
-            </a:r>
-            <a:r>
-              <a:rPr lang="en-US" dirty="0" err="1"/>
-              <a:t>CatBoost</a:t>
-            </a:r>
-            <a:r>
-              <a:rPr lang="en-US" dirty="0"/>
-              <a:t> (fast and optimized versions)</a:t>
-            </a:r>
-          </a:p>
-          <a:p>
-            <a:endParaRPr lang="en-US" dirty="0"/>
-          </a:p>
-        </p:txBody>
-      </p:sp>
-      <p:sp>
-        <p:nvSpPr>
-          <p:cNvPr id="4" name="Slide Number Placeholder 3">
-            <a:extLst>
-              <a:ext uri="{FF2B5EF4-FFF2-40B4-BE49-F238E27FC236}">
-                <a16:creationId xmlns:a16="http://schemas.microsoft.com/office/drawing/2014/main" id="{9244D7A7-691D-FBAE-7D93-3C9143BA73C2}"/>
-              </a:ext>
-            </a:extLst>
-          </p:cNvPr>
-          <p:cNvSpPr>
-            <a:spLocks noGrp="1"/>
-          </p:cNvSpPr>
-          <p:nvPr>
-            <p:ph type="sldNum" sz="quarter" idx="12"/>
-          </p:nvPr>
-        </p:nvSpPr>
-        <p:spPr/>
-        <p:txBody>
-          <a:bodyPr/>
-          <a:lstStyle/>
-          <a:p>
-            <a:fld id="{FE1B3154-47D9-4402-8EDB-E791933DC0B9}" type="slidenum">
-              <a:rPr lang="nl-BE" smtClean="0"/>
-              <a:pPr/>
-              <a:t>42</a:t>
-            </a:fld>
-            <a:endParaRPr lang="nl-BE"/>
-          </a:p>
-        </p:txBody>
-      </p:sp>
-    </p:spTree>
-    <p:extLst>
-      <p:ext uri="{BB962C8B-B14F-4D97-AF65-F5344CB8AC3E}">
-        <p14:creationId xmlns:p14="http://schemas.microsoft.com/office/powerpoint/2010/main" val="3819424571"/>
-      </p:ext>
-    </p:extLst>
-  </p:cSld>
-  <p:clrMapOvr>
-    <a:masterClrMapping/>
-  </p:clrMapOvr>
-</p:sld>
-</file>
-
 <file path=ppt/slides/slide43.xml><?xml version="1.0" encoding="utf-8"?>
 <p:sld xmlns:a="http://schemas.openxmlformats.org/drawingml/2006/main" xmlns:r="http://schemas.openxmlformats.org/officeDocument/2006/relationships" xmlns:p="http://schemas.openxmlformats.org/presentationml/2006/main">
   <p:cSld>
@@ -13424,7 +13467,7 @@
           <p:cNvPr id="2" name="Title 1">
             <a:extLst>
               <a:ext uri="{FF2B5EF4-FFF2-40B4-BE49-F238E27FC236}">
-                <a16:creationId xmlns:a16="http://schemas.microsoft.com/office/drawing/2014/main" id="{CE029907-EB9F-E178-307D-3E33944B4A5F}"/>
+                <a16:creationId xmlns:a16="http://schemas.microsoft.com/office/drawing/2014/main" id="{B3BC9A4C-8413-7648-0B3A-70E15A2014E5}"/>
               </a:ext>
             </a:extLst>
           </p:cNvPr>
@@ -13441,13 +13484,126 @@
           <a:lstStyle/>
           <a:p>
             <a:r>
-              <a:rPr lang="nl-BE" dirty="0" err="1"/>
-              <a:t>Homogeneous</a:t>
-            </a:r>
-            <a:r>
-              <a:rPr lang="nl-BE" dirty="0"/>
-              <a:t> ensemble</a:t>
-            </a:r>
+              <a:rPr lang="en-US" dirty="0"/>
+              <a:t>Boosting</a:t>
+            </a:r>
+          </a:p>
+        </p:txBody>
+      </p:sp>
+      <p:sp>
+        <p:nvSpPr>
+          <p:cNvPr id="3" name="Content Placeholder 2">
+            <a:extLst>
+              <a:ext uri="{FF2B5EF4-FFF2-40B4-BE49-F238E27FC236}">
+                <a16:creationId xmlns:a16="http://schemas.microsoft.com/office/drawing/2014/main" id="{B4A3408A-C9E3-1B69-69D4-4264D0B0983D}"/>
+              </a:ext>
+            </a:extLst>
+          </p:cNvPr>
+          <p:cNvSpPr>
+            <a:spLocks noGrp="1"/>
+          </p:cNvSpPr>
+          <p:nvPr>
+            <p:ph idx="1"/>
+          </p:nvPr>
+        </p:nvSpPr>
+        <p:spPr/>
+        <p:txBody>
+          <a:bodyPr>
+            <a:normAutofit/>
+          </a:bodyPr>
+          <a:lstStyle/>
+          <a:p>
+            <a:pPr>
+              <a:buFont typeface="Arial" panose="020B0604020202020204" pitchFamily="34" charset="0"/>
+              <a:buChar char="•"/>
+            </a:pPr>
+            <a:r>
+              <a:rPr lang="en-US" dirty="0"/>
+              <a:t>Goal: Reduce bias (underfitting).</a:t>
+            </a:r>
+          </a:p>
+          <a:p>
+            <a:pPr>
+              <a:buFont typeface="Arial" panose="020B0604020202020204" pitchFamily="34" charset="0"/>
+              <a:buChar char="•"/>
+            </a:pPr>
+            <a:r>
+              <a:rPr lang="en-US" dirty="0"/>
+              <a:t>How: Train models sequentially, where each new model focuses on correcting errors made by the previous ones</a:t>
+            </a:r>
+          </a:p>
+          <a:p>
+            <a:pPr>
+              <a:buFont typeface="Arial" panose="020B0604020202020204" pitchFamily="34" charset="0"/>
+              <a:buChar char="•"/>
+            </a:pPr>
+            <a:r>
+              <a:rPr lang="en-US" dirty="0"/>
+              <a:t>Combine: Weighted sum of all models</a:t>
+            </a:r>
+          </a:p>
+          <a:p>
+            <a:pPr>
+              <a:buFont typeface="Arial" panose="020B0604020202020204" pitchFamily="34" charset="0"/>
+              <a:buChar char="•"/>
+            </a:pPr>
+            <a:r>
+              <a:rPr lang="en-US" dirty="0"/>
+              <a:t>Key idea: Train smarter over time</a:t>
+            </a:r>
+          </a:p>
+          <a:p>
+            <a:pPr>
+              <a:buFont typeface="Arial" panose="020B0604020202020204" pitchFamily="34" charset="0"/>
+              <a:buChar char="•"/>
+            </a:pPr>
+            <a:r>
+              <a:rPr lang="en-US" dirty="0"/>
+              <a:t>Examples:</a:t>
+            </a:r>
+          </a:p>
+          <a:p>
+            <a:pPr lvl="1"/>
+            <a:r>
+              <a:rPr lang="en-US" dirty="0"/>
+              <a:t>Gradient Boosting</a:t>
+            </a:r>
+          </a:p>
+          <a:p>
+            <a:pPr lvl="1"/>
+            <a:r>
+              <a:rPr lang="en-US" dirty="0"/>
+              <a:t>AdaBoost</a:t>
+            </a:r>
+          </a:p>
+          <a:p>
+            <a:pPr lvl="1"/>
+            <a:r>
+              <a:rPr lang="en-US" dirty="0" err="1"/>
+              <a:t>XGBoost</a:t>
+            </a:r>
+            <a:r>
+              <a:rPr lang="en-US" dirty="0"/>
+              <a:t> / </a:t>
+            </a:r>
+            <a:r>
+              <a:rPr lang="en-US" dirty="0" err="1"/>
+              <a:t>LightGBM</a:t>
+            </a:r>
+            <a:r>
+              <a:rPr lang="en-US" dirty="0"/>
+              <a:t> / </a:t>
+            </a:r>
+            <a:r>
+              <a:rPr lang="en-US" dirty="0" err="1"/>
+              <a:t>CatBoost</a:t>
+            </a:r>
+            <a:r>
+              <a:rPr lang="en-US" dirty="0"/>
+              <a:t> (fast and optimized versions)</a:t>
+            </a:r>
+          </a:p>
+          <a:p>
             <a:endParaRPr lang="en-US" dirty="0"/>
           </a:p>
         </p:txBody>
@@ -13457,7 +13613,7 @@
           <p:cNvPr id="4" name="Slide Number Placeholder 3">
             <a:extLst>
               <a:ext uri="{FF2B5EF4-FFF2-40B4-BE49-F238E27FC236}">
-                <a16:creationId xmlns:a16="http://schemas.microsoft.com/office/drawing/2014/main" id="{6EC0584E-0C91-FAE3-584C-50067562C40C}"/>
+                <a16:creationId xmlns:a16="http://schemas.microsoft.com/office/drawing/2014/main" id="{9244D7A7-691D-FBAE-7D93-3C9143BA73C2}"/>
               </a:ext>
             </a:extLst>
           </p:cNvPr>
@@ -13477,6 +13633,99 @@
               <a:rPr lang="nl-BE" smtClean="0"/>
               <a:pPr/>
               <a:t>43</a:t>
+            </a:fld>
+            <a:endParaRPr lang="nl-BE"/>
+          </a:p>
+        </p:txBody>
+      </p:sp>
+    </p:spTree>
+    <p:extLst>
+      <p:ext uri="{BB962C8B-B14F-4D97-AF65-F5344CB8AC3E}">
+        <p14:creationId xmlns:p14="http://schemas.microsoft.com/office/powerpoint/2010/main" val="3819424571"/>
+      </p:ext>
+    </p:extLst>
+  </p:cSld>
+  <p:clrMapOvr>
+    <a:masterClrMapping/>
+  </p:clrMapOvr>
+</p:sld>
+</file>
+
+<file path=ppt/slides/slide44.xml><?xml version="1.0" encoding="utf-8"?>
+<p:sld xmlns:a="http://schemas.openxmlformats.org/drawingml/2006/main" xmlns:r="http://schemas.openxmlformats.org/officeDocument/2006/relationships" xmlns:p="http://schemas.openxmlformats.org/presentationml/2006/main">
+  <p:cSld>
+    <p:spTree>
+      <p:nvGrpSpPr>
+        <p:cNvPr id="1" name=""/>
+        <p:cNvGrpSpPr/>
+        <p:nvPr/>
+      </p:nvGrpSpPr>
+      <p:grpSpPr>
+        <a:xfrm>
+          <a:off x="0" y="0"/>
+          <a:ext cx="0" cy="0"/>
+          <a:chOff x="0" y="0"/>
+          <a:chExt cx="0" cy="0"/>
+        </a:xfrm>
+      </p:grpSpPr>
+      <p:sp>
+        <p:nvSpPr>
+          <p:cNvPr id="2" name="Title 1">
+            <a:extLst>
+              <a:ext uri="{FF2B5EF4-FFF2-40B4-BE49-F238E27FC236}">
+                <a16:creationId xmlns:a16="http://schemas.microsoft.com/office/drawing/2014/main" id="{CE029907-EB9F-E178-307D-3E33944B4A5F}"/>
+              </a:ext>
+            </a:extLst>
+          </p:cNvPr>
+          <p:cNvSpPr>
+            <a:spLocks noGrp="1"/>
+          </p:cNvSpPr>
+          <p:nvPr>
+            <p:ph type="title"/>
+          </p:nvPr>
+        </p:nvSpPr>
+        <p:spPr/>
+        <p:txBody>
+          <a:bodyPr/>
+          <a:lstStyle/>
+          <a:p>
+            <a:r>
+              <a:rPr lang="nl-BE" dirty="0" err="1"/>
+              <a:t>Homogeneous</a:t>
+            </a:r>
+            <a:r>
+              <a:rPr lang="nl-BE" dirty="0"/>
+              <a:t> ensemble</a:t>
+            </a:r>
+            <a:endParaRPr lang="en-US" dirty="0"/>
+          </a:p>
+        </p:txBody>
+      </p:sp>
+      <p:sp>
+        <p:nvSpPr>
+          <p:cNvPr id="4" name="Slide Number Placeholder 3">
+            <a:extLst>
+              <a:ext uri="{FF2B5EF4-FFF2-40B4-BE49-F238E27FC236}">
+                <a16:creationId xmlns:a16="http://schemas.microsoft.com/office/drawing/2014/main" id="{6EC0584E-0C91-FAE3-584C-50067562C40C}"/>
+              </a:ext>
+            </a:extLst>
+          </p:cNvPr>
+          <p:cNvSpPr>
+            <a:spLocks noGrp="1"/>
+          </p:cNvSpPr>
+          <p:nvPr>
+            <p:ph type="sldNum" sz="quarter" idx="12"/>
+          </p:nvPr>
+        </p:nvSpPr>
+        <p:spPr/>
+        <p:txBody>
+          <a:bodyPr/>
+          <a:lstStyle/>
+          <a:p>
+            <a:fld id="{FE1B3154-47D9-4402-8EDB-E791933DC0B9}" type="slidenum">
+              <a:rPr lang="nl-BE" smtClean="0"/>
+              <a:pPr/>
+              <a:t>44</a:t>
             </a:fld>
             <a:endParaRPr lang="nl-BE"/>
           </a:p>
@@ -13602,6 +13851,90 @@
           </a:extLst>
         </p:spPr>
       </p:pic>
+      <p:sp>
+        <p:nvSpPr>
+          <p:cNvPr id="3" name="TextBox 2">
+            <a:extLst>
+              <a:ext uri="{FF2B5EF4-FFF2-40B4-BE49-F238E27FC236}">
+                <a16:creationId xmlns:a16="http://schemas.microsoft.com/office/drawing/2014/main" id="{F998B2F2-809C-F80B-CE3A-840BADFD2E2F}"/>
+              </a:ext>
+            </a:extLst>
+          </p:cNvPr>
+          <p:cNvSpPr txBox="1"/>
+          <p:nvPr/>
+        </p:nvSpPr>
+        <p:spPr>
+          <a:xfrm rot="19450749">
+            <a:off x="6493112" y="2745146"/>
+            <a:ext cx="1787669" cy="369332"/>
+          </a:xfrm>
+          <a:prstGeom prst="rect">
+            <a:avLst/>
+          </a:prstGeom>
+          <a:noFill/>
+          <a:ln w="34925">
+            <a:solidFill>
+              <a:schemeClr val="tx1"/>
+            </a:solidFill>
+          </a:ln>
+        </p:spPr>
+        <p:txBody>
+          <a:bodyPr wrap="none" rtlCol="0">
+            <a:spAutoFit/>
+          </a:bodyPr>
+          <a:lstStyle/>
+          <a:p>
+            <a:r>
+              <a:rPr lang="en-BE" dirty="0">
+                <a:latin typeface="Amasis MT Pro Black" panose="02040A04050005020304" pitchFamily="18" charset="0"/>
+              </a:rPr>
+              <a:t>Full dataset!*</a:t>
+            </a:r>
+          </a:p>
+        </p:txBody>
+      </p:sp>
+      <p:cxnSp>
+        <p:nvCxnSpPr>
+          <p:cNvPr id="8" name="Straight Arrow Connector 7">
+            <a:extLst>
+              <a:ext uri="{FF2B5EF4-FFF2-40B4-BE49-F238E27FC236}">
+                <a16:creationId xmlns:a16="http://schemas.microsoft.com/office/drawing/2014/main" id="{6D3DDCB9-6012-5726-6EDB-9C90AB4786F7}"/>
+              </a:ext>
+            </a:extLst>
+          </p:cNvPr>
+          <p:cNvCxnSpPr/>
+          <p:nvPr/>
+        </p:nvCxnSpPr>
+        <p:spPr>
+          <a:xfrm flipH="1">
+            <a:off x="6441897" y="3429000"/>
+            <a:ext cx="166147" cy="629292"/>
+          </a:xfrm>
+          <a:prstGeom prst="straightConnector1">
+            <a:avLst/>
+          </a:prstGeom>
+          <a:ln w="22225">
+            <a:solidFill>
+              <a:schemeClr val="tx1"/>
+            </a:solidFill>
+            <a:tailEnd type="triangle"/>
+          </a:ln>
+        </p:spPr>
+        <p:style>
+          <a:lnRef idx="1">
+            <a:schemeClr val="accent1"/>
+          </a:lnRef>
+          <a:fillRef idx="0">
+            <a:schemeClr val="accent1"/>
+          </a:fillRef>
+          <a:effectRef idx="0">
+            <a:schemeClr val="accent1"/>
+          </a:effectRef>
+          <a:fontRef idx="minor">
+            <a:schemeClr val="tx1"/>
+          </a:fontRef>
+        </p:style>
+      </p:cxnSp>
     </p:spTree>
     <p:extLst>
       <p:ext uri="{BB962C8B-B14F-4D97-AF65-F5344CB8AC3E}">
@@ -13615,7 +13948,7 @@
 </p:sld>
 </file>
 
-<file path=ppt/slides/slide44.xml><?xml version="1.0" encoding="utf-8"?>
+<file path=ppt/slides/slide45.xml><?xml version="1.0" encoding="utf-8"?>
 <p:sld xmlns:a="http://schemas.openxmlformats.org/drawingml/2006/main" xmlns:r="http://schemas.openxmlformats.org/officeDocument/2006/relationships" xmlns:p="http://schemas.openxmlformats.org/presentationml/2006/main">
   <p:cSld>
     <p:spTree>
@@ -13693,7 +14026,7 @@
             <a:fld id="{FE1B3154-47D9-4402-8EDB-E791933DC0B9}" type="slidenum">
               <a:rPr lang="nl-BE" smtClean="0"/>
               <a:pPr/>
-              <a:t>44</a:t>
+              <a:t>45</a:t>
             </a:fld>
             <a:endParaRPr lang="nl-BE"/>
           </a:p>
@@ -13906,7 +14239,7 @@
 </p:sld>
 </file>
 
-<file path=ppt/slides/slide45.xml><?xml version="1.0" encoding="utf-8"?>
+<file path=ppt/slides/slide46.xml><?xml version="1.0" encoding="utf-8"?>
 <p:sld xmlns:a="http://schemas.openxmlformats.org/drawingml/2006/main" xmlns:r="http://schemas.openxmlformats.org/officeDocument/2006/relationships" xmlns:p="http://schemas.openxmlformats.org/presentationml/2006/main">
   <p:cSld>
     <p:spTree>
@@ -14073,7 +14406,7 @@
             <a:fld id="{FE1B3154-47D9-4402-8EDB-E791933DC0B9}" type="slidenum">
               <a:rPr lang="nl-BE" smtClean="0"/>
               <a:pPr/>
-              <a:t>45</a:t>
+              <a:t>46</a:t>
             </a:fld>
             <a:endParaRPr lang="nl-BE"/>
           </a:p>
@@ -14211,165 +14544,6 @@
 </p:sld>
 </file>
 
-<file path=ppt/slides/slide46.xml><?xml version="1.0" encoding="utf-8"?>
-<p:sld xmlns:a="http://schemas.openxmlformats.org/drawingml/2006/main" xmlns:r="http://schemas.openxmlformats.org/officeDocument/2006/relationships" xmlns:p="http://schemas.openxmlformats.org/presentationml/2006/main">
-  <p:cSld>
-    <p:spTree>
-      <p:nvGrpSpPr>
-        <p:cNvPr id="1" name=""/>
-        <p:cNvGrpSpPr/>
-        <p:nvPr/>
-      </p:nvGrpSpPr>
-      <p:grpSpPr>
-        <a:xfrm>
-          <a:off x="0" y="0"/>
-          <a:ext cx="0" cy="0"/>
-          <a:chOff x="0" y="0"/>
-          <a:chExt cx="0" cy="0"/>
-        </a:xfrm>
-      </p:grpSpPr>
-      <p:sp>
-        <p:nvSpPr>
-          <p:cNvPr id="2" name="Title 1">
-            <a:extLst>
-              <a:ext uri="{FF2B5EF4-FFF2-40B4-BE49-F238E27FC236}">
-                <a16:creationId xmlns:a16="http://schemas.microsoft.com/office/drawing/2014/main" id="{E4BEE64C-CDBE-35D7-E4CA-C900FFA1BB0D}"/>
-              </a:ext>
-            </a:extLst>
-          </p:cNvPr>
-          <p:cNvSpPr>
-            <a:spLocks noGrp="1"/>
-          </p:cNvSpPr>
-          <p:nvPr>
-            <p:ph type="title"/>
-          </p:nvPr>
-        </p:nvSpPr>
-        <p:spPr/>
-        <p:txBody>
-          <a:bodyPr/>
-          <a:lstStyle/>
-          <a:p>
-            <a:r>
-              <a:rPr lang="en-US" dirty="0"/>
-              <a:t>Gradient boosting</a:t>
-            </a:r>
-          </a:p>
-        </p:txBody>
-      </p:sp>
-      <p:sp>
-        <p:nvSpPr>
-          <p:cNvPr id="3" name="Content Placeholder 2">
-            <a:extLst>
-              <a:ext uri="{FF2B5EF4-FFF2-40B4-BE49-F238E27FC236}">
-                <a16:creationId xmlns:a16="http://schemas.microsoft.com/office/drawing/2014/main" id="{CE0789F8-57C2-31A2-1DD8-A76655D3BCE5}"/>
-              </a:ext>
-            </a:extLst>
-          </p:cNvPr>
-          <p:cNvSpPr>
-            <a:spLocks noGrp="1"/>
-          </p:cNvSpPr>
-          <p:nvPr>
-            <p:ph idx="1"/>
-          </p:nvPr>
-        </p:nvSpPr>
-        <p:spPr/>
-        <p:txBody>
-          <a:bodyPr>
-            <a:normAutofit/>
-          </a:bodyPr>
-          <a:lstStyle/>
-          <a:p>
-            <a:r>
-              <a:rPr lang="en-US" dirty="0"/>
-              <a:t>Bagging is parallel, boosting is in series</a:t>
-            </a:r>
-          </a:p>
-          <a:p>
-            <a:r>
-              <a:rPr lang="en-US" dirty="0"/>
-              <a:t>Gradient boosting is a machine learning technique that builds a strong model by adding together many weak models, each one correcting the mistakes of the previous ones</a:t>
-            </a:r>
-          </a:p>
-          <a:p>
-            <a:pPr lvl="1"/>
-            <a:r>
-              <a:rPr lang="en-US" dirty="0"/>
-              <a:t>Start simple: Begin with a basic model (like a small decision tree)</a:t>
-            </a:r>
-          </a:p>
-          <a:p>
-            <a:pPr lvl="1"/>
-            <a:r>
-              <a:rPr lang="en-US" dirty="0"/>
-              <a:t>Check errors: Look at where this model made mistakes</a:t>
-            </a:r>
-          </a:p>
-          <a:p>
-            <a:pPr lvl="1"/>
-            <a:r>
-              <a:rPr lang="en-US" dirty="0"/>
-              <a:t>Build a new model: Train another tree to predict the errors (the “residuals”)</a:t>
-            </a:r>
-          </a:p>
-          <a:p>
-            <a:pPr lvl="1"/>
-            <a:r>
-              <a:rPr lang="en-US" dirty="0"/>
-              <a:t>Add it to the mix: Add the new model’s prediction to the original one (like a correction)</a:t>
-            </a:r>
-          </a:p>
-          <a:p>
-            <a:pPr lvl="1"/>
-            <a:r>
-              <a:rPr lang="en-US" dirty="0"/>
-              <a:t>Repeat: Keep repeating this process</a:t>
-            </a:r>
-          </a:p>
-        </p:txBody>
-      </p:sp>
-      <p:sp>
-        <p:nvSpPr>
-          <p:cNvPr id="4" name="Slide Number Placeholder 3">
-            <a:extLst>
-              <a:ext uri="{FF2B5EF4-FFF2-40B4-BE49-F238E27FC236}">
-                <a16:creationId xmlns:a16="http://schemas.microsoft.com/office/drawing/2014/main" id="{8DFC6422-063D-1883-179C-1EB44ADE54C4}"/>
-              </a:ext>
-            </a:extLst>
-          </p:cNvPr>
-          <p:cNvSpPr>
-            <a:spLocks noGrp="1"/>
-          </p:cNvSpPr>
-          <p:nvPr>
-            <p:ph type="sldNum" sz="quarter" idx="12"/>
-          </p:nvPr>
-        </p:nvSpPr>
-        <p:spPr/>
-        <p:txBody>
-          <a:bodyPr/>
-          <a:lstStyle/>
-          <a:p>
-            <a:fld id="{FE1B3154-47D9-4402-8EDB-E791933DC0B9}" type="slidenum">
-              <a:rPr lang="nl-BE" smtClean="0"/>
-              <a:pPr/>
-              <a:t>46</a:t>
-            </a:fld>
-            <a:endParaRPr lang="nl-BE"/>
-          </a:p>
-        </p:txBody>
-      </p:sp>
-    </p:spTree>
-    <p:extLst>
-      <p:ext uri="{BB962C8B-B14F-4D97-AF65-F5344CB8AC3E}">
-        <p14:creationId xmlns:p14="http://schemas.microsoft.com/office/powerpoint/2010/main" val="2046072372"/>
-      </p:ext>
-    </p:extLst>
-  </p:cSld>
-  <p:clrMapOvr>
-    <a:masterClrMapping/>
-  </p:clrMapOvr>
-</p:sld>
-</file>
-
 <file path=ppt/slides/slide47.xml><?xml version="1.0" encoding="utf-8"?>
 <p:sld xmlns:a="http://schemas.openxmlformats.org/drawingml/2006/main" xmlns:r="http://schemas.openxmlformats.org/officeDocument/2006/relationships" xmlns:p="http://schemas.openxmlformats.org/presentationml/2006/main">
   <p:cSld>
@@ -14392,7 +14566,7 @@
           <p:cNvPr id="2" name="Title 1">
             <a:extLst>
               <a:ext uri="{FF2B5EF4-FFF2-40B4-BE49-F238E27FC236}">
-                <a16:creationId xmlns:a16="http://schemas.microsoft.com/office/drawing/2014/main" id="{4642BF71-2CA3-2B8D-A21A-26BE430D755B}"/>
+                <a16:creationId xmlns:a16="http://schemas.microsoft.com/office/drawing/2014/main" id="{E4BEE64C-CDBE-35D7-E4CA-C900FFA1BB0D}"/>
               </a:ext>
             </a:extLst>
           </p:cNvPr>
@@ -14420,7 +14594,7 @@
           <p:cNvPr id="3" name="Content Placeholder 2">
             <a:extLst>
               <a:ext uri="{FF2B5EF4-FFF2-40B4-BE49-F238E27FC236}">
-                <a16:creationId xmlns:a16="http://schemas.microsoft.com/office/drawing/2014/main" id="{BAD4A9DF-1628-C67B-DA7F-6453F29828EF}"/>
+                <a16:creationId xmlns:a16="http://schemas.microsoft.com/office/drawing/2014/main" id="{CE0789F8-57C2-31A2-1DD8-A76655D3BCE5}"/>
               </a:ext>
             </a:extLst>
           </p:cNvPr>
@@ -14433,44 +14607,55 @@
         </p:nvSpPr>
         <p:spPr/>
         <p:txBody>
-          <a:bodyPr/>
-          <a:lstStyle/>
-          <a:p>
-            <a:r>
-              <a:rPr lang="en-US" dirty="0"/>
-              <a:t>Each new model is trained to reduce the loss (like error or log-loss), and this is done using the </a:t>
-            </a:r>
-            <a:r>
-              <a:rPr lang="en-US" b="1" dirty="0"/>
-              <a:t>gradient</a:t>
-            </a:r>
-            <a:r>
-              <a:rPr lang="en-US" dirty="0"/>
-              <a:t> of the loss function</a:t>
-            </a:r>
-          </a:p>
-          <a:p>
-            <a:r>
-              <a:rPr lang="en-US" dirty="0"/>
-              <a:t>The loss-function is the calculation of the errors, like the MSE</a:t>
-            </a:r>
-          </a:p>
-          <a:p>
-            <a:endParaRPr lang="en-US" dirty="0"/>
-          </a:p>
-          <a:p>
-            <a:endParaRPr lang="en-US" dirty="0"/>
-          </a:p>
-          <a:p>
-            <a:r>
-              <a:rPr lang="en-US" dirty="0"/>
-              <a:t>This you can use to make a better model</a:t>
-            </a:r>
-          </a:p>
-          <a:p>
-            <a:r>
-              <a:rPr lang="en-US" dirty="0"/>
-              <a:t>But let’s hear more from an expert:</a:t>
+          <a:bodyPr>
+            <a:normAutofit/>
+          </a:bodyPr>
+          <a:lstStyle/>
+          <a:p>
+            <a:r>
+              <a:rPr lang="en-US" dirty="0"/>
+              <a:t>Bagging is parallel, boosting is in series</a:t>
+            </a:r>
+          </a:p>
+          <a:p>
+            <a:r>
+              <a:rPr lang="en-US" dirty="0"/>
+              <a:t>Gradient boosting is a machine learning technique that builds a strong model by adding together many weak models, each one correcting the mistakes of the previous ones</a:t>
+            </a:r>
+          </a:p>
+          <a:p>
+            <a:pPr lvl="1"/>
+            <a:r>
+              <a:rPr lang="en-US" dirty="0"/>
+              <a:t>Start simple: Begin with a basic model (like a small decision tree)</a:t>
+            </a:r>
+          </a:p>
+          <a:p>
+            <a:pPr lvl="1"/>
+            <a:r>
+              <a:rPr lang="en-US" dirty="0"/>
+              <a:t>Check errors: Look at where this model made mistakes</a:t>
+            </a:r>
+          </a:p>
+          <a:p>
+            <a:pPr lvl="1"/>
+            <a:r>
+              <a:rPr lang="en-US" dirty="0"/>
+              <a:t>Build a new model: Train another tree to predict the errors (the “residuals”)</a:t>
+            </a:r>
+          </a:p>
+          <a:p>
+            <a:pPr lvl="1"/>
+            <a:r>
+              <a:rPr lang="en-US" dirty="0"/>
+              <a:t>Add it to the mix: Add the new model’s prediction to the original one (like a correction)</a:t>
+            </a:r>
+          </a:p>
+          <a:p>
+            <a:pPr lvl="1"/>
+            <a:r>
+              <a:rPr lang="en-US" dirty="0"/>
+              <a:t>Repeat: Keep repeating this process</a:t>
             </a:r>
           </a:p>
         </p:txBody>
@@ -14480,7 +14665,7 @@
           <p:cNvPr id="4" name="Slide Number Placeholder 3">
             <a:extLst>
               <a:ext uri="{FF2B5EF4-FFF2-40B4-BE49-F238E27FC236}">
-                <a16:creationId xmlns:a16="http://schemas.microsoft.com/office/drawing/2014/main" id="{5FA3BA35-6CB0-7755-2E78-03422201FA8B}"/>
+                <a16:creationId xmlns:a16="http://schemas.microsoft.com/office/drawing/2014/main" id="{8DFC6422-063D-1883-179C-1EB44ADE54C4}"/>
               </a:ext>
             </a:extLst>
           </p:cNvPr>
@@ -14500,6 +14685,154 @@
               <a:rPr lang="nl-BE" smtClean="0"/>
               <a:pPr/>
               <a:t>47</a:t>
+            </a:fld>
+            <a:endParaRPr lang="nl-BE"/>
+          </a:p>
+        </p:txBody>
+      </p:sp>
+    </p:spTree>
+    <p:extLst>
+      <p:ext uri="{BB962C8B-B14F-4D97-AF65-F5344CB8AC3E}">
+        <p14:creationId xmlns:p14="http://schemas.microsoft.com/office/powerpoint/2010/main" val="2046072372"/>
+      </p:ext>
+    </p:extLst>
+  </p:cSld>
+  <p:clrMapOvr>
+    <a:masterClrMapping/>
+  </p:clrMapOvr>
+</p:sld>
+</file>
+
+<file path=ppt/slides/slide48.xml><?xml version="1.0" encoding="utf-8"?>
+<p:sld xmlns:a="http://schemas.openxmlformats.org/drawingml/2006/main" xmlns:r="http://schemas.openxmlformats.org/officeDocument/2006/relationships" xmlns:p="http://schemas.openxmlformats.org/presentationml/2006/main">
+  <p:cSld>
+    <p:spTree>
+      <p:nvGrpSpPr>
+        <p:cNvPr id="1" name=""/>
+        <p:cNvGrpSpPr/>
+        <p:nvPr/>
+      </p:nvGrpSpPr>
+      <p:grpSpPr>
+        <a:xfrm>
+          <a:off x="0" y="0"/>
+          <a:ext cx="0" cy="0"/>
+          <a:chOff x="0" y="0"/>
+          <a:chExt cx="0" cy="0"/>
+        </a:xfrm>
+      </p:grpSpPr>
+      <p:sp>
+        <p:nvSpPr>
+          <p:cNvPr id="2" name="Title 1">
+            <a:extLst>
+              <a:ext uri="{FF2B5EF4-FFF2-40B4-BE49-F238E27FC236}">
+                <a16:creationId xmlns:a16="http://schemas.microsoft.com/office/drawing/2014/main" id="{4642BF71-2CA3-2B8D-A21A-26BE430D755B}"/>
+              </a:ext>
+            </a:extLst>
+          </p:cNvPr>
+          <p:cNvSpPr>
+            <a:spLocks noGrp="1"/>
+          </p:cNvSpPr>
+          <p:nvPr>
+            <p:ph type="title"/>
+          </p:nvPr>
+        </p:nvSpPr>
+        <p:spPr/>
+        <p:txBody>
+          <a:bodyPr/>
+          <a:lstStyle/>
+          <a:p>
+            <a:r>
+              <a:rPr lang="en-US" dirty="0"/>
+              <a:t>Gradient boosting</a:t>
+            </a:r>
+          </a:p>
+        </p:txBody>
+      </p:sp>
+      <p:sp>
+        <p:nvSpPr>
+          <p:cNvPr id="3" name="Content Placeholder 2">
+            <a:extLst>
+              <a:ext uri="{FF2B5EF4-FFF2-40B4-BE49-F238E27FC236}">
+                <a16:creationId xmlns:a16="http://schemas.microsoft.com/office/drawing/2014/main" id="{BAD4A9DF-1628-C67B-DA7F-6453F29828EF}"/>
+              </a:ext>
+            </a:extLst>
+          </p:cNvPr>
+          <p:cNvSpPr>
+            <a:spLocks noGrp="1"/>
+          </p:cNvSpPr>
+          <p:nvPr>
+            <p:ph idx="1"/>
+          </p:nvPr>
+        </p:nvSpPr>
+        <p:spPr/>
+        <p:txBody>
+          <a:bodyPr/>
+          <a:lstStyle/>
+          <a:p>
+            <a:r>
+              <a:rPr lang="en-US" dirty="0"/>
+              <a:t>Each new model is trained to reduce the loss (like error or log-loss), and this is done using the </a:t>
+            </a:r>
+            <a:r>
+              <a:rPr lang="en-US" b="1" dirty="0"/>
+              <a:t>gradient</a:t>
+            </a:r>
+            <a:r>
+              <a:rPr lang="en-US" dirty="0"/>
+              <a:t> of the loss function</a:t>
+            </a:r>
+          </a:p>
+          <a:p>
+            <a:r>
+              <a:rPr lang="en-US" dirty="0"/>
+              <a:t>The loss-function is the calculation of the errors, like the MSE</a:t>
+            </a:r>
+          </a:p>
+          <a:p>
+            <a:endParaRPr lang="en-US" dirty="0"/>
+          </a:p>
+          <a:p>
+            <a:endParaRPr lang="en-US" dirty="0"/>
+          </a:p>
+          <a:p>
+            <a:r>
+              <a:rPr lang="en-US" dirty="0"/>
+              <a:t>This you can use to make a better model</a:t>
+            </a:r>
+          </a:p>
+          <a:p>
+            <a:r>
+              <a:rPr lang="en-US" dirty="0"/>
+              <a:t>But let’s hear more from an expert:</a:t>
+            </a:r>
+          </a:p>
+        </p:txBody>
+      </p:sp>
+      <p:sp>
+        <p:nvSpPr>
+          <p:cNvPr id="4" name="Slide Number Placeholder 3">
+            <a:extLst>
+              <a:ext uri="{FF2B5EF4-FFF2-40B4-BE49-F238E27FC236}">
+                <a16:creationId xmlns:a16="http://schemas.microsoft.com/office/drawing/2014/main" id="{5FA3BA35-6CB0-7755-2E78-03422201FA8B}"/>
+              </a:ext>
+            </a:extLst>
+          </p:cNvPr>
+          <p:cNvSpPr>
+            <a:spLocks noGrp="1"/>
+          </p:cNvSpPr>
+          <p:nvPr>
+            <p:ph type="sldNum" sz="quarter" idx="12"/>
+          </p:nvPr>
+        </p:nvSpPr>
+        <p:spPr/>
+        <p:txBody>
+          <a:bodyPr/>
+          <a:lstStyle/>
+          <a:p>
+            <a:fld id="{FE1B3154-47D9-4402-8EDB-E791933DC0B9}" type="slidenum">
+              <a:rPr lang="nl-BE" smtClean="0"/>
+              <a:pPr/>
+              <a:t>48</a:t>
             </a:fld>
             <a:endParaRPr lang="nl-BE"/>
           </a:p>
@@ -14579,7 +14912,7 @@
 </p:sld>
 </file>
 
-<file path=ppt/slides/slide48.xml><?xml version="1.0" encoding="utf-8"?>
+<file path=ppt/slides/slide49.xml><?xml version="1.0" encoding="utf-8"?>
 <p:sld xmlns:a="http://schemas.openxmlformats.org/drawingml/2006/main" xmlns:r="http://schemas.openxmlformats.org/officeDocument/2006/relationships" xmlns:p="http://schemas.openxmlformats.org/presentationml/2006/main">
   <p:cSld>
     <p:spTree>
@@ -14656,7 +14989,7 @@
             <a:fld id="{FE1B3154-47D9-4402-8EDB-E791933DC0B9}" type="slidenum">
               <a:rPr lang="nl-BE" smtClean="0"/>
               <a:pPr/>
-              <a:t>48</a:t>
+              <a:t>49</a:t>
             </a:fld>
             <a:endParaRPr lang="nl-BE"/>
           </a:p>
@@ -14706,7 +15039,7 @@
 </p:sld>
 </file>
 
-<file path=ppt/slides/slide49.xml><?xml version="1.0" encoding="utf-8"?>
+<file path=ppt/slides/slide5.xml><?xml version="1.0" encoding="utf-8"?>
 <p:sld xmlns:a="http://schemas.openxmlformats.org/drawingml/2006/main" xmlns:r="http://schemas.openxmlformats.org/officeDocument/2006/relationships" xmlns:p="http://schemas.openxmlformats.org/presentationml/2006/main">
   <p:cSld>
     <p:spTree>
@@ -14728,6 +15061,134 @@
           <p:cNvPr id="2" name="Title 1">
             <a:extLst>
               <a:ext uri="{FF2B5EF4-FFF2-40B4-BE49-F238E27FC236}">
+                <a16:creationId xmlns:a16="http://schemas.microsoft.com/office/drawing/2014/main" id="{6682E63A-65A3-9055-94CE-74D652A2CC2A}"/>
+              </a:ext>
+            </a:extLst>
+          </p:cNvPr>
+          <p:cNvSpPr>
+            <a:spLocks noGrp="1"/>
+          </p:cNvSpPr>
+          <p:nvPr>
+            <p:ph type="title"/>
+          </p:nvPr>
+        </p:nvSpPr>
+        <p:spPr/>
+        <p:txBody>
+          <a:bodyPr/>
+          <a:lstStyle/>
+          <a:p>
+            <a:r>
+              <a:rPr lang="en-US" noProof="0" dirty="0"/>
+              <a:t>Overfitting and underfitting</a:t>
+            </a:r>
+          </a:p>
+        </p:txBody>
+      </p:sp>
+      <p:sp>
+        <p:nvSpPr>
+          <p:cNvPr id="3" name="Content Placeholder 2">
+            <a:extLst>
+              <a:ext uri="{FF2B5EF4-FFF2-40B4-BE49-F238E27FC236}">
+                <a16:creationId xmlns:a16="http://schemas.microsoft.com/office/drawing/2014/main" id="{E6E5331A-FFF2-263F-4044-7222DB88C9D4}"/>
+              </a:ext>
+            </a:extLst>
+          </p:cNvPr>
+          <p:cNvSpPr>
+            <a:spLocks noGrp="1"/>
+          </p:cNvSpPr>
+          <p:nvPr>
+            <p:ph idx="1"/>
+          </p:nvPr>
+        </p:nvSpPr>
+        <p:spPr/>
+        <p:txBody>
+          <a:bodyPr/>
+          <a:lstStyle/>
+          <a:p>
+            <a:r>
+              <a:rPr lang="en-US" noProof="0" dirty="0"/>
+              <a:t>Overfitting and underfitting are measured using the RMSE</a:t>
+            </a:r>
+          </a:p>
+          <a:p>
+            <a:r>
+              <a:rPr lang="en-US" noProof="0" dirty="0"/>
+              <a:t>In the example in the previous slide we’re not using a linear regression but a polynomial regression</a:t>
+            </a:r>
+          </a:p>
+          <a:p>
+            <a:pPr lvl="1"/>
+            <a:r>
+              <a:rPr lang="en-US" noProof="0" dirty="0"/>
+              <a:t>The question we are asking is how many polynomials we should be using</a:t>
+            </a:r>
+          </a:p>
+          <a:p>
+            <a:pPr lvl="1"/>
+            <a:r>
+              <a:rPr lang="en-US" noProof="0" dirty="0"/>
+              <a:t>A 17</a:t>
+            </a:r>
+            <a:r>
+              <a:rPr lang="en-US" baseline="30000" noProof="0" dirty="0"/>
+              <a:t>th</a:t>
+            </a:r>
+            <a:r>
+              <a:rPr lang="en-US" noProof="0" dirty="0"/>
+              <a:t>-order function will have 17 zero-crosses, so will follow the data very well, but have next to no explainability</a:t>
+            </a:r>
+          </a:p>
+          <a:p>
+            <a:pPr lvl="1"/>
+            <a:r>
+              <a:rPr lang="en-US" dirty="0"/>
+              <a:t>It will also follow the data it is given, so the training data (which is the reason we kept some data secret in the test-set)</a:t>
+            </a:r>
+            <a:endParaRPr lang="en-US" noProof="0" dirty="0"/>
+          </a:p>
+          <a:p>
+            <a:endParaRPr lang="en-US" noProof="0" dirty="0"/>
+          </a:p>
+          <a:p>
+            <a:endParaRPr lang="en-US" noProof="0" dirty="0"/>
+          </a:p>
+        </p:txBody>
+      </p:sp>
+    </p:spTree>
+    <p:extLst>
+      <p:ext uri="{BB962C8B-B14F-4D97-AF65-F5344CB8AC3E}">
+        <p14:creationId xmlns:p14="http://schemas.microsoft.com/office/powerpoint/2010/main" val="289636856"/>
+      </p:ext>
+    </p:extLst>
+  </p:cSld>
+  <p:clrMapOvr>
+    <a:masterClrMapping/>
+  </p:clrMapOvr>
+</p:sld>
+</file>
+
+<file path=ppt/slides/slide50.xml><?xml version="1.0" encoding="utf-8"?>
+<p:sld xmlns:a="http://schemas.openxmlformats.org/drawingml/2006/main" xmlns:r="http://schemas.openxmlformats.org/officeDocument/2006/relationships" xmlns:p="http://schemas.openxmlformats.org/presentationml/2006/main">
+  <p:cSld>
+    <p:spTree>
+      <p:nvGrpSpPr>
+        <p:cNvPr id="1" name=""/>
+        <p:cNvGrpSpPr/>
+        <p:nvPr/>
+      </p:nvGrpSpPr>
+      <p:grpSpPr>
+        <a:xfrm>
+          <a:off x="0" y="0"/>
+          <a:ext cx="0" cy="0"/>
+          <a:chOff x="0" y="0"/>
+          <a:chExt cx="0" cy="0"/>
+        </a:xfrm>
+      </p:grpSpPr>
+      <p:sp>
+        <p:nvSpPr>
+          <p:cNvPr id="2" name="Title 1">
+            <a:extLst>
+              <a:ext uri="{FF2B5EF4-FFF2-40B4-BE49-F238E27FC236}">
                 <a16:creationId xmlns:a16="http://schemas.microsoft.com/office/drawing/2014/main" id="{C6CC17F9-BB43-6C3C-7064-79E419172680}"/>
               </a:ext>
             </a:extLst>
@@ -14825,7 +15286,7 @@
             <a:fld id="{FE1B3154-47D9-4402-8EDB-E791933DC0B9}" type="slidenum">
               <a:rPr lang="nl-BE" smtClean="0"/>
               <a:pPr/>
-              <a:t>49</a:t>
+              <a:t>50</a:t>
             </a:fld>
             <a:endParaRPr lang="nl-BE"/>
           </a:p>
@@ -15278,7 +15739,7 @@
 </p:sld>
 </file>
 
-<file path=ppt/slides/slide5.xml><?xml version="1.0" encoding="utf-8"?>
+<file path=ppt/slides/slide51.xml><?xml version="1.0" encoding="utf-8"?>
 <p:sld xmlns:a="http://schemas.openxmlformats.org/drawingml/2006/main" xmlns:r="http://schemas.openxmlformats.org/officeDocument/2006/relationships" xmlns:p="http://schemas.openxmlformats.org/presentationml/2006/main">
   <p:cSld>
     <p:spTree>
@@ -15300,134 +15761,6 @@
           <p:cNvPr id="2" name="Title 1">
             <a:extLst>
               <a:ext uri="{FF2B5EF4-FFF2-40B4-BE49-F238E27FC236}">
-                <a16:creationId xmlns:a16="http://schemas.microsoft.com/office/drawing/2014/main" id="{6682E63A-65A3-9055-94CE-74D652A2CC2A}"/>
-              </a:ext>
-            </a:extLst>
-          </p:cNvPr>
-          <p:cNvSpPr>
-            <a:spLocks noGrp="1"/>
-          </p:cNvSpPr>
-          <p:nvPr>
-            <p:ph type="title"/>
-          </p:nvPr>
-        </p:nvSpPr>
-        <p:spPr/>
-        <p:txBody>
-          <a:bodyPr/>
-          <a:lstStyle/>
-          <a:p>
-            <a:r>
-              <a:rPr lang="en-US" noProof="0" dirty="0"/>
-              <a:t>Overfitting and underfitting</a:t>
-            </a:r>
-          </a:p>
-        </p:txBody>
-      </p:sp>
-      <p:sp>
-        <p:nvSpPr>
-          <p:cNvPr id="3" name="Content Placeholder 2">
-            <a:extLst>
-              <a:ext uri="{FF2B5EF4-FFF2-40B4-BE49-F238E27FC236}">
-                <a16:creationId xmlns:a16="http://schemas.microsoft.com/office/drawing/2014/main" id="{E6E5331A-FFF2-263F-4044-7222DB88C9D4}"/>
-              </a:ext>
-            </a:extLst>
-          </p:cNvPr>
-          <p:cNvSpPr>
-            <a:spLocks noGrp="1"/>
-          </p:cNvSpPr>
-          <p:nvPr>
-            <p:ph idx="1"/>
-          </p:nvPr>
-        </p:nvSpPr>
-        <p:spPr/>
-        <p:txBody>
-          <a:bodyPr/>
-          <a:lstStyle/>
-          <a:p>
-            <a:r>
-              <a:rPr lang="en-US" noProof="0" dirty="0"/>
-              <a:t>Overfitting and underfitting are measured using the RMSE</a:t>
-            </a:r>
-          </a:p>
-          <a:p>
-            <a:r>
-              <a:rPr lang="en-US" noProof="0" dirty="0"/>
-              <a:t>In the example in the previous slide we’re not using a linear regression but a polynomial regression</a:t>
-            </a:r>
-          </a:p>
-          <a:p>
-            <a:pPr lvl="1"/>
-            <a:r>
-              <a:rPr lang="en-US" noProof="0" dirty="0"/>
-              <a:t>The question we are asking is how many polynomials we should be using</a:t>
-            </a:r>
-          </a:p>
-          <a:p>
-            <a:pPr lvl="1"/>
-            <a:r>
-              <a:rPr lang="en-US" noProof="0" dirty="0"/>
-              <a:t>A 17</a:t>
-            </a:r>
-            <a:r>
-              <a:rPr lang="en-US" baseline="30000" noProof="0" dirty="0"/>
-              <a:t>th</a:t>
-            </a:r>
-            <a:r>
-              <a:rPr lang="en-US" noProof="0" dirty="0"/>
-              <a:t>-order function will have 17 zero-crosses, so will follow the data very well, but have next to no explainability</a:t>
-            </a:r>
-          </a:p>
-          <a:p>
-            <a:pPr lvl="1"/>
-            <a:r>
-              <a:rPr lang="en-US" dirty="0"/>
-              <a:t>It will also follow the data it is given, so the training data (which is the reason we kept some data secret in the test-set)</a:t>
-            </a:r>
-            <a:endParaRPr lang="en-US" noProof="0" dirty="0"/>
-          </a:p>
-          <a:p>
-            <a:endParaRPr lang="en-US" noProof="0" dirty="0"/>
-          </a:p>
-          <a:p>
-            <a:endParaRPr lang="en-US" noProof="0" dirty="0"/>
-          </a:p>
-        </p:txBody>
-      </p:sp>
-    </p:spTree>
-    <p:extLst>
-      <p:ext uri="{BB962C8B-B14F-4D97-AF65-F5344CB8AC3E}">
-        <p14:creationId xmlns:p14="http://schemas.microsoft.com/office/powerpoint/2010/main" val="289636856"/>
-      </p:ext>
-    </p:extLst>
-  </p:cSld>
-  <p:clrMapOvr>
-    <a:masterClrMapping/>
-  </p:clrMapOvr>
-</p:sld>
-</file>
-
-<file path=ppt/slides/slide50.xml><?xml version="1.0" encoding="utf-8"?>
-<p:sld xmlns:a="http://schemas.openxmlformats.org/drawingml/2006/main" xmlns:r="http://schemas.openxmlformats.org/officeDocument/2006/relationships" xmlns:p="http://schemas.openxmlformats.org/presentationml/2006/main">
-  <p:cSld>
-    <p:spTree>
-      <p:nvGrpSpPr>
-        <p:cNvPr id="1" name=""/>
-        <p:cNvGrpSpPr/>
-        <p:nvPr/>
-      </p:nvGrpSpPr>
-      <p:grpSpPr>
-        <a:xfrm>
-          <a:off x="0" y="0"/>
-          <a:ext cx="0" cy="0"/>
-          <a:chOff x="0" y="0"/>
-          <a:chExt cx="0" cy="0"/>
-        </a:xfrm>
-      </p:grpSpPr>
-      <p:sp>
-        <p:nvSpPr>
-          <p:cNvPr id="2" name="Title 1">
-            <a:extLst>
-              <a:ext uri="{FF2B5EF4-FFF2-40B4-BE49-F238E27FC236}">
                 <a16:creationId xmlns:a16="http://schemas.microsoft.com/office/drawing/2014/main" id="{B313ACF0-4F33-F659-5AA7-860CD6C8A87B}"/>
               </a:ext>
             </a:extLst>
@@ -15504,7 +15837,7 @@
             <a:fld id="{FE1B3154-47D9-4402-8EDB-E791933DC0B9}" type="slidenum">
               <a:rPr lang="nl-BE" smtClean="0"/>
               <a:pPr/>
-              <a:t>50</a:t>
+              <a:t>51</a:t>
             </a:fld>
             <a:endParaRPr lang="nl-BE"/>
           </a:p>
@@ -15523,7 +15856,7 @@
 </p:sld>
 </file>
 
-<file path=ppt/slides/slide51.xml><?xml version="1.0" encoding="utf-8"?>
+<file path=ppt/slides/slide52.xml><?xml version="1.0" encoding="utf-8"?>
 <p:sld xmlns:a="http://schemas.openxmlformats.org/drawingml/2006/main" xmlns:r="http://schemas.openxmlformats.org/officeDocument/2006/relationships" xmlns:p="http://schemas.openxmlformats.org/presentationml/2006/main">
   <p:cSld>
     <p:spTree>
@@ -15711,7 +16044,7 @@
             <a:fld id="{FE1B3154-47D9-4402-8EDB-E791933DC0B9}" type="slidenum">
               <a:rPr lang="nl-BE" smtClean="0"/>
               <a:pPr/>
-              <a:t>51</a:t>
+              <a:t>52</a:t>
             </a:fld>
             <a:endParaRPr lang="nl-BE"/>
           </a:p>
@@ -15730,7 +16063,7 @@
 </p:sld>
 </file>
 
-<file path=ppt/slides/slide52.xml><?xml version="1.0" encoding="utf-8"?>
+<file path=ppt/slides/slide53.xml><?xml version="1.0" encoding="utf-8"?>
 <p:sld xmlns:a="http://schemas.openxmlformats.org/drawingml/2006/main" xmlns:r="http://schemas.openxmlformats.org/officeDocument/2006/relationships" xmlns:p="http://schemas.openxmlformats.org/presentationml/2006/main">
   <p:cSld>
     <p:spTree>
@@ -15842,7 +16175,7 @@
             <a:fld id="{FE1B3154-47D9-4402-8EDB-E791933DC0B9}" type="slidenum">
               <a:rPr lang="nl-BE" smtClean="0"/>
               <a:pPr/>
-              <a:t>52</a:t>
+              <a:t>53</a:t>
             </a:fld>
             <a:endParaRPr lang="nl-BE"/>
           </a:p>
@@ -15891,7 +16224,7 @@
 </p:sld>
 </file>
 
-<file path=ppt/slides/slide53.xml><?xml version="1.0" encoding="utf-8"?>
+<file path=ppt/slides/slide54.xml><?xml version="1.0" encoding="utf-8"?>
 <p:sld xmlns:a="http://schemas.openxmlformats.org/drawingml/2006/main" xmlns:r="http://schemas.openxmlformats.org/officeDocument/2006/relationships" xmlns:p="http://schemas.openxmlformats.org/presentationml/2006/main">
   <p:cSld>
     <p:spTree>
@@ -16057,7 +16390,7 @@
             <a:fld id="{FE1B3154-47D9-4402-8EDB-E791933DC0B9}" type="slidenum">
               <a:rPr lang="nl-BE" smtClean="0"/>
               <a:pPr/>
-              <a:t>53</a:t>
+              <a:t>54</a:t>
             </a:fld>
             <a:endParaRPr lang="nl-BE"/>
           </a:p>
@@ -16076,7 +16409,7 @@
 </p:sld>
 </file>
 
-<file path=ppt/slides/slide54.xml><?xml version="1.0" encoding="utf-8"?>
+<file path=ppt/slides/slide55.xml><?xml version="1.0" encoding="utf-8"?>
 <p:sld xmlns:a="http://schemas.openxmlformats.org/drawingml/2006/main" xmlns:r="http://schemas.openxmlformats.org/officeDocument/2006/relationships" xmlns:p="http://schemas.openxmlformats.org/presentationml/2006/main">
   <p:cSld>
     <p:spTree>
@@ -16221,7 +16554,7 @@
             <a:fld id="{FE1B3154-47D9-4402-8EDB-E791933DC0B9}" type="slidenum">
               <a:rPr lang="nl-BE" smtClean="0"/>
               <a:pPr/>
-              <a:t>54</a:t>
+              <a:t>55</a:t>
             </a:fld>
             <a:endParaRPr lang="nl-BE"/>
           </a:p>
@@ -16276,178 +16609,6 @@
 </p:sld>
 </file>
 
-<file path=ppt/slides/slide55.xml><?xml version="1.0" encoding="utf-8"?>
-<p:sld xmlns:a="http://schemas.openxmlformats.org/drawingml/2006/main" xmlns:r="http://schemas.openxmlformats.org/officeDocument/2006/relationships" xmlns:p="http://schemas.openxmlformats.org/presentationml/2006/main">
-  <p:cSld>
-    <p:spTree>
-      <p:nvGrpSpPr>
-        <p:cNvPr id="1" name=""/>
-        <p:cNvGrpSpPr/>
-        <p:nvPr/>
-      </p:nvGrpSpPr>
-      <p:grpSpPr>
-        <a:xfrm>
-          <a:off x="0" y="0"/>
-          <a:ext cx="0" cy="0"/>
-          <a:chOff x="0" y="0"/>
-          <a:chExt cx="0" cy="0"/>
-        </a:xfrm>
-      </p:grpSpPr>
-      <p:sp>
-        <p:nvSpPr>
-          <p:cNvPr id="2" name="Title 1">
-            <a:extLst>
-              <a:ext uri="{FF2B5EF4-FFF2-40B4-BE49-F238E27FC236}">
-                <a16:creationId xmlns:a16="http://schemas.microsoft.com/office/drawing/2014/main" id="{D643ECA9-FCF9-6ACE-E8AD-1F936D7F7327}"/>
-              </a:ext>
-            </a:extLst>
-          </p:cNvPr>
-          <p:cNvSpPr>
-            <a:spLocks noGrp="1"/>
-          </p:cNvSpPr>
-          <p:nvPr>
-            <p:ph type="title"/>
-          </p:nvPr>
-        </p:nvSpPr>
-        <p:spPr/>
-        <p:txBody>
-          <a:bodyPr/>
-          <a:lstStyle/>
-          <a:p>
-            <a:r>
-              <a:rPr lang="en-US" dirty="0"/>
-              <a:t>Linear models</a:t>
-            </a:r>
-          </a:p>
-        </p:txBody>
-      </p:sp>
-      <p:sp>
-        <p:nvSpPr>
-          <p:cNvPr id="3" name="Content Placeholder 2">
-            <a:extLst>
-              <a:ext uri="{FF2B5EF4-FFF2-40B4-BE49-F238E27FC236}">
-                <a16:creationId xmlns:a16="http://schemas.microsoft.com/office/drawing/2014/main" id="{868A4C65-32A1-53B5-40A1-784C4F196B02}"/>
-              </a:ext>
-            </a:extLst>
-          </p:cNvPr>
-          <p:cNvSpPr>
-            <a:spLocks noGrp="1"/>
-          </p:cNvSpPr>
-          <p:nvPr>
-            <p:ph idx="1"/>
-          </p:nvPr>
-        </p:nvSpPr>
-        <p:spPr>
-          <a:xfrm>
-            <a:off x="582705" y="1550894"/>
-            <a:ext cx="11201753" cy="4626069"/>
-          </a:xfrm>
-        </p:spPr>
-        <p:txBody>
-          <a:bodyPr>
-            <a:normAutofit/>
-          </a:bodyPr>
-          <a:lstStyle/>
-          <a:p>
-            <a:r>
-              <a:rPr lang="en-US" dirty="0"/>
-              <a:t>Linear models may not be the best predictors, but they have another use case:</a:t>
-            </a:r>
-          </a:p>
-          <a:p>
-            <a:pPr lvl="1"/>
-            <a:r>
-              <a:rPr lang="en-US" dirty="0"/>
-              <a:t>The price of a diamond is heavily defined by the weight</a:t>
-            </a:r>
-          </a:p>
-          <a:p>
-            <a:pPr lvl="1"/>
-            <a:r>
-              <a:rPr lang="en-US" dirty="0"/>
-              <a:t>Diamonds have a cut as well, and this cut also has a certain influence</a:t>
-            </a:r>
-          </a:p>
-          <a:p>
-            <a:pPr lvl="1"/>
-            <a:r>
-              <a:rPr lang="en-US" dirty="0"/>
-              <a:t>Unfortunately, the influence of the price is so big that this relationship disappears completely</a:t>
-            </a:r>
-          </a:p>
-          <a:p>
-            <a:pPr lvl="1"/>
-            <a:r>
-              <a:rPr lang="en-US" dirty="0"/>
-              <a:t>We could use a linear model on price vs weight to get this influence out of the dataset</a:t>
-            </a:r>
-          </a:p>
-          <a:p>
-            <a:pPr lvl="1"/>
-            <a:r>
-              <a:rPr lang="en-US" dirty="0"/>
-              <a:t>That would enable us to see the actual relationship between cut and price</a:t>
-            </a:r>
-          </a:p>
-          <a:p>
-            <a:r>
-              <a:rPr lang="en-US" dirty="0"/>
-              <a:t>Check out “3 - Diamonds </a:t>
-            </a:r>
-            <a:r>
-              <a:rPr lang="en-US" dirty="0" err="1"/>
-              <a:t>modeling.ipynb</a:t>
-            </a:r>
-            <a:r>
-              <a:rPr lang="en-US" dirty="0"/>
-              <a:t>”</a:t>
-            </a:r>
-          </a:p>
-        </p:txBody>
-      </p:sp>
-      <p:sp>
-        <p:nvSpPr>
-          <p:cNvPr id="4" name="Slide Number Placeholder 3">
-            <a:extLst>
-              <a:ext uri="{FF2B5EF4-FFF2-40B4-BE49-F238E27FC236}">
-                <a16:creationId xmlns:a16="http://schemas.microsoft.com/office/drawing/2014/main" id="{9A790909-6D5D-DFEE-3898-4FA4A07FD6A2}"/>
-              </a:ext>
-            </a:extLst>
-          </p:cNvPr>
-          <p:cNvSpPr>
-            <a:spLocks noGrp="1"/>
-          </p:cNvSpPr>
-          <p:nvPr>
-            <p:ph type="sldNum" sz="quarter" idx="12"/>
-          </p:nvPr>
-        </p:nvSpPr>
-        <p:spPr/>
-        <p:txBody>
-          <a:bodyPr/>
-          <a:lstStyle/>
-          <a:p>
-            <a:fld id="{FE1B3154-47D9-4402-8EDB-E791933DC0B9}" type="slidenum">
-              <a:rPr lang="nl-BE" smtClean="0"/>
-              <a:pPr/>
-              <a:t>55</a:t>
-            </a:fld>
-            <a:endParaRPr lang="nl-BE"/>
-          </a:p>
-        </p:txBody>
-      </p:sp>
-    </p:spTree>
-    <p:extLst>
-      <p:ext uri="{BB962C8B-B14F-4D97-AF65-F5344CB8AC3E}">
-        <p14:creationId xmlns:p14="http://schemas.microsoft.com/office/powerpoint/2010/main" val="1436249488"/>
-      </p:ext>
-    </p:extLst>
-  </p:cSld>
-  <p:clrMapOvr>
-    <a:masterClrMapping/>
-  </p:clrMapOvr>
-</p:sld>
-</file>
-
 <file path=ppt/slides/slide56.xml><?xml version="1.0" encoding="utf-8"?>
 <p:sld xmlns:a="http://schemas.openxmlformats.org/drawingml/2006/main" xmlns:r="http://schemas.openxmlformats.org/officeDocument/2006/relationships" xmlns:p="http://schemas.openxmlformats.org/presentationml/2006/main">
   <p:cSld>
@@ -16470,7 +16631,7 @@
           <p:cNvPr id="2" name="Title 1">
             <a:extLst>
               <a:ext uri="{FF2B5EF4-FFF2-40B4-BE49-F238E27FC236}">
-                <a16:creationId xmlns:a16="http://schemas.microsoft.com/office/drawing/2014/main" id="{681DB49E-FF9A-F87E-4629-0258B21B9AD2}"/>
+                <a16:creationId xmlns:a16="http://schemas.microsoft.com/office/drawing/2014/main" id="{D643ECA9-FCF9-6ACE-E8AD-1F936D7F7327}"/>
               </a:ext>
             </a:extLst>
           </p:cNvPr>
@@ -16488,7 +16649,7 @@
           <a:p>
             <a:r>
               <a:rPr lang="en-US" dirty="0"/>
-              <a:t>Linear Regression</a:t>
+              <a:t>Linear models</a:t>
             </a:r>
           </a:p>
         </p:txBody>
@@ -16498,7 +16659,7 @@
           <p:cNvPr id="3" name="Content Placeholder 2">
             <a:extLst>
               <a:ext uri="{FF2B5EF4-FFF2-40B4-BE49-F238E27FC236}">
-                <a16:creationId xmlns:a16="http://schemas.microsoft.com/office/drawing/2014/main" id="{B4972F9B-8EC4-14E4-BDBC-3E0372444E04}"/>
+                <a16:creationId xmlns:a16="http://schemas.microsoft.com/office/drawing/2014/main" id="{868A4C65-32A1-53B5-40A1-784C4F196B02}"/>
               </a:ext>
             </a:extLst>
           </p:cNvPr>
@@ -16509,41 +16670,70 @@
             <p:ph idx="1"/>
           </p:nvPr>
         </p:nvSpPr>
-        <p:spPr/>
-        <p:txBody>
-          <a:bodyPr/>
-          <a:lstStyle/>
-          <a:p>
-            <a:r>
-              <a:rPr lang="en-US" dirty="0"/>
-              <a:t>RMSE is essential...</a:t>
+        <p:spPr>
+          <a:xfrm>
+            <a:off x="582705" y="1550894"/>
+            <a:ext cx="11201753" cy="4626069"/>
+          </a:xfrm>
+        </p:spPr>
+        <p:txBody>
+          <a:bodyPr>
+            <a:normAutofit/>
+          </a:bodyPr>
+          <a:lstStyle/>
+          <a:p>
+            <a:r>
+              <a:rPr lang="en-US" dirty="0"/>
+              <a:t>Linear models may not be the best predictors, but they have another use case:</a:t>
             </a:r>
           </a:p>
           <a:p>
             <a:pPr lvl="1"/>
             <a:r>
               <a:rPr lang="en-US" dirty="0"/>
-              <a:t>Measures average prediction error</a:t>
+              <a:t>The price of a diamond is heavily defined by the weight</a:t>
             </a:r>
           </a:p>
           <a:p>
             <a:pPr lvl="1"/>
             <a:r>
               <a:rPr lang="en-US" dirty="0"/>
-              <a:t>Penalizes large errors (squared)</a:t>
+              <a:t>Diamonds have a cut as well, and this cut also has a certain influence</a:t>
             </a:r>
           </a:p>
           <a:p>
             <a:pPr lvl="1"/>
             <a:r>
               <a:rPr lang="en-US" dirty="0"/>
-              <a:t>Great for comparing model performance</a:t>
-            </a:r>
-          </a:p>
-          <a:p>
-            <a:r>
-              <a:rPr lang="en-US" dirty="0"/>
-              <a:t>...but not the whole story</a:t>
+              <a:t>Unfortunately, the influence of the price is so big that this relationship disappears completely</a:t>
+            </a:r>
+          </a:p>
+          <a:p>
+            <a:pPr lvl="1"/>
+            <a:r>
+              <a:rPr lang="en-US" dirty="0"/>
+              <a:t>We could use a linear model on price vs weight to get this influence out of the dataset</a:t>
+            </a:r>
+          </a:p>
+          <a:p>
+            <a:pPr lvl="1"/>
+            <a:r>
+              <a:rPr lang="en-US" dirty="0"/>
+              <a:t>That would enable us to see the actual relationship between cut and price</a:t>
+            </a:r>
+          </a:p>
+          <a:p>
+            <a:r>
+              <a:rPr lang="en-US" dirty="0"/>
+              <a:t>Check out “3 - Diamonds </a:t>
+            </a:r>
+            <a:r>
+              <a:rPr lang="en-US" dirty="0" err="1"/>
+              <a:t>modeling.ipynb</a:t>
+            </a:r>
+            <a:r>
+              <a:rPr lang="en-US" dirty="0"/>
+              <a:t>”</a:t>
             </a:r>
           </a:p>
         </p:txBody>
@@ -16553,7 +16743,7 @@
           <p:cNvPr id="4" name="Slide Number Placeholder 3">
             <a:extLst>
               <a:ext uri="{FF2B5EF4-FFF2-40B4-BE49-F238E27FC236}">
-                <a16:creationId xmlns:a16="http://schemas.microsoft.com/office/drawing/2014/main" id="{9CB2FA89-F02C-CFE7-CAE9-9AF83B940DE1}"/>
+                <a16:creationId xmlns:a16="http://schemas.microsoft.com/office/drawing/2014/main" id="{9A790909-6D5D-DFEE-3898-4FA4A07FD6A2}"/>
               </a:ext>
             </a:extLst>
           </p:cNvPr>
@@ -16573,6 +16763,149 @@
               <a:rPr lang="nl-BE" smtClean="0"/>
               <a:pPr/>
               <a:t>56</a:t>
+            </a:fld>
+            <a:endParaRPr lang="nl-BE"/>
+          </a:p>
+        </p:txBody>
+      </p:sp>
+    </p:spTree>
+    <p:extLst>
+      <p:ext uri="{BB962C8B-B14F-4D97-AF65-F5344CB8AC3E}">
+        <p14:creationId xmlns:p14="http://schemas.microsoft.com/office/powerpoint/2010/main" val="1436249488"/>
+      </p:ext>
+    </p:extLst>
+  </p:cSld>
+  <p:clrMapOvr>
+    <a:masterClrMapping/>
+  </p:clrMapOvr>
+</p:sld>
+</file>
+
+<file path=ppt/slides/slide57.xml><?xml version="1.0" encoding="utf-8"?>
+<p:sld xmlns:a="http://schemas.openxmlformats.org/drawingml/2006/main" xmlns:r="http://schemas.openxmlformats.org/officeDocument/2006/relationships" xmlns:p="http://schemas.openxmlformats.org/presentationml/2006/main">
+  <p:cSld>
+    <p:spTree>
+      <p:nvGrpSpPr>
+        <p:cNvPr id="1" name=""/>
+        <p:cNvGrpSpPr/>
+        <p:nvPr/>
+      </p:nvGrpSpPr>
+      <p:grpSpPr>
+        <a:xfrm>
+          <a:off x="0" y="0"/>
+          <a:ext cx="0" cy="0"/>
+          <a:chOff x="0" y="0"/>
+          <a:chExt cx="0" cy="0"/>
+        </a:xfrm>
+      </p:grpSpPr>
+      <p:sp>
+        <p:nvSpPr>
+          <p:cNvPr id="2" name="Title 1">
+            <a:extLst>
+              <a:ext uri="{FF2B5EF4-FFF2-40B4-BE49-F238E27FC236}">
+                <a16:creationId xmlns:a16="http://schemas.microsoft.com/office/drawing/2014/main" id="{681DB49E-FF9A-F87E-4629-0258B21B9AD2}"/>
+              </a:ext>
+            </a:extLst>
+          </p:cNvPr>
+          <p:cNvSpPr>
+            <a:spLocks noGrp="1"/>
+          </p:cNvSpPr>
+          <p:nvPr>
+            <p:ph type="title"/>
+          </p:nvPr>
+        </p:nvSpPr>
+        <p:spPr/>
+        <p:txBody>
+          <a:bodyPr/>
+          <a:lstStyle/>
+          <a:p>
+            <a:r>
+              <a:rPr lang="en-US" dirty="0"/>
+              <a:t>Linear Regression</a:t>
+            </a:r>
+          </a:p>
+        </p:txBody>
+      </p:sp>
+      <p:sp>
+        <p:nvSpPr>
+          <p:cNvPr id="3" name="Content Placeholder 2">
+            <a:extLst>
+              <a:ext uri="{FF2B5EF4-FFF2-40B4-BE49-F238E27FC236}">
+                <a16:creationId xmlns:a16="http://schemas.microsoft.com/office/drawing/2014/main" id="{B4972F9B-8EC4-14E4-BDBC-3E0372444E04}"/>
+              </a:ext>
+            </a:extLst>
+          </p:cNvPr>
+          <p:cNvSpPr>
+            <a:spLocks noGrp="1"/>
+          </p:cNvSpPr>
+          <p:nvPr>
+            <p:ph idx="1"/>
+          </p:nvPr>
+        </p:nvSpPr>
+        <p:spPr/>
+        <p:txBody>
+          <a:bodyPr/>
+          <a:lstStyle/>
+          <a:p>
+            <a:r>
+              <a:rPr lang="en-US" dirty="0"/>
+              <a:t>RMSE is essential...</a:t>
+            </a:r>
+          </a:p>
+          <a:p>
+            <a:pPr lvl="1"/>
+            <a:r>
+              <a:rPr lang="en-US" dirty="0"/>
+              <a:t>Measures average prediction error</a:t>
+            </a:r>
+          </a:p>
+          <a:p>
+            <a:pPr lvl="1"/>
+            <a:r>
+              <a:rPr lang="en-US" dirty="0"/>
+              <a:t>Penalizes large errors (squared)</a:t>
+            </a:r>
+          </a:p>
+          <a:p>
+            <a:pPr lvl="1"/>
+            <a:r>
+              <a:rPr lang="en-US" dirty="0"/>
+              <a:t>Great for comparing model performance</a:t>
+            </a:r>
+          </a:p>
+          <a:p>
+            <a:r>
+              <a:rPr lang="en-US" dirty="0"/>
+              <a:t>...but not the whole story</a:t>
+            </a:r>
+          </a:p>
+        </p:txBody>
+      </p:sp>
+      <p:sp>
+        <p:nvSpPr>
+          <p:cNvPr id="4" name="Slide Number Placeholder 3">
+            <a:extLst>
+              <a:ext uri="{FF2B5EF4-FFF2-40B4-BE49-F238E27FC236}">
+                <a16:creationId xmlns:a16="http://schemas.microsoft.com/office/drawing/2014/main" id="{9CB2FA89-F02C-CFE7-CAE9-9AF83B940DE1}"/>
+              </a:ext>
+            </a:extLst>
+          </p:cNvPr>
+          <p:cNvSpPr>
+            <a:spLocks noGrp="1"/>
+          </p:cNvSpPr>
+          <p:nvPr>
+            <p:ph type="sldNum" sz="quarter" idx="12"/>
+          </p:nvPr>
+        </p:nvSpPr>
+        <p:spPr/>
+        <p:txBody>
+          <a:bodyPr/>
+          <a:lstStyle/>
+          <a:p>
+            <a:fld id="{FE1B3154-47D9-4402-8EDB-E791933DC0B9}" type="slidenum">
+              <a:rPr lang="nl-BE" smtClean="0"/>
+              <a:pPr/>
+              <a:t>57</a:t>
             </a:fld>
             <a:endParaRPr lang="nl-BE"/>
           </a:p>
@@ -16999,190 +17332,6 @@
 </p:sld>
 </file>
 
-<file path=ppt/slides/slide57.xml><?xml version="1.0" encoding="utf-8"?>
-<p:sld xmlns:a="http://schemas.openxmlformats.org/drawingml/2006/main" xmlns:r="http://schemas.openxmlformats.org/officeDocument/2006/relationships" xmlns:p="http://schemas.openxmlformats.org/presentationml/2006/main">
-  <p:cSld>
-    <p:spTree>
-      <p:nvGrpSpPr>
-        <p:cNvPr id="1" name=""/>
-        <p:cNvGrpSpPr/>
-        <p:nvPr/>
-      </p:nvGrpSpPr>
-      <p:grpSpPr>
-        <a:xfrm>
-          <a:off x="0" y="0"/>
-          <a:ext cx="0" cy="0"/>
-          <a:chOff x="0" y="0"/>
-          <a:chExt cx="0" cy="0"/>
-        </a:xfrm>
-      </p:grpSpPr>
-      <p:sp>
-        <p:nvSpPr>
-          <p:cNvPr id="2" name="Title 1">
-            <a:extLst>
-              <a:ext uri="{FF2B5EF4-FFF2-40B4-BE49-F238E27FC236}">
-                <a16:creationId xmlns:a16="http://schemas.microsoft.com/office/drawing/2014/main" id="{BCFE166A-74F1-63FB-2E42-4D1B615A7E73}"/>
-              </a:ext>
-            </a:extLst>
-          </p:cNvPr>
-          <p:cNvSpPr>
-            <a:spLocks noGrp="1"/>
-          </p:cNvSpPr>
-          <p:nvPr>
-            <p:ph type="title"/>
-          </p:nvPr>
-        </p:nvSpPr>
-        <p:spPr/>
-        <p:txBody>
-          <a:bodyPr/>
-          <a:lstStyle/>
-          <a:p>
-            <a:r>
-              <a:rPr lang="en-US" dirty="0"/>
-              <a:t>Support Vector Machines (SVM)</a:t>
-            </a:r>
-          </a:p>
-        </p:txBody>
-      </p:sp>
-      <p:sp>
-        <p:nvSpPr>
-          <p:cNvPr id="3" name="Content Placeholder 2">
-            <a:extLst>
-              <a:ext uri="{FF2B5EF4-FFF2-40B4-BE49-F238E27FC236}">
-                <a16:creationId xmlns:a16="http://schemas.microsoft.com/office/drawing/2014/main" id="{360100C9-F877-6DF4-B545-51436CC6D7B8}"/>
-              </a:ext>
-            </a:extLst>
-          </p:cNvPr>
-          <p:cNvSpPr>
-            <a:spLocks noGrp="1"/>
-          </p:cNvSpPr>
-          <p:nvPr>
-            <p:ph idx="1"/>
-          </p:nvPr>
-        </p:nvSpPr>
-        <p:spPr/>
-        <p:txBody>
-          <a:bodyPr>
-            <a:normAutofit/>
-          </a:bodyPr>
-          <a:lstStyle/>
-          <a:p>
-            <a:r>
-              <a:rPr lang="en-US" dirty="0"/>
-              <a:t>A </a:t>
-            </a:r>
-            <a:r>
-              <a:rPr lang="en-US" b="1" dirty="0"/>
-              <a:t>Support Vector Machine (SVM)</a:t>
-            </a:r>
-            <a:r>
-              <a:rPr lang="en-US" dirty="0"/>
-              <a:t> is a </a:t>
-            </a:r>
-            <a:r>
-              <a:rPr lang="en-US" b="1" dirty="0"/>
-              <a:t>supervised machine learning algorithm</a:t>
-            </a:r>
-            <a:r>
-              <a:rPr lang="en-US" dirty="0"/>
-              <a:t> used for </a:t>
-            </a:r>
-            <a:r>
-              <a:rPr lang="en-US" b="1" dirty="0"/>
-              <a:t>classification</a:t>
-            </a:r>
-            <a:r>
-              <a:rPr lang="en-US" dirty="0"/>
-              <a:t> (mainly) and sometimes for </a:t>
-            </a:r>
-            <a:r>
-              <a:rPr lang="en-US" b="1" dirty="0"/>
-              <a:t>regression</a:t>
-            </a:r>
-            <a:r>
-              <a:rPr lang="en-US" dirty="0"/>
-              <a:t> tasks</a:t>
-            </a:r>
-          </a:p>
-          <a:p>
-            <a:r>
-              <a:rPr lang="en-US" dirty="0"/>
-              <a:t>How It Works (Intuitively)</a:t>
-            </a:r>
-          </a:p>
-          <a:p>
-            <a:pPr lvl="1"/>
-            <a:r>
-              <a:rPr lang="en-US" dirty="0"/>
-              <a:t>Plot the Data in n-Dimensional Space: Each data point is a vector of features.</a:t>
-            </a:r>
-          </a:p>
-          <a:p>
-            <a:pPr lvl="1"/>
-            <a:r>
-              <a:rPr lang="en-US" dirty="0"/>
-              <a:t>Find a Hyperplane: A hyperplane is just a line (2D), plane (3D), or higher-dimensional flat surface that divides the space.</a:t>
-            </a:r>
-          </a:p>
-          <a:p>
-            <a:pPr lvl="1"/>
-            <a:r>
-              <a:rPr lang="en-US" dirty="0"/>
-              <a:t>Maximize the Margin: SVM chooses the hyperplane with the greatest distance to the nearest points from either class.</a:t>
-            </a:r>
-          </a:p>
-          <a:p>
-            <a:pPr lvl="1"/>
-            <a:r>
-              <a:rPr lang="en-US" dirty="0"/>
-              <a:t>Use the Support Vectors: Only the closest points (support vectors) affect the decision boundary. All others are ignored.</a:t>
-            </a:r>
-          </a:p>
-        </p:txBody>
-      </p:sp>
-      <p:sp>
-        <p:nvSpPr>
-          <p:cNvPr id="4" name="Slide Number Placeholder 3">
-            <a:extLst>
-              <a:ext uri="{FF2B5EF4-FFF2-40B4-BE49-F238E27FC236}">
-                <a16:creationId xmlns:a16="http://schemas.microsoft.com/office/drawing/2014/main" id="{F90D3B92-8446-3720-2AA6-E15793657444}"/>
-              </a:ext>
-            </a:extLst>
-          </p:cNvPr>
-          <p:cNvSpPr>
-            <a:spLocks noGrp="1"/>
-          </p:cNvSpPr>
-          <p:nvPr>
-            <p:ph type="sldNum" sz="quarter" idx="12"/>
-          </p:nvPr>
-        </p:nvSpPr>
-        <p:spPr/>
-        <p:txBody>
-          <a:bodyPr/>
-          <a:lstStyle/>
-          <a:p>
-            <a:fld id="{FE1B3154-47D9-4402-8EDB-E791933DC0B9}" type="slidenum">
-              <a:rPr lang="nl-BE" smtClean="0"/>
-              <a:pPr/>
-              <a:t>57</a:t>
-            </a:fld>
-            <a:endParaRPr lang="nl-BE"/>
-          </a:p>
-        </p:txBody>
-      </p:sp>
-    </p:spTree>
-    <p:extLst>
-      <p:ext uri="{BB962C8B-B14F-4D97-AF65-F5344CB8AC3E}">
-        <p14:creationId xmlns:p14="http://schemas.microsoft.com/office/powerpoint/2010/main" val="711955372"/>
-      </p:ext>
-    </p:extLst>
-  </p:cSld>
-  <p:clrMapOvr>
-    <a:masterClrMapping/>
-  </p:clrMapOvr>
-</p:sld>
-</file>
-
 <file path=ppt/slides/slide58.xml><?xml version="1.0" encoding="utf-8"?>
 <p:sld xmlns:a="http://schemas.openxmlformats.org/drawingml/2006/main" xmlns:r="http://schemas.openxmlformats.org/officeDocument/2006/relationships" xmlns:p="http://schemas.openxmlformats.org/presentationml/2006/main">
   <p:cSld>
@@ -17205,7 +17354,7 @@
           <p:cNvPr id="2" name="Title 1">
             <a:extLst>
               <a:ext uri="{FF2B5EF4-FFF2-40B4-BE49-F238E27FC236}">
-                <a16:creationId xmlns:a16="http://schemas.microsoft.com/office/drawing/2014/main" id="{F7A15826-3B76-8292-DC2D-5E012A72DEE5}"/>
+                <a16:creationId xmlns:a16="http://schemas.microsoft.com/office/drawing/2014/main" id="{BCFE166A-74F1-63FB-2E42-4D1B615A7E73}"/>
               </a:ext>
             </a:extLst>
           </p:cNvPr>
@@ -17233,7 +17382,7 @@
           <p:cNvPr id="3" name="Content Placeholder 2">
             <a:extLst>
               <a:ext uri="{FF2B5EF4-FFF2-40B4-BE49-F238E27FC236}">
-                <a16:creationId xmlns:a16="http://schemas.microsoft.com/office/drawing/2014/main" id="{778BCF80-F750-4428-C608-838C0FA27A0B}"/>
+                <a16:creationId xmlns:a16="http://schemas.microsoft.com/office/drawing/2014/main" id="{360100C9-F877-6DF4-B545-51436CC6D7B8}"/>
               </a:ext>
             </a:extLst>
           </p:cNvPr>
@@ -17247,80 +17396,79 @@
         <p:spPr/>
         <p:txBody>
           <a:bodyPr>
-            <a:normAutofit fontScale="92500" lnSpcReduction="10000"/>
+            <a:normAutofit/>
           </a:bodyPr>
           <a:lstStyle/>
           <a:p>
             <a:r>
               <a:rPr lang="en-US" dirty="0"/>
-              <a:t>Instead of computing dot products in high-dimensional space (which is expensive), the kernel function computes it directly.</a:t>
-            </a:r>
-          </a:p>
-          <a:p>
-            <a:r>
-              <a:rPr lang="en-US" dirty="0"/>
-              <a:t>Common kernels:</a:t>
-            </a:r>
-            <a:br>
-              <a:rPr lang="en-US" dirty="0"/>
-            </a:br>
-            <a:r>
-              <a:rPr lang="en-US" dirty="0"/>
-              <a:t>  Linear, Polynomial, Radial Basis Function (RBF/Gaussian), Sigmoid</a:t>
-            </a:r>
-          </a:p>
-          <a:p>
-            <a:r>
-              <a:rPr lang="en-US" dirty="0"/>
-              <a:t>Pros:</a:t>
+              <a:t>A </a:t>
+            </a:r>
+            <a:r>
+              <a:rPr lang="en-US" b="1" dirty="0"/>
+              <a:t>Support Vector Machine (SVM)</a:t>
+            </a:r>
+            <a:r>
+              <a:rPr lang="en-US" dirty="0"/>
+              <a:t> is a </a:t>
+            </a:r>
+            <a:r>
+              <a:rPr lang="en-US" b="1" dirty="0"/>
+              <a:t>supervised machine learning algorithm</a:t>
+            </a:r>
+            <a:r>
+              <a:rPr lang="en-US" dirty="0"/>
+              <a:t> used for </a:t>
+            </a:r>
+            <a:r>
+              <a:rPr lang="en-US" b="1" dirty="0"/>
+              <a:t>classification</a:t>
+            </a:r>
+            <a:r>
+              <a:rPr lang="en-US" dirty="0"/>
+              <a:t> (mainly) and sometimes for </a:t>
+            </a:r>
+            <a:r>
+              <a:rPr lang="en-US" b="1" dirty="0"/>
+              <a:t>regression</a:t>
+            </a:r>
+            <a:r>
+              <a:rPr lang="en-US" dirty="0"/>
+              <a:t> tasks</a:t>
+            </a:r>
+          </a:p>
+          <a:p>
+            <a:r>
+              <a:rPr lang="en-US" dirty="0"/>
+              <a:t>How It Works (Intuitively)</a:t>
             </a:r>
           </a:p>
           <a:p>
             <a:pPr lvl="1"/>
             <a:r>
               <a:rPr lang="en-US" dirty="0"/>
-              <a:t>Works well with high-dimensional data</a:t>
+              <a:t>Plot the Data in n-Dimensional Space: Each data point is a vector of features.</a:t>
             </a:r>
           </a:p>
           <a:p>
             <a:pPr lvl="1"/>
             <a:r>
               <a:rPr lang="en-US" dirty="0"/>
-              <a:t>Effective when there’s a clear margin of separation</a:t>
+              <a:t>Find a Hyperplane: A hyperplane is just a line (2D), plane (3D), or higher-dimensional flat surface that divides the space.</a:t>
             </a:r>
           </a:p>
           <a:p>
             <a:pPr lvl="1"/>
             <a:r>
               <a:rPr lang="en-US" dirty="0"/>
-              <a:t>Robust to overfitting, especially in high dimensions</a:t>
-            </a:r>
-          </a:p>
-          <a:p>
-            <a:r>
-              <a:rPr lang="en-US" dirty="0"/>
-              <a:t>Cons</a:t>
+              <a:t>Maximize the Margin: SVM chooses the hyperplane with the greatest distance to the nearest points from either class.</a:t>
             </a:r>
           </a:p>
           <a:p>
             <a:pPr lvl="1"/>
             <a:r>
               <a:rPr lang="en-US" dirty="0"/>
-              <a:t>Not great for very large datasets (slow training)</a:t>
-            </a:r>
-          </a:p>
-          <a:p>
-            <a:pPr lvl="1"/>
-            <a:r>
-              <a:rPr lang="en-US" dirty="0"/>
-              <a:t>Poor performance when data is highly overlapping</a:t>
-            </a:r>
-          </a:p>
-          <a:p>
-            <a:pPr lvl="1"/>
-            <a:r>
-              <a:rPr lang="en-US" dirty="0"/>
-              <a:t>Choice of kernel and hyperparameters can be tricky</a:t>
+              <a:t>Use the Support Vectors: Only the closest points (support vectors) affect the decision boundary. All others are ignored.</a:t>
             </a:r>
           </a:p>
         </p:txBody>
@@ -17330,7 +17478,7 @@
           <p:cNvPr id="4" name="Slide Number Placeholder 3">
             <a:extLst>
               <a:ext uri="{FF2B5EF4-FFF2-40B4-BE49-F238E27FC236}">
-                <a16:creationId xmlns:a16="http://schemas.microsoft.com/office/drawing/2014/main" id="{4B2CF0D7-6E82-AFDC-EF94-3D9B37971F52}"/>
+                <a16:creationId xmlns:a16="http://schemas.microsoft.com/office/drawing/2014/main" id="{F90D3B92-8446-3720-2AA6-E15793657444}"/>
               </a:ext>
             </a:extLst>
           </p:cNvPr>
@@ -17358,7 +17506,7 @@
     </p:spTree>
     <p:extLst>
       <p:ext uri="{BB962C8B-B14F-4D97-AF65-F5344CB8AC3E}">
-        <p14:creationId xmlns:p14="http://schemas.microsoft.com/office/powerpoint/2010/main" val="3703530799"/>
+        <p14:creationId xmlns:p14="http://schemas.microsoft.com/office/powerpoint/2010/main" val="711955372"/>
       </p:ext>
     </p:extLst>
   </p:cSld>
@@ -17390,7 +17538,7 @@
           <p:cNvPr id="2" name="Title 1">
             <a:extLst>
               <a:ext uri="{FF2B5EF4-FFF2-40B4-BE49-F238E27FC236}">
-                <a16:creationId xmlns:a16="http://schemas.microsoft.com/office/drawing/2014/main" id="{70A6C17B-9A94-E99E-DAEE-7D1D76A1709F}"/>
+                <a16:creationId xmlns:a16="http://schemas.microsoft.com/office/drawing/2014/main" id="{F7A15826-3B76-8292-DC2D-5E012A72DEE5}"/>
               </a:ext>
             </a:extLst>
           </p:cNvPr>
@@ -17408,7 +17556,7 @@
           <a:p>
             <a:r>
               <a:rPr lang="en-US" dirty="0"/>
-              <a:t>Instance based methods</a:t>
+              <a:t>Support Vector Machines (SVM)</a:t>
             </a:r>
           </a:p>
         </p:txBody>
@@ -17418,7 +17566,7 @@
           <p:cNvPr id="3" name="Content Placeholder 2">
             <a:extLst>
               <a:ext uri="{FF2B5EF4-FFF2-40B4-BE49-F238E27FC236}">
-                <a16:creationId xmlns:a16="http://schemas.microsoft.com/office/drawing/2014/main" id="{EA6B64F2-E40B-D876-6156-E353F88EE6E3}"/>
+                <a16:creationId xmlns:a16="http://schemas.microsoft.com/office/drawing/2014/main" id="{778BCF80-F750-4428-C608-838C0FA27A0B}"/>
               </a:ext>
             </a:extLst>
           </p:cNvPr>
@@ -17432,67 +17580,80 @@
         <p:spPr/>
         <p:txBody>
           <a:bodyPr>
-            <a:normAutofit fontScale="92500" lnSpcReduction="20000"/>
+            <a:normAutofit fontScale="92500" lnSpcReduction="10000"/>
           </a:bodyPr>
           <a:lstStyle/>
           <a:p>
             <a:r>
               <a:rPr lang="en-US" dirty="0"/>
-              <a:t>k-Nearest Neighbors (k-NN) is a supervised learning algorithm used for both classification and regression (though it's more commonly used for classification)</a:t>
-            </a:r>
-          </a:p>
-          <a:p>
-            <a:r>
-              <a:rPr lang="en-US" dirty="0"/>
-              <a:t>A lazy learning algorithm, meaning it doesn’t actually learn a model during training but it stores the training data and makes decisions only at prediction time</a:t>
-            </a:r>
-          </a:p>
-          <a:p>
-            <a:r>
-              <a:rPr lang="en-US" dirty="0"/>
-              <a:t>How It Works (Intuitively)</a:t>
+              <a:t>Instead of computing dot products in high-dimensional space (which is expensive), the kernel function computes it directly.</a:t>
+            </a:r>
+          </a:p>
+          <a:p>
+            <a:r>
+              <a:rPr lang="en-US" dirty="0"/>
+              <a:t>Common kernels:</a:t>
+            </a:r>
+            <a:br>
+              <a:rPr lang="en-US" dirty="0"/>
+            </a:br>
+            <a:r>
+              <a:rPr lang="en-US" dirty="0"/>
+              <a:t>  Linear, Polynomial, Radial Basis Function (RBF/Gaussian), Sigmoid</a:t>
+            </a:r>
+          </a:p>
+          <a:p>
+            <a:r>
+              <a:rPr lang="en-US" dirty="0"/>
+              <a:t>Pros:</a:t>
             </a:r>
           </a:p>
           <a:p>
             <a:pPr lvl="1"/>
             <a:r>
               <a:rPr lang="en-US" dirty="0"/>
-              <a:t>Pick a number k — this is the number of neighbors to consider.</a:t>
+              <a:t>Works well with high-dimensional data</a:t>
             </a:r>
           </a:p>
           <a:p>
             <a:pPr lvl="1"/>
             <a:r>
               <a:rPr lang="en-US" dirty="0"/>
-              <a:t>Calculate distances between the new (unknown) data point and all training data points (commonly using Euclidean distance).</a:t>
+              <a:t>Effective when there’s a clear margin of separation</a:t>
             </a:r>
           </a:p>
           <a:p>
             <a:pPr lvl="1"/>
             <a:r>
               <a:rPr lang="en-US" dirty="0"/>
-              <a:t>Find the k closest data points (neighbors).</a:t>
+              <a:t>Robust to overfitting, especially in high dimensions</a:t>
+            </a:r>
+          </a:p>
+          <a:p>
+            <a:r>
+              <a:rPr lang="en-US" dirty="0"/>
+              <a:t>Cons</a:t>
             </a:r>
           </a:p>
           <a:p>
             <a:pPr lvl="1"/>
             <a:r>
               <a:rPr lang="en-US" dirty="0"/>
-              <a:t>Vote:</a:t>
-            </a:r>
-          </a:p>
-          <a:p>
-            <a:pPr lvl="2"/>
-            <a:r>
-              <a:rPr lang="en-US" dirty="0"/>
-              <a:t>For classification → assign the majority class among the neighbors.</a:t>
-            </a:r>
-          </a:p>
-          <a:p>
-            <a:pPr lvl="2"/>
-            <a:r>
-              <a:rPr lang="en-US" dirty="0"/>
-              <a:t>For regression → return the average value of the neighbors.</a:t>
+              <a:t>Not great for very large datasets (slow training)</a:t>
+            </a:r>
+          </a:p>
+          <a:p>
+            <a:pPr lvl="1"/>
+            <a:r>
+              <a:rPr lang="en-US" dirty="0"/>
+              <a:t>Poor performance when data is highly overlapping</a:t>
+            </a:r>
+          </a:p>
+          <a:p>
+            <a:pPr lvl="1"/>
+            <a:r>
+              <a:rPr lang="en-US" dirty="0"/>
+              <a:t>Choice of kernel and hyperparameters can be tricky</a:t>
             </a:r>
           </a:p>
         </p:txBody>
@@ -17502,7 +17663,7 @@
           <p:cNvPr id="4" name="Slide Number Placeholder 3">
             <a:extLst>
               <a:ext uri="{FF2B5EF4-FFF2-40B4-BE49-F238E27FC236}">
-                <a16:creationId xmlns:a16="http://schemas.microsoft.com/office/drawing/2014/main" id="{31503173-0DEE-A66B-4459-B0E827F28D7F}"/>
+                <a16:creationId xmlns:a16="http://schemas.microsoft.com/office/drawing/2014/main" id="{4B2CF0D7-6E82-AFDC-EF94-3D9B37971F52}"/>
               </a:ext>
             </a:extLst>
           </p:cNvPr>
@@ -17530,7 +17691,7 @@
     </p:spTree>
     <p:extLst>
       <p:ext uri="{BB962C8B-B14F-4D97-AF65-F5344CB8AC3E}">
-        <p14:creationId xmlns:p14="http://schemas.microsoft.com/office/powerpoint/2010/main" val="391236168"/>
+        <p14:creationId xmlns:p14="http://schemas.microsoft.com/office/powerpoint/2010/main" val="3703530799"/>
       </p:ext>
     </p:extLst>
   </p:cSld>
@@ -17725,7 +17886,7 @@
           <p:cNvPr id="2" name="Title 1">
             <a:extLst>
               <a:ext uri="{FF2B5EF4-FFF2-40B4-BE49-F238E27FC236}">
-                <a16:creationId xmlns:a16="http://schemas.microsoft.com/office/drawing/2014/main" id="{AEC72493-20D6-E16A-6CFC-C6CBB9431FBC}"/>
+                <a16:creationId xmlns:a16="http://schemas.microsoft.com/office/drawing/2014/main" id="{70A6C17B-9A94-E99E-DAEE-7D1D76A1709F}"/>
               </a:ext>
             </a:extLst>
           </p:cNvPr>
@@ -17743,13 +17904,8 @@
           <a:p>
             <a:r>
               <a:rPr lang="en-US" dirty="0"/>
-              <a:t>Instance based methods - </a:t>
-            </a:r>
-            <a:r>
-              <a:rPr lang="en-US" dirty="0" err="1"/>
-              <a:t>kNN</a:t>
-            </a:r>
-            <a:endParaRPr lang="en-US" dirty="0"/>
+              <a:t>Instance based methods</a:t>
+            </a:r>
           </a:p>
         </p:txBody>
       </p:sp>
@@ -17758,7 +17914,7 @@
           <p:cNvPr id="3" name="Content Placeholder 2">
             <a:extLst>
               <a:ext uri="{FF2B5EF4-FFF2-40B4-BE49-F238E27FC236}">
-                <a16:creationId xmlns:a16="http://schemas.microsoft.com/office/drawing/2014/main" id="{FD077CB6-19C0-BC5E-2CCA-73833E4F6FB6}"/>
+                <a16:creationId xmlns:a16="http://schemas.microsoft.com/office/drawing/2014/main" id="{EA6B64F2-E40B-D876-6156-E353F88EE6E3}"/>
               </a:ext>
             </a:extLst>
           </p:cNvPr>
@@ -17772,60 +17928,67 @@
         <p:spPr/>
         <p:txBody>
           <a:bodyPr>
-            <a:normAutofit/>
+            <a:normAutofit fontScale="92500" lnSpcReduction="20000"/>
           </a:bodyPr>
           <a:lstStyle/>
           <a:p>
             <a:r>
               <a:rPr lang="en-US" dirty="0"/>
-              <a:t>Example: Suppose you're trying to classify a fruit as an apple or an orange, based on its weight and color</a:t>
-            </a:r>
-          </a:p>
-          <a:p>
-            <a:r>
-              <a:rPr lang="en-US" dirty="0"/>
-              <a:t>If k=3, the algorithm will:</a:t>
+              <a:t>k-Nearest Neighbors (k-NN) is a supervised learning algorithm used for both classification and regression (though it's more commonly used for classification)</a:t>
+            </a:r>
+          </a:p>
+          <a:p>
+            <a:r>
+              <a:rPr lang="en-US" dirty="0"/>
+              <a:t>A lazy learning algorithm, meaning it doesn’t actually learn a model during training but it stores the training data and makes decisions only at prediction time</a:t>
+            </a:r>
+          </a:p>
+          <a:p>
+            <a:r>
+              <a:rPr lang="en-US" dirty="0"/>
+              <a:t>How It Works (Intuitively)</a:t>
             </a:r>
           </a:p>
           <a:p>
             <a:pPr lvl="1"/>
             <a:r>
               <a:rPr lang="en-US" dirty="0"/>
-              <a:t>Look at the 3 closest fruits in your dataset</a:t>
+              <a:t>Pick a number k — this is the number of neighbors to consider.</a:t>
             </a:r>
           </a:p>
           <a:p>
             <a:pPr lvl="1"/>
             <a:r>
               <a:rPr lang="en-US" dirty="0"/>
-              <a:t>If 2 are apples and 1 is an orange → predict apple</a:t>
-            </a:r>
-          </a:p>
-          <a:p>
-            <a:r>
-              <a:rPr lang="en-US" dirty="0"/>
-              <a:t>Choosing k</a:t>
+              <a:t>Calculate distances between the new (unknown) data point and all training data points (commonly using Euclidean distance).</a:t>
             </a:r>
           </a:p>
           <a:p>
             <a:pPr lvl="1"/>
             <a:r>
               <a:rPr lang="en-US" dirty="0"/>
-              <a:t>Small k (e.g. 1) → sensitive to noise (overfitting).</a:t>
+              <a:t>Find the k closest data points (neighbors).</a:t>
             </a:r>
           </a:p>
           <a:p>
             <a:pPr lvl="1"/>
             <a:r>
               <a:rPr lang="en-US" dirty="0"/>
-              <a:t>Large k → smoother decision boundaries but may underfit.</a:t>
-            </a:r>
-          </a:p>
-          <a:p>
-            <a:pPr lvl="1"/>
-            <a:r>
-              <a:rPr lang="en-US" dirty="0"/>
-              <a:t>Typically, odd k values are used to avoid ties in binary classification.</a:t>
+              <a:t>Vote:</a:t>
+            </a:r>
+          </a:p>
+          <a:p>
+            <a:pPr lvl="2"/>
+            <a:r>
+              <a:rPr lang="en-US" dirty="0"/>
+              <a:t>For classification → assign the majority class among the neighbors.</a:t>
+            </a:r>
+          </a:p>
+          <a:p>
+            <a:pPr lvl="2"/>
+            <a:r>
+              <a:rPr lang="en-US" dirty="0"/>
+              <a:t>For regression → return the average value of the neighbors.</a:t>
             </a:r>
           </a:p>
         </p:txBody>
@@ -17835,7 +17998,7 @@
           <p:cNvPr id="4" name="Slide Number Placeholder 3">
             <a:extLst>
               <a:ext uri="{FF2B5EF4-FFF2-40B4-BE49-F238E27FC236}">
-                <a16:creationId xmlns:a16="http://schemas.microsoft.com/office/drawing/2014/main" id="{A0B61D7A-5D48-521E-F963-ABA6CE974CCC}"/>
+                <a16:creationId xmlns:a16="http://schemas.microsoft.com/office/drawing/2014/main" id="{31503173-0DEE-A66B-4459-B0E827F28D7F}"/>
               </a:ext>
             </a:extLst>
           </p:cNvPr>
@@ -17863,7 +18026,7 @@
     </p:spTree>
     <p:extLst>
       <p:ext uri="{BB962C8B-B14F-4D97-AF65-F5344CB8AC3E}">
-        <p14:creationId xmlns:p14="http://schemas.microsoft.com/office/powerpoint/2010/main" val="48011981"/>
+        <p14:creationId xmlns:p14="http://schemas.microsoft.com/office/powerpoint/2010/main" val="391236168"/>
       </p:ext>
     </p:extLst>
   </p:cSld>
@@ -17895,7 +18058,7 @@
           <p:cNvPr id="2" name="Title 1">
             <a:extLst>
               <a:ext uri="{FF2B5EF4-FFF2-40B4-BE49-F238E27FC236}">
-                <a16:creationId xmlns:a16="http://schemas.microsoft.com/office/drawing/2014/main" id="{87C570BF-98A7-37F6-A0EE-4BE001B3D119}"/>
+                <a16:creationId xmlns:a16="http://schemas.microsoft.com/office/drawing/2014/main" id="{AEC72493-20D6-E16A-6CFC-C6CBB9431FBC}"/>
               </a:ext>
             </a:extLst>
           </p:cNvPr>
@@ -17928,7 +18091,7 @@
           <p:cNvPr id="3" name="Content Placeholder 2">
             <a:extLst>
               <a:ext uri="{FF2B5EF4-FFF2-40B4-BE49-F238E27FC236}">
-                <a16:creationId xmlns:a16="http://schemas.microsoft.com/office/drawing/2014/main" id="{84B1DAEE-6462-785C-B916-8CD86AA83642}"/>
+                <a16:creationId xmlns:a16="http://schemas.microsoft.com/office/drawing/2014/main" id="{FD077CB6-19C0-BC5E-2CCA-73833E4F6FB6}"/>
               </a:ext>
             </a:extLst>
           </p:cNvPr>
@@ -17948,55 +18111,54 @@
           <a:p>
             <a:r>
               <a:rPr lang="en-US" dirty="0"/>
-              <a:t>Pros</a:t>
+              <a:t>Example: Suppose you're trying to classify a fruit as an apple or an orange, based on its weight and color</a:t>
+            </a:r>
+          </a:p>
+          <a:p>
+            <a:r>
+              <a:rPr lang="en-US" dirty="0"/>
+              <a:t>If k=3, the algorithm will:</a:t>
             </a:r>
           </a:p>
           <a:p>
             <a:pPr lvl="1"/>
             <a:r>
               <a:rPr lang="en-US" dirty="0"/>
-              <a:t>Simple and intuitive</a:t>
+              <a:t>Look at the 3 closest fruits in your dataset</a:t>
             </a:r>
           </a:p>
           <a:p>
             <a:pPr lvl="1"/>
             <a:r>
               <a:rPr lang="en-US" dirty="0"/>
-              <a:t>No training phase — fast to set up</a:t>
+              <a:t>If 2 are apples and 1 is an orange → predict apple</a:t>
+            </a:r>
+          </a:p>
+          <a:p>
+            <a:r>
+              <a:rPr lang="en-US" dirty="0"/>
+              <a:t>Choosing k</a:t>
             </a:r>
           </a:p>
           <a:p>
             <a:pPr lvl="1"/>
             <a:r>
               <a:rPr lang="en-US" dirty="0"/>
-              <a:t>Works well with small datasets and well-separated classes</a:t>
-            </a:r>
-          </a:p>
-          <a:p>
-            <a:r>
-              <a:rPr lang="en-US" dirty="0"/>
-              <a:t>Cons</a:t>
+              <a:t>Small k (e.g. 1) → sensitive to noise (overfitting).</a:t>
             </a:r>
           </a:p>
           <a:p>
             <a:pPr lvl="1"/>
             <a:r>
               <a:rPr lang="en-US" dirty="0"/>
-              <a:t>Slow at prediction time for large datasets (needs to compare to all points)</a:t>
+              <a:t>Large k → smoother decision boundaries but may underfit.</a:t>
             </a:r>
           </a:p>
           <a:p>
             <a:pPr lvl="1"/>
             <a:r>
               <a:rPr lang="en-US" dirty="0"/>
-              <a:t>Sensitive to irrelevant or unscaled features</a:t>
-            </a:r>
-          </a:p>
-          <a:p>
-            <a:pPr lvl="1"/>
-            <a:r>
-              <a:rPr lang="en-US" dirty="0"/>
-              <a:t>Poor performance in high-dimensional spaces (curse of dimensionality)</a:t>
+              <a:t>Typically, odd k values are used to avoid ties in binary classification.</a:t>
             </a:r>
           </a:p>
         </p:txBody>
@@ -18006,7 +18168,7 @@
           <p:cNvPr id="4" name="Slide Number Placeholder 3">
             <a:extLst>
               <a:ext uri="{FF2B5EF4-FFF2-40B4-BE49-F238E27FC236}">
-                <a16:creationId xmlns:a16="http://schemas.microsoft.com/office/drawing/2014/main" id="{3E29E1EB-8236-4E45-28FE-AB7E2BF1BB23}"/>
+                <a16:creationId xmlns:a16="http://schemas.microsoft.com/office/drawing/2014/main" id="{A0B61D7A-5D48-521E-F963-ABA6CE974CCC}"/>
               </a:ext>
             </a:extLst>
           </p:cNvPr>
@@ -18034,7 +18196,7 @@
     </p:spTree>
     <p:extLst>
       <p:ext uri="{BB962C8B-B14F-4D97-AF65-F5344CB8AC3E}">
-        <p14:creationId xmlns:p14="http://schemas.microsoft.com/office/powerpoint/2010/main" val="4101153791"/>
+        <p14:creationId xmlns:p14="http://schemas.microsoft.com/office/powerpoint/2010/main" val="48011981"/>
       </p:ext>
     </p:extLst>
   </p:cSld>
@@ -18066,7 +18228,7 @@
           <p:cNvPr id="2" name="Title 1">
             <a:extLst>
               <a:ext uri="{FF2B5EF4-FFF2-40B4-BE49-F238E27FC236}">
-                <a16:creationId xmlns:a16="http://schemas.microsoft.com/office/drawing/2014/main" id="{70D80694-C1C0-8527-8F0B-A5B0E2B2111B}"/>
+                <a16:creationId xmlns:a16="http://schemas.microsoft.com/office/drawing/2014/main" id="{87C570BF-98A7-37F6-A0EE-4BE001B3D119}"/>
               </a:ext>
             </a:extLst>
           </p:cNvPr>
@@ -18084,8 +18246,13 @@
           <a:p>
             <a:r>
               <a:rPr lang="en-US" dirty="0"/>
-              <a:t>Naive Bayes</a:t>
-            </a:r>
+              <a:t>Instance based methods - </a:t>
+            </a:r>
+            <a:r>
+              <a:rPr lang="en-US" dirty="0" err="1"/>
+              <a:t>kNN</a:t>
+            </a:r>
+            <a:endParaRPr lang="en-US" dirty="0"/>
           </a:p>
         </p:txBody>
       </p:sp>
@@ -18094,7 +18261,7 @@
           <p:cNvPr id="3" name="Content Placeholder 2">
             <a:extLst>
               <a:ext uri="{FF2B5EF4-FFF2-40B4-BE49-F238E27FC236}">
-                <a16:creationId xmlns:a16="http://schemas.microsoft.com/office/drawing/2014/main" id="{C58F9872-191D-841A-188B-6A02EF934061}"/>
+                <a16:creationId xmlns:a16="http://schemas.microsoft.com/office/drawing/2014/main" id="{84B1DAEE-6462-785C-B916-8CD86AA83642}"/>
               </a:ext>
             </a:extLst>
           </p:cNvPr>
@@ -18108,69 +18275,62 @@
         <p:spPr/>
         <p:txBody>
           <a:bodyPr>
-            <a:normAutofit lnSpcReduction="10000"/>
+            <a:normAutofit/>
           </a:bodyPr>
           <a:lstStyle/>
           <a:p>
             <a:r>
               <a:rPr lang="en-US" dirty="0"/>
-              <a:t>Naive Bayes is a supervised learning algorithm based on Bayes’ Theorem, used primarily for classification tasks</a:t>
+              <a:t>Pros</a:t>
             </a:r>
           </a:p>
           <a:p>
             <a:pPr lvl="1"/>
             <a:r>
               <a:rPr lang="en-US" dirty="0"/>
-              <a:t>Bayes: because it relies on Bayes’ Theorem</a:t>
+              <a:t>Simple and intuitive</a:t>
             </a:r>
           </a:p>
           <a:p>
             <a:pPr lvl="1"/>
             <a:r>
               <a:rPr lang="en-US" dirty="0"/>
-              <a:t>Naive: because it assumes that features are independent given the class (which is almost never true in practice, but it works surprisingly well)</a:t>
+              <a:t>No training phase — fast to set up</a:t>
             </a:r>
           </a:p>
           <a:p>
             <a:pPr lvl="1"/>
-            <a:endParaRPr lang="en-US" dirty="0"/>
-          </a:p>
-          <a:p>
-            <a:r>
-              <a:rPr lang="en-US" dirty="0"/>
-              <a:t>How it works:</a:t>
+            <a:r>
+              <a:rPr lang="en-US" dirty="0"/>
+              <a:t>Works well with small datasets and well-separated classes</a:t>
+            </a:r>
+          </a:p>
+          <a:p>
+            <a:r>
+              <a:rPr lang="en-US" dirty="0"/>
+              <a:t>Cons</a:t>
             </a:r>
           </a:p>
           <a:p>
             <a:pPr lvl="1"/>
             <a:r>
               <a:rPr lang="en-US" dirty="0"/>
-              <a:t>P(Class | Features): What we want (posterior).</a:t>
+              <a:t>Slow at prediction time for large datasets (needs to compare to all points)</a:t>
             </a:r>
           </a:p>
           <a:p>
             <a:pPr lvl="1"/>
             <a:r>
               <a:rPr lang="en-US" dirty="0"/>
-              <a:t>P(Features | Class): Likelihood — how typical the features are for this class.</a:t>
+              <a:t>Sensitive to irrelevant or unscaled features</a:t>
             </a:r>
           </a:p>
           <a:p>
             <a:pPr lvl="1"/>
             <a:r>
               <a:rPr lang="en-US" dirty="0"/>
-              <a:t>P(Class): Prior — how common this class is overall.</a:t>
-            </a:r>
-          </a:p>
-          <a:p>
-            <a:pPr lvl="1"/>
-            <a:r>
-              <a:rPr lang="en-US" dirty="0"/>
-              <a:t>P(Features): Same for all classes, so can be ignored when comparing.</a:t>
-            </a:r>
-          </a:p>
-          <a:p>
-            <a:endParaRPr lang="en-US" dirty="0"/>
+              <a:t>Poor performance in high-dimensional spaces (curse of dimensionality)</a:t>
+            </a:r>
           </a:p>
         </p:txBody>
       </p:sp>
@@ -18179,7 +18339,7 @@
           <p:cNvPr id="4" name="Slide Number Placeholder 3">
             <a:extLst>
               <a:ext uri="{FF2B5EF4-FFF2-40B4-BE49-F238E27FC236}">
-                <a16:creationId xmlns:a16="http://schemas.microsoft.com/office/drawing/2014/main" id="{12E0BC23-2792-811F-CB3A-7E62569AB1F7}"/>
+                <a16:creationId xmlns:a16="http://schemas.microsoft.com/office/drawing/2014/main" id="{3E29E1EB-8236-4E45-28FE-AB7E2BF1BB23}"/>
               </a:ext>
             </a:extLst>
           </p:cNvPr>
@@ -18199,6 +18359,179 @@
               <a:rPr lang="nl-BE" smtClean="0"/>
               <a:pPr/>
               <a:t>62</a:t>
+            </a:fld>
+            <a:endParaRPr lang="nl-BE"/>
+          </a:p>
+        </p:txBody>
+      </p:sp>
+    </p:spTree>
+    <p:extLst>
+      <p:ext uri="{BB962C8B-B14F-4D97-AF65-F5344CB8AC3E}">
+        <p14:creationId xmlns:p14="http://schemas.microsoft.com/office/powerpoint/2010/main" val="4101153791"/>
+      </p:ext>
+    </p:extLst>
+  </p:cSld>
+  <p:clrMapOvr>
+    <a:masterClrMapping/>
+  </p:clrMapOvr>
+</p:sld>
+</file>
+
+<file path=ppt/slides/slide63.xml><?xml version="1.0" encoding="utf-8"?>
+<p:sld xmlns:a="http://schemas.openxmlformats.org/drawingml/2006/main" xmlns:r="http://schemas.openxmlformats.org/officeDocument/2006/relationships" xmlns:p="http://schemas.openxmlformats.org/presentationml/2006/main">
+  <p:cSld>
+    <p:spTree>
+      <p:nvGrpSpPr>
+        <p:cNvPr id="1" name=""/>
+        <p:cNvGrpSpPr/>
+        <p:nvPr/>
+      </p:nvGrpSpPr>
+      <p:grpSpPr>
+        <a:xfrm>
+          <a:off x="0" y="0"/>
+          <a:ext cx="0" cy="0"/>
+          <a:chOff x="0" y="0"/>
+          <a:chExt cx="0" cy="0"/>
+        </a:xfrm>
+      </p:grpSpPr>
+      <p:sp>
+        <p:nvSpPr>
+          <p:cNvPr id="2" name="Title 1">
+            <a:extLst>
+              <a:ext uri="{FF2B5EF4-FFF2-40B4-BE49-F238E27FC236}">
+                <a16:creationId xmlns:a16="http://schemas.microsoft.com/office/drawing/2014/main" id="{70D80694-C1C0-8527-8F0B-A5B0E2B2111B}"/>
+              </a:ext>
+            </a:extLst>
+          </p:cNvPr>
+          <p:cNvSpPr>
+            <a:spLocks noGrp="1"/>
+          </p:cNvSpPr>
+          <p:nvPr>
+            <p:ph type="title"/>
+          </p:nvPr>
+        </p:nvSpPr>
+        <p:spPr/>
+        <p:txBody>
+          <a:bodyPr/>
+          <a:lstStyle/>
+          <a:p>
+            <a:r>
+              <a:rPr lang="en-US" dirty="0"/>
+              <a:t>Naive Bayes</a:t>
+            </a:r>
+          </a:p>
+        </p:txBody>
+      </p:sp>
+      <p:sp>
+        <p:nvSpPr>
+          <p:cNvPr id="3" name="Content Placeholder 2">
+            <a:extLst>
+              <a:ext uri="{FF2B5EF4-FFF2-40B4-BE49-F238E27FC236}">
+                <a16:creationId xmlns:a16="http://schemas.microsoft.com/office/drawing/2014/main" id="{C58F9872-191D-841A-188B-6A02EF934061}"/>
+              </a:ext>
+            </a:extLst>
+          </p:cNvPr>
+          <p:cNvSpPr>
+            <a:spLocks noGrp="1"/>
+          </p:cNvSpPr>
+          <p:nvPr>
+            <p:ph idx="1"/>
+          </p:nvPr>
+        </p:nvSpPr>
+        <p:spPr/>
+        <p:txBody>
+          <a:bodyPr>
+            <a:normAutofit lnSpcReduction="10000"/>
+          </a:bodyPr>
+          <a:lstStyle/>
+          <a:p>
+            <a:r>
+              <a:rPr lang="en-US" dirty="0"/>
+              <a:t>Naive Bayes is a supervised learning algorithm based on Bayes’ Theorem, used primarily for classification tasks</a:t>
+            </a:r>
+          </a:p>
+          <a:p>
+            <a:pPr lvl="1"/>
+            <a:r>
+              <a:rPr lang="en-US" dirty="0"/>
+              <a:t>Bayes: because it relies on Bayes’ Theorem</a:t>
+            </a:r>
+          </a:p>
+          <a:p>
+            <a:pPr lvl="1"/>
+            <a:r>
+              <a:rPr lang="en-US" dirty="0"/>
+              <a:t>Naive: because it assumes that features are independent given the class (which is almost never true in practice, but it works surprisingly well)</a:t>
+            </a:r>
+          </a:p>
+          <a:p>
+            <a:pPr lvl="1"/>
+            <a:endParaRPr lang="en-US" dirty="0"/>
+          </a:p>
+          <a:p>
+            <a:r>
+              <a:rPr lang="en-US" dirty="0"/>
+              <a:t>How it works:</a:t>
+            </a:r>
+          </a:p>
+          <a:p>
+            <a:pPr lvl="1"/>
+            <a:r>
+              <a:rPr lang="en-US" dirty="0"/>
+              <a:t>P(Class | Features): What we want (posterior).</a:t>
+            </a:r>
+          </a:p>
+          <a:p>
+            <a:pPr lvl="1"/>
+            <a:r>
+              <a:rPr lang="en-US" dirty="0"/>
+              <a:t>P(Features | Class): Likelihood — how typical the features are for this class.</a:t>
+            </a:r>
+          </a:p>
+          <a:p>
+            <a:pPr lvl="1"/>
+            <a:r>
+              <a:rPr lang="en-US" dirty="0"/>
+              <a:t>P(Class): Prior — how common this class is overall.</a:t>
+            </a:r>
+          </a:p>
+          <a:p>
+            <a:pPr lvl="1"/>
+            <a:r>
+              <a:rPr lang="en-US" dirty="0"/>
+              <a:t>P(Features): Same for all classes, so can be ignored when comparing.</a:t>
+            </a:r>
+          </a:p>
+          <a:p>
+            <a:endParaRPr lang="en-US" dirty="0"/>
+          </a:p>
+        </p:txBody>
+      </p:sp>
+      <p:sp>
+        <p:nvSpPr>
+          <p:cNvPr id="4" name="Slide Number Placeholder 3">
+            <a:extLst>
+              <a:ext uri="{FF2B5EF4-FFF2-40B4-BE49-F238E27FC236}">
+                <a16:creationId xmlns:a16="http://schemas.microsoft.com/office/drawing/2014/main" id="{12E0BC23-2792-811F-CB3A-7E62569AB1F7}"/>
+              </a:ext>
+            </a:extLst>
+          </p:cNvPr>
+          <p:cNvSpPr>
+            <a:spLocks noGrp="1"/>
+          </p:cNvSpPr>
+          <p:nvPr>
+            <p:ph type="sldNum" sz="quarter" idx="12"/>
+          </p:nvPr>
+        </p:nvSpPr>
+        <p:spPr/>
+        <p:txBody>
+          <a:bodyPr/>
+          <a:lstStyle/>
+          <a:p>
+            <a:fld id="{FE1B3154-47D9-4402-8EDB-E791933DC0B9}" type="slidenum">
+              <a:rPr lang="nl-BE" smtClean="0"/>
+              <a:pPr/>
+              <a:t>63</a:t>
             </a:fld>
             <a:endParaRPr lang="nl-BE"/>
           </a:p>
@@ -18247,7 +18580,7 @@
 </p:sld>
 </file>
 
-<file path=ppt/slides/slide63.xml><?xml version="1.0" encoding="utf-8"?>
+<file path=ppt/slides/slide64.xml><?xml version="1.0" encoding="utf-8"?>
 <p:sld xmlns:a="http://schemas.openxmlformats.org/drawingml/2006/main" xmlns:r="http://schemas.openxmlformats.org/officeDocument/2006/relationships" xmlns:p="http://schemas.openxmlformats.org/presentationml/2006/main">
   <p:cSld>
     <p:spTree>
@@ -18433,7 +18766,7 @@
             <a:fld id="{FE1B3154-47D9-4402-8EDB-E791933DC0B9}" type="slidenum">
               <a:rPr lang="nl-BE" smtClean="0"/>
               <a:pPr/>
-              <a:t>63</a:t>
+              <a:t>64</a:t>
             </a:fld>
             <a:endParaRPr lang="nl-BE"/>
           </a:p>
@@ -18482,7 +18815,7 @@
 </p:sld>
 </file>
 
-<file path=ppt/slides/slide64.xml><?xml version="1.0" encoding="utf-8"?>
+<file path=ppt/slides/slide65.xml><?xml version="1.0" encoding="utf-8"?>
 <p:sld xmlns:a="http://schemas.openxmlformats.org/drawingml/2006/main" xmlns:r="http://schemas.openxmlformats.org/officeDocument/2006/relationships" xmlns:p="http://schemas.openxmlformats.org/presentationml/2006/main">
   <p:cSld>
     <p:spTree>
@@ -19480,7 +19813,7 @@
             <a:fld id="{FE1B3154-47D9-4402-8EDB-E791933DC0B9}" type="slidenum">
               <a:rPr lang="nl-BE" smtClean="0"/>
               <a:pPr/>
-              <a:t>64</a:t>
+              <a:t>65</a:t>
             </a:fld>
             <a:endParaRPr lang="nl-BE"/>
           </a:p>
@@ -19499,7 +19832,7 @@
 </p:sld>
 </file>
 
-<file path=ppt/slides/slide65.xml><?xml version="1.0" encoding="utf-8"?>
+<file path=ppt/slides/slide66.xml><?xml version="1.0" encoding="utf-8"?>
 <p:sld xmlns:a="http://schemas.openxmlformats.org/drawingml/2006/main" xmlns:r="http://schemas.openxmlformats.org/officeDocument/2006/relationships" xmlns:p="http://schemas.openxmlformats.org/presentationml/2006/main">
   <p:cSld>
     <p:spTree>
@@ -19672,7 +20005,7 @@
             <a:fld id="{FE1B3154-47D9-4402-8EDB-E791933DC0B9}" type="slidenum">
               <a:rPr lang="nl-BE" smtClean="0"/>
               <a:pPr/>
-              <a:t>65</a:t>
+              <a:t>66</a:t>
             </a:fld>
             <a:endParaRPr lang="nl-BE"/>
           </a:p>
